--- a/public/downloads/Medreach-Presentation-Final.pptx
+++ b/public/downloads/Medreach-Presentation-Final.pptx
@@ -1039,7 +1039,7 @@
           <a:p>
             <a:r>
               <a:rPr lang="en-US" dirty="0"/>
-              <a:t>51 automated tests cover triage, matching, scoring, login, roles and privacy views.</a:t>
+              <a:t>62 automated tests cover triage, matching, scoring, login, roles and privacy views.</a:t>
             </a:r>
             <a:endParaRPr lang="en-US" dirty="0"/>
           </a:p>
@@ -1380,16 +1380,9 @@
   <p:cSld name="MR_NIGHT">
     <p:bg>
       <p:bgPr>
-        <a:blipFill dpi="0" rotWithShape="1">
-          <a:blip r:embed="rId1">
-            <a:lum/>
-          </a:blip>
-          <a:srcRect/>
-          <a:stretch>
-            <a:fillRect/>
-          </a:stretch>
-        </a:blipFill>
-        <a:effectLst/>
+        <a:solidFill>
+          <a:srgbClr val="FFFFFF"/>
+        </a:solidFill>
       </p:bgPr>
     </p:bg>
     <p:spTree>
@@ -1432,7 +1425,7 @@
               <a:buNone/>
               <a:defRPr lang="en-US" sz="3400" b="1" dirty="0">
                 <a:solidFill>
-                  <a:schemeClr val="bg1"/>
+                  <a:schemeClr val="tx1"/>
                 </a:solidFill>
               </a:defRPr>
             </a:lvl1pPr>
@@ -1472,7 +1465,7 @@
             <a:r>
               <a:rPr lang="en-US" sz="900" dirty="0">
                 <a:solidFill>
-                  <a:srgbClr val="94A3B8"/>
+                  <a:srgbClr val="64748B"/>
                 </a:solidFill>
               </a:rPr>
               <a:t>Medreach  ·  MPOnline Idea &amp; Innovation Hackathon 2026  ·  Challenge 5, Healthcare</a:t>
@@ -1511,7 +1504,7 @@
             <a:lvl1pPr>
               <a:defRPr sz="900">
                 <a:solidFill>
-                  <a:srgbClr val="94A3B8"/>
+                  <a:srgbClr val="64748B"/>
                 </a:solidFill>
               </a:defRPr>
             </a:lvl1pPr>
@@ -1539,16 +1532,9 @@
   <p:cSld name="MR_COVER">
     <p:bg>
       <p:bgPr>
-        <a:blipFill dpi="0" rotWithShape="1">
-          <a:blip r:embed="rId1">
-            <a:lum/>
-          </a:blip>
-          <a:srcRect/>
-          <a:stretch>
-            <a:fillRect/>
-          </a:stretch>
-        </a:blipFill>
-        <a:effectLst/>
+        <a:solidFill>
+          <a:srgbClr val="FFFFFF"/>
+        </a:solidFill>
       </p:bgPr>
     </p:bg>
     <p:spTree>
@@ -1620,7 +1606,7 @@
             <a:lvl1pPr>
               <a:defRPr sz="900">
                 <a:solidFill>
-                  <a:srgbClr val="94A3B8"/>
+                  <a:srgbClr val="64748B"/>
                 </a:solidFill>
               </a:defRPr>
             </a:lvl1pPr>
@@ -1916,7 +1902,7 @@
       </p:grpSpPr>
       <p:pic>
         <p:nvPicPr>
-          <p:cNvPr id="2" name="logo" descr="preencoded.png">    </p:cNvPr>
+          <p:cNvPr id="2" name="ambulance photo" descr="/tmp/claude-0/-home-user-Sehat-Setu/b06e8423-ed6e-57c3-bbb1-ac94b2a1720d/scratchpad/ppt/crops/cover-white.jpg">    </p:cNvPr>
           <p:cNvPicPr>
             <a:picLocks noChangeAspect="1"/>
           </p:cNvPicPr>
@@ -1930,233 +1916,17 @@
         </p:blipFill>
         <p:spPr>
           <a:xfrm>
-            <a:off x="548640" y="502920"/>
-            <a:ext cx="548640" cy="548640"/>
+            <a:off x="6949440" y="0"/>
+            <a:ext cx="5242255" cy="6858000"/>
           </a:xfrm>
           <a:prstGeom prst="rect">
             <a:avLst/>
           </a:prstGeom>
         </p:spPr>
       </p:pic>
-      <p:sp>
-        <p:nvSpPr>
-          <p:cNvPr id="3" name="Text 0"/>
-          <p:cNvSpPr txBox="1"/>
-          <p:nvPr/>
-        </p:nvSpPr>
-        <p:spPr>
-          <a:xfrm>
-            <a:off x="1234440" y="621792"/>
-            <a:ext cx="3657600" cy="365760"/>
-          </a:xfrm>
-          <a:prstGeom prst="rect">
-            <a:avLst/>
-          </a:prstGeom>
-          <a:noFill/>
-          <a:ln/>
-        </p:spPr>
-        <p:txBody>
-          <a:bodyPr wrap="square" lIns="0" tIns="0" rIns="0" bIns="0" rtlCol="0" anchor="t"/>
-          <a:lstStyle/>
-          <a:p>
-            <a:pPr indent="0" marL="0">
-              <a:buNone/>
-            </a:pPr>
-            <a:r>
-              <a:rPr lang="en-US" sz="1600" b="1" spc="300" kern="0" dirty="0">
-                <a:solidFill>
-                  <a:srgbClr val="FFFFFF"/>
-                </a:solidFill>
-                <a:latin typeface="Calibri" pitchFamily="34" charset="0"/>
-                <a:ea typeface="Calibri" pitchFamily="34" charset="-122"/>
-                <a:cs typeface="Calibri" pitchFamily="34" charset="-120"/>
-              </a:rPr>
-              <a:t>MEDREACH</a:t>
-            </a:r>
-            <a:endParaRPr lang="en-US" sz="1600" dirty="0"/>
-          </a:p>
-        </p:txBody>
-      </p:sp>
-      <p:sp>
-        <p:nvSpPr>
-          <p:cNvPr id="4" name="Text 1"/>
-          <p:cNvSpPr txBox="1"/>
-          <p:nvPr/>
-        </p:nvSpPr>
-        <p:spPr>
-          <a:xfrm>
-            <a:off x="548640" y="1371600"/>
-            <a:ext cx="6858000" cy="960120"/>
-          </a:xfrm>
-          <a:prstGeom prst="rect">
-            <a:avLst/>
-          </a:prstGeom>
-          <a:noFill/>
-          <a:ln/>
-        </p:spPr>
-        <p:txBody>
-          <a:bodyPr wrap="square" lIns="0" tIns="0" rIns="0" bIns="0" rtlCol="0" anchor="t"/>
-          <a:lstStyle/>
-          <a:p>
-            <a:pPr indent="0" marL="0">
-              <a:buNone/>
-            </a:pPr>
-            <a:r>
-              <a:rPr lang="en-US" sz="6000" b="1" dirty="0">
-                <a:solidFill>
-                  <a:srgbClr val="FFFFFF"/>
-                </a:solidFill>
-                <a:latin typeface="Arial" pitchFamily="34" charset="0"/>
-                <a:ea typeface="Arial" pitchFamily="34" charset="-122"/>
-                <a:cs typeface="Arial" pitchFamily="34" charset="-120"/>
-              </a:rPr>
-              <a:t>Medreach:</a:t>
-            </a:r>
-            <a:endParaRPr lang="en-US" sz="6000" dirty="0"/>
-          </a:p>
-        </p:txBody>
-      </p:sp>
-      <p:sp>
-        <p:nvSpPr>
-          <p:cNvPr id="5" name="Text 2"/>
-          <p:cNvSpPr txBox="1"/>
-          <p:nvPr/>
-        </p:nvSpPr>
-        <p:spPr>
-          <a:xfrm>
-            <a:off x="548640" y="2377440"/>
-            <a:ext cx="6949440" cy="1005840"/>
-          </a:xfrm>
-          <a:prstGeom prst="rect">
-            <a:avLst/>
-          </a:prstGeom>
-          <a:noFill/>
-          <a:ln/>
-        </p:spPr>
-        <p:txBody>
-          <a:bodyPr wrap="square" lIns="0" tIns="0" rIns="0" bIns="0" rtlCol="0" anchor="t"/>
-          <a:lstStyle/>
-          <a:p>
-            <a:pPr indent="0" marL="0">
-              <a:lnSpc>
-                <a:spcPct val="105000"/>
-              </a:lnSpc>
-              <a:buNone/>
-            </a:pPr>
-            <a:r>
-              <a:rPr lang="en-US" sz="2700" b="1" dirty="0">
-                <a:solidFill>
-                  <a:srgbClr val="FFFFFF"/>
-                </a:solidFill>
-                <a:latin typeface="Arial" pitchFamily="34" charset="0"/>
-                <a:ea typeface="Arial" pitchFamily="34" charset="-122"/>
-                <a:cs typeface="Arial" pitchFamily="34" charset="-120"/>
-              </a:rPr>
-              <a:t>The right hospital, right now,</a:t>
-            </a:r>
-            <a:endParaRPr lang="en-US" sz="2700" dirty="0"/>
-          </a:p>
-          <a:p>
-            <a:pPr indent="0" marL="0">
-              <a:lnSpc>
-                <a:spcPct val="105000"/>
-              </a:lnSpc>
-              <a:buNone/>
-            </a:pPr>
-            <a:r>
-              <a:rPr lang="en-US" sz="2700" b="1" dirty="0">
-                <a:solidFill>
-                  <a:srgbClr val="38BDF8"/>
-                </a:solidFill>
-                <a:latin typeface="Arial" pitchFamily="34" charset="0"/>
-                <a:ea typeface="Arial" pitchFamily="34" charset="-122"/>
-                <a:cs typeface="Arial" pitchFamily="34" charset="-120"/>
-              </a:rPr>
-              <a:t>confirmed before you leave home</a:t>
-            </a:r>
-            <a:endParaRPr lang="en-US" sz="2700" dirty="0"/>
-          </a:p>
-        </p:txBody>
-      </p:sp>
-      <p:sp>
-        <p:nvSpPr>
-          <p:cNvPr id="6" name="divider"/>
-          <p:cNvSpPr/>
-          <p:nvPr/>
-        </p:nvSpPr>
-        <p:spPr>
-          <a:xfrm>
-            <a:off x="548640" y="3584448"/>
-            <a:ext cx="914400" cy="0"/>
-          </a:xfrm>
-          <a:prstGeom prst="line">
-            <a:avLst/>
-          </a:prstGeom>
-          <a:noFill/>
-          <a:ln w="25400">
-            <a:solidFill>
-              <a:srgbClr val="38BDF8"/>
-            </a:solidFill>
-            <a:prstDash val="solid"/>
-          </a:ln>
-        </p:spPr>
-      </p:sp>
-      <p:sp>
-        <p:nvSpPr>
-          <p:cNvPr id="7" name="Text 4"/>
-          <p:cNvSpPr txBox="1"/>
-          <p:nvPr/>
-        </p:nvSpPr>
-        <p:spPr>
-          <a:xfrm>
-            <a:off x="548640" y="3749040"/>
-            <a:ext cx="6400800" cy="365760"/>
-          </a:xfrm>
-          <a:prstGeom prst="rect">
-            <a:avLst/>
-          </a:prstGeom>
-          <a:noFill/>
-          <a:ln/>
-        </p:spPr>
-        <p:txBody>
-          <a:bodyPr wrap="square" lIns="0" tIns="0" rIns="0" bIns="0" rtlCol="0" anchor="t"/>
-          <a:lstStyle/>
-          <a:p>
-            <a:pPr indent="0" marL="0">
-              <a:buNone/>
-            </a:pPr>
-            <a:r>
-              <a:rPr lang="en-US" sz="1700" dirty="0">
-                <a:solidFill>
-                  <a:srgbClr val="CBD5E1"/>
-                </a:solidFill>
-                <a:latin typeface="Calibri" pitchFamily="34" charset="0"/>
-                <a:ea typeface="Calibri" pitchFamily="34" charset="-122"/>
-                <a:cs typeface="Calibri" pitchFamily="34" charset="-120"/>
-              </a:rPr>
-              <a:t>AI-powered emergency coordination for </a:t>
-            </a:r>
-            <a:pPr indent="0" marL="0">
-              <a:buNone/>
-            </a:pPr>
-            <a:r>
-              <a:rPr lang="en-US" sz="1700" b="1" dirty="0">
-                <a:solidFill>
-                  <a:srgbClr val="38BDF8"/>
-                </a:solidFill>
-                <a:latin typeface="Calibri" pitchFamily="34" charset="0"/>
-                <a:ea typeface="Calibri" pitchFamily="34" charset="-122"/>
-                <a:cs typeface="Calibri" pitchFamily="34" charset="-120"/>
-              </a:rPr>
-              <a:t>Madhya Pradesh</a:t>
-            </a:r>
-            <a:endParaRPr lang="en-US" sz="1700" dirty="0"/>
-          </a:p>
-        </p:txBody>
-      </p:sp>
       <p:pic>
         <p:nvPicPr>
-          <p:cNvPr id="8" name="icon" descr="preencoded.png">    </p:cNvPr>
+          <p:cNvPr id="3" name="logo" descr="preencoded.png">    </p:cNvPr>
           <p:cNvPicPr>
             <a:picLocks noChangeAspect="1"/>
           </p:cNvPicPr>
@@ -2170,8 +1940,8 @@
         </p:blipFill>
         <p:spPr>
           <a:xfrm>
-            <a:off x="566928" y="4315968"/>
-            <a:ext cx="256032" cy="256032"/>
+            <a:off x="548640" y="502920"/>
+            <a:ext cx="548640" cy="548640"/>
           </a:xfrm>
           <a:prstGeom prst="rect">
             <a:avLst/>
@@ -2180,60 +1950,223 @@
       </p:pic>
       <p:sp>
         <p:nvSpPr>
-          <p:cNvPr id="9" name="Text 5"/>
-          <p:cNvSpPr txBox="1"/>
-          <p:nvPr/>
-        </p:nvSpPr>
-        <p:spPr>
-          <a:xfrm>
-            <a:off x="960120" y="4297680"/>
-            <a:ext cx="5029200" cy="310896"/>
-          </a:xfrm>
-          <a:prstGeom prst="rect">
-            <a:avLst/>
-          </a:prstGeom>
-          <a:noFill/>
-          <a:ln/>
-        </p:spPr>
-        <p:txBody>
-          <a:bodyPr wrap="square" lIns="0" tIns="0" rIns="0" bIns="0" rtlCol="0" anchor="ctr"/>
+          <p:cNvPr id="4" name="Text 0"/>
+          <p:cNvSpPr txBox="1"/>
+          <p:nvPr/>
+        </p:nvSpPr>
+        <p:spPr>
+          <a:xfrm>
+            <a:off x="1234440" y="621792"/>
+            <a:ext cx="3657600" cy="365760"/>
+          </a:xfrm>
+          <a:prstGeom prst="rect">
+            <a:avLst/>
+          </a:prstGeom>
+          <a:noFill/>
+          <a:ln/>
+        </p:spPr>
+        <p:txBody>
+          <a:bodyPr wrap="square" lIns="0" tIns="0" rIns="0" bIns="0" rtlCol="0" anchor="t"/>
           <a:lstStyle/>
           <a:p>
             <a:pPr indent="0" marL="0">
               <a:buNone/>
             </a:pPr>
             <a:r>
-              <a:rPr lang="en-US" sz="1400" dirty="0">
-                <a:solidFill>
-                  <a:srgbClr val="CBD5E1"/>
-                </a:solidFill>
-                <a:latin typeface="Calibri" pitchFamily="34" charset="0"/>
-                <a:ea typeface="Calibri" pitchFamily="34" charset="-122"/>
-                <a:cs typeface="Calibri" pitchFamily="34" charset="-120"/>
-              </a:rPr>
-              <a:t>Understands </a:t>
-            </a:r>
+              <a:rPr lang="en-US" sz="1600" b="1" spc="300" kern="0" dirty="0">
+                <a:solidFill>
+                  <a:srgbClr val="0F172A"/>
+                </a:solidFill>
+                <a:latin typeface="Calibri" pitchFamily="34" charset="0"/>
+                <a:ea typeface="Calibri" pitchFamily="34" charset="-122"/>
+                <a:cs typeface="Calibri" pitchFamily="34" charset="-120"/>
+              </a:rPr>
+              <a:t>MEDREACH</a:t>
+            </a:r>
+            <a:endParaRPr lang="en-US" sz="1600" dirty="0"/>
+          </a:p>
+        </p:txBody>
+      </p:sp>
+      <p:sp>
+        <p:nvSpPr>
+          <p:cNvPr id="5" name="Text 1"/>
+          <p:cNvSpPr txBox="1"/>
+          <p:nvPr/>
+        </p:nvSpPr>
+        <p:spPr>
+          <a:xfrm>
+            <a:off x="548640" y="1371600"/>
+            <a:ext cx="6858000" cy="960120"/>
+          </a:xfrm>
+          <a:prstGeom prst="rect">
+            <a:avLst/>
+          </a:prstGeom>
+          <a:noFill/>
+          <a:ln/>
+        </p:spPr>
+        <p:txBody>
+          <a:bodyPr wrap="square" lIns="0" tIns="0" rIns="0" bIns="0" rtlCol="0" anchor="t"/>
+          <a:lstStyle/>
+          <a:p>
             <a:pPr indent="0" marL="0">
               <a:buNone/>
             </a:pPr>
             <a:r>
-              <a:rPr lang="en-US" sz="1400" b="1" dirty="0">
-                <a:solidFill>
-                  <a:srgbClr val="38BDF8"/>
-                </a:solidFill>
-                <a:latin typeface="Calibri" pitchFamily="34" charset="0"/>
-                <a:ea typeface="Calibri" pitchFamily="34" charset="-122"/>
-                <a:cs typeface="Calibri" pitchFamily="34" charset="-120"/>
-              </a:rPr>
-              <a:t>Hindi, English, Hinglish</a:t>
-            </a:r>
-            <a:endParaRPr lang="en-US" sz="1400" dirty="0"/>
+              <a:rPr lang="en-US" sz="6000" b="1" dirty="0">
+                <a:solidFill>
+                  <a:srgbClr val="0F172A"/>
+                </a:solidFill>
+                <a:latin typeface="Arial" pitchFamily="34" charset="0"/>
+                <a:ea typeface="Arial" pitchFamily="34" charset="-122"/>
+                <a:cs typeface="Arial" pitchFamily="34" charset="-120"/>
+              </a:rPr>
+              <a:t>Medreach:</a:t>
+            </a:r>
+            <a:endParaRPr lang="en-US" sz="6000" dirty="0"/>
+          </a:p>
+        </p:txBody>
+      </p:sp>
+      <p:sp>
+        <p:nvSpPr>
+          <p:cNvPr id="6" name="Text 2"/>
+          <p:cNvSpPr txBox="1"/>
+          <p:nvPr/>
+        </p:nvSpPr>
+        <p:spPr>
+          <a:xfrm>
+            <a:off x="548640" y="2377440"/>
+            <a:ext cx="6949440" cy="1005840"/>
+          </a:xfrm>
+          <a:prstGeom prst="rect">
+            <a:avLst/>
+          </a:prstGeom>
+          <a:noFill/>
+          <a:ln/>
+        </p:spPr>
+        <p:txBody>
+          <a:bodyPr wrap="square" lIns="0" tIns="0" rIns="0" bIns="0" rtlCol="0" anchor="t"/>
+          <a:lstStyle/>
+          <a:p>
+            <a:pPr indent="0" marL="0">
+              <a:lnSpc>
+                <a:spcPct val="105000"/>
+              </a:lnSpc>
+              <a:buNone/>
+            </a:pPr>
+            <a:r>
+              <a:rPr lang="en-US" sz="2700" b="1" dirty="0">
+                <a:solidFill>
+                  <a:srgbClr val="0F172A"/>
+                </a:solidFill>
+                <a:latin typeface="Arial" pitchFamily="34" charset="0"/>
+                <a:ea typeface="Arial" pitchFamily="34" charset="-122"/>
+                <a:cs typeface="Arial" pitchFamily="34" charset="-120"/>
+              </a:rPr>
+              <a:t>The right hospital, right now,</a:t>
+            </a:r>
+            <a:endParaRPr lang="en-US" sz="2700" dirty="0"/>
+          </a:p>
+          <a:p>
+            <a:pPr indent="0" marL="0">
+              <a:lnSpc>
+                <a:spcPct val="105000"/>
+              </a:lnSpc>
+              <a:buNone/>
+            </a:pPr>
+            <a:r>
+              <a:rPr lang="en-US" sz="2700" b="1" dirty="0">
+                <a:solidFill>
+                  <a:srgbClr val="0E7490"/>
+                </a:solidFill>
+                <a:latin typeface="Arial" pitchFamily="34" charset="0"/>
+                <a:ea typeface="Arial" pitchFamily="34" charset="-122"/>
+                <a:cs typeface="Arial" pitchFamily="34" charset="-120"/>
+              </a:rPr>
+              <a:t>confirmed before you leave home</a:t>
+            </a:r>
+            <a:endParaRPr lang="en-US" sz="2700" dirty="0"/>
+          </a:p>
+        </p:txBody>
+      </p:sp>
+      <p:sp>
+        <p:nvSpPr>
+          <p:cNvPr id="7" name="divider"/>
+          <p:cNvSpPr/>
+          <p:nvPr/>
+        </p:nvSpPr>
+        <p:spPr>
+          <a:xfrm>
+            <a:off x="548640" y="3584448"/>
+            <a:ext cx="914400" cy="0"/>
+          </a:xfrm>
+          <a:prstGeom prst="line">
+            <a:avLst/>
+          </a:prstGeom>
+          <a:noFill/>
+          <a:ln w="25400">
+            <a:solidFill>
+              <a:srgbClr val="0E7490"/>
+            </a:solidFill>
+            <a:prstDash val="solid"/>
+          </a:ln>
+        </p:spPr>
+      </p:sp>
+      <p:sp>
+        <p:nvSpPr>
+          <p:cNvPr id="8" name="Text 4"/>
+          <p:cNvSpPr txBox="1"/>
+          <p:nvPr/>
+        </p:nvSpPr>
+        <p:spPr>
+          <a:xfrm>
+            <a:off x="548640" y="3749040"/>
+            <a:ext cx="6400800" cy="365760"/>
+          </a:xfrm>
+          <a:prstGeom prst="rect">
+            <a:avLst/>
+          </a:prstGeom>
+          <a:noFill/>
+          <a:ln/>
+        </p:spPr>
+        <p:txBody>
+          <a:bodyPr wrap="square" lIns="0" tIns="0" rIns="0" bIns="0" rtlCol="0" anchor="t"/>
+          <a:lstStyle/>
+          <a:p>
+            <a:pPr indent="0" marL="0">
+              <a:buNone/>
+            </a:pPr>
+            <a:r>
+              <a:rPr lang="en-US" sz="1700" dirty="0">
+                <a:solidFill>
+                  <a:srgbClr val="334155"/>
+                </a:solidFill>
+                <a:latin typeface="Calibri" pitchFamily="34" charset="0"/>
+                <a:ea typeface="Calibri" pitchFamily="34" charset="-122"/>
+                <a:cs typeface="Calibri" pitchFamily="34" charset="-120"/>
+              </a:rPr>
+              <a:t>AI-powered emergency coordination for </a:t>
+            </a:r>
+            <a:pPr indent="0" marL="0">
+              <a:buNone/>
+            </a:pPr>
+            <a:r>
+              <a:rPr lang="en-US" sz="1700" b="1" dirty="0">
+                <a:solidFill>
+                  <a:srgbClr val="0E7490"/>
+                </a:solidFill>
+                <a:latin typeface="Calibri" pitchFamily="34" charset="0"/>
+                <a:ea typeface="Calibri" pitchFamily="34" charset="-122"/>
+                <a:cs typeface="Calibri" pitchFamily="34" charset="-120"/>
+              </a:rPr>
+              <a:t>Madhya Pradesh</a:t>
+            </a:r>
+            <a:endParaRPr lang="en-US" sz="1700" dirty="0"/>
           </a:p>
         </p:txBody>
       </p:sp>
       <p:pic>
         <p:nvPicPr>
-          <p:cNvPr id="10" name="icon" descr="preencoded.png">    </p:cNvPr>
+          <p:cNvPr id="9" name="icon" descr="preencoded.png">    </p:cNvPr>
           <p:cNvPicPr>
             <a:picLocks noChangeAspect="1"/>
           </p:cNvPicPr>
@@ -2247,7 +2180,7 @@
         </p:blipFill>
         <p:spPr>
           <a:xfrm>
-            <a:off x="566928" y="4700016"/>
+            <a:off x="566928" y="4315968"/>
             <a:ext cx="256032" cy="256032"/>
           </a:xfrm>
           <a:prstGeom prst="rect">
@@ -2257,13 +2190,13 @@
       </p:pic>
       <p:sp>
         <p:nvSpPr>
-          <p:cNvPr id="11" name="Text 6"/>
-          <p:cNvSpPr txBox="1"/>
-          <p:nvPr/>
-        </p:nvSpPr>
-        <p:spPr>
-          <a:xfrm>
-            <a:off x="960120" y="4681728"/>
+          <p:cNvPr id="10" name="Text 5"/>
+          <p:cNvSpPr txBox="1"/>
+          <p:nvPr/>
+        </p:nvSpPr>
+        <p:spPr>
+          <a:xfrm>
+            <a:off x="960120" y="4297680"/>
             <a:ext cx="5029200" cy="310896"/>
           </a:xfrm>
           <a:prstGeom prst="rect">
@@ -2282,13 +2215,13 @@
             <a:r>
               <a:rPr lang="en-US" sz="1400" dirty="0">
                 <a:solidFill>
-                  <a:srgbClr val="CBD5E1"/>
-                </a:solidFill>
-                <a:latin typeface="Calibri" pitchFamily="34" charset="0"/>
-                <a:ea typeface="Calibri" pitchFamily="34" charset="-122"/>
-                <a:cs typeface="Calibri" pitchFamily="34" charset="-120"/>
-              </a:rPr>
-              <a:t>Hospital </a:t>
+                  <a:srgbClr val="334155"/>
+                </a:solidFill>
+                <a:latin typeface="Calibri" pitchFamily="34" charset="0"/>
+                <a:ea typeface="Calibri" pitchFamily="34" charset="-122"/>
+                <a:cs typeface="Calibri" pitchFamily="34" charset="-120"/>
+              </a:rPr>
+              <a:t>Understands </a:t>
             </a:r>
             <a:pPr indent="0" marL="0">
               <a:buNone/>
@@ -2296,13 +2229,13 @@
             <a:r>
               <a:rPr lang="en-US" sz="1400" b="1" dirty="0">
                 <a:solidFill>
-                  <a:srgbClr val="38BDF8"/>
-                </a:solidFill>
-                <a:latin typeface="Calibri" pitchFamily="34" charset="0"/>
-                <a:ea typeface="Calibri" pitchFamily="34" charset="-122"/>
-                <a:cs typeface="Calibri" pitchFamily="34" charset="-120"/>
-              </a:rPr>
-              <a:t>accepts before you travel</a:t>
+                  <a:srgbClr val="0E7490"/>
+                </a:solidFill>
+                <a:latin typeface="Calibri" pitchFamily="34" charset="0"/>
+                <a:ea typeface="Calibri" pitchFamily="34" charset="-122"/>
+                <a:cs typeface="Calibri" pitchFamily="34" charset="-120"/>
+              </a:rPr>
+              <a:t>Hindi, English, Hinglish</a:t>
             </a:r>
             <a:endParaRPr lang="en-US" sz="1400" dirty="0"/>
           </a:p>
@@ -2310,7 +2243,7 @@
       </p:sp>
       <p:pic>
         <p:nvPicPr>
-          <p:cNvPr id="12" name="icon" descr="preencoded.png">    </p:cNvPr>
+          <p:cNvPr id="11" name="icon" descr="preencoded.png">    </p:cNvPr>
           <p:cNvPicPr>
             <a:picLocks noChangeAspect="1"/>
           </p:cNvPicPr>
@@ -2324,6 +2257,83 @@
         </p:blipFill>
         <p:spPr>
           <a:xfrm>
+            <a:off x="566928" y="4700016"/>
+            <a:ext cx="256032" cy="256032"/>
+          </a:xfrm>
+          <a:prstGeom prst="rect">
+            <a:avLst/>
+          </a:prstGeom>
+        </p:spPr>
+      </p:pic>
+      <p:sp>
+        <p:nvSpPr>
+          <p:cNvPr id="12" name="Text 6"/>
+          <p:cNvSpPr txBox="1"/>
+          <p:nvPr/>
+        </p:nvSpPr>
+        <p:spPr>
+          <a:xfrm>
+            <a:off x="960120" y="4681728"/>
+            <a:ext cx="5029200" cy="310896"/>
+          </a:xfrm>
+          <a:prstGeom prst="rect">
+            <a:avLst/>
+          </a:prstGeom>
+          <a:noFill/>
+          <a:ln/>
+        </p:spPr>
+        <p:txBody>
+          <a:bodyPr wrap="square" lIns="0" tIns="0" rIns="0" bIns="0" rtlCol="0" anchor="ctr"/>
+          <a:lstStyle/>
+          <a:p>
+            <a:pPr indent="0" marL="0">
+              <a:buNone/>
+            </a:pPr>
+            <a:r>
+              <a:rPr lang="en-US" sz="1400" dirty="0">
+                <a:solidFill>
+                  <a:srgbClr val="334155"/>
+                </a:solidFill>
+                <a:latin typeface="Calibri" pitchFamily="34" charset="0"/>
+                <a:ea typeface="Calibri" pitchFamily="34" charset="-122"/>
+                <a:cs typeface="Calibri" pitchFamily="34" charset="-120"/>
+              </a:rPr>
+              <a:t>Hospital </a:t>
+            </a:r>
+            <a:pPr indent="0" marL="0">
+              <a:buNone/>
+            </a:pPr>
+            <a:r>
+              <a:rPr lang="en-US" sz="1400" b="1" dirty="0">
+                <a:solidFill>
+                  <a:srgbClr val="0E7490"/>
+                </a:solidFill>
+                <a:latin typeface="Calibri" pitchFamily="34" charset="0"/>
+                <a:ea typeface="Calibri" pitchFamily="34" charset="-122"/>
+                <a:cs typeface="Calibri" pitchFamily="34" charset="-120"/>
+              </a:rPr>
+              <a:t>accepts before you travel</a:t>
+            </a:r>
+            <a:endParaRPr lang="en-US" sz="1400" dirty="0"/>
+          </a:p>
+        </p:txBody>
+      </p:sp>
+      <p:pic>
+        <p:nvPicPr>
+          <p:cNvPr id="13" name="icon" descr="preencoded.png">    </p:cNvPr>
+          <p:cNvPicPr>
+            <a:picLocks noChangeAspect="1"/>
+          </p:cNvPicPr>
+          <p:nvPr/>
+        </p:nvPicPr>
+        <p:blipFill>
+          <a:blip r:embed="rId5"/>
+          <a:stretch>
+            <a:fillRect/>
+          </a:stretch>
+        </p:blipFill>
+        <p:spPr>
+          <a:xfrm>
             <a:off x="566928" y="5084064"/>
             <a:ext cx="256032" cy="256032"/>
           </a:xfrm>
@@ -2334,7 +2344,7 @@
       </p:pic>
       <p:sp>
         <p:nvSpPr>
-          <p:cNvPr id="13" name="Text 7"/>
+          <p:cNvPr id="14" name="Text 7"/>
           <p:cNvSpPr txBox="1"/>
           <p:nvPr/>
         </p:nvSpPr>
@@ -2359,7 +2369,7 @@
             <a:r>
               <a:rPr lang="en-US" sz="1400" dirty="0">
                 <a:solidFill>
-                  <a:srgbClr val="CBD5E1"/>
+                  <a:srgbClr val="334155"/>
                 </a:solidFill>
                 <a:latin typeface="Calibri" pitchFamily="34" charset="0"/>
                 <a:ea typeface="Calibri" pitchFamily="34" charset="-122"/>
@@ -2373,7 +2383,7 @@
             <a:r>
               <a:rPr lang="en-US" sz="1400" b="1" dirty="0">
                 <a:solidFill>
-                  <a:srgbClr val="38BDF8"/>
+                  <a:srgbClr val="0E7490"/>
                 </a:solidFill>
                 <a:latin typeface="Calibri" pitchFamily="34" charset="0"/>
                 <a:ea typeface="Calibri" pitchFamily="34" charset="-122"/>
@@ -2387,7 +2397,7 @@
       </p:sp>
       <p:sp>
         <p:nvSpPr>
-          <p:cNvPr id="14" name="card"/>
+          <p:cNvPr id="15" name="card"/>
           <p:cNvSpPr/>
           <p:nvPr/>
         </p:nvSpPr>
@@ -2402,13 +2412,13 @@
             </a:avLst>
           </a:prstGeom>
           <a:solidFill>
-            <a:srgbClr val="0E1F3D">
+            <a:srgbClr val="F1F5F9">
               <a:alpha val="75000"/>
             </a:srgbClr>
           </a:solidFill>
           <a:ln w="12700">
             <a:solidFill>
-              <a:srgbClr val="1E3A5F"/>
+              <a:srgbClr val="D6DEE8"/>
             </a:solidFill>
             <a:prstDash val="solid"/>
           </a:ln>
@@ -2416,7 +2426,7 @@
       </p:sp>
       <p:sp>
         <p:nvSpPr>
-          <p:cNvPr id="15" name="Text 9"/>
+          <p:cNvPr id="16" name="Text 9"/>
           <p:cNvSpPr txBox="1"/>
           <p:nvPr/>
         </p:nvSpPr>
@@ -2444,7 +2454,7 @@
             <a:r>
               <a:rPr lang="en-US" sz="1200" b="1" dirty="0">
                 <a:solidFill>
-                  <a:srgbClr val="38BDF8"/>
+                  <a:srgbClr val="0E7490"/>
                 </a:solidFill>
                 <a:latin typeface="Calibri" pitchFamily="34" charset="0"/>
                 <a:ea typeface="Calibri" pitchFamily="34" charset="-122"/>
@@ -2464,7 +2474,7 @@
             <a:r>
               <a:rPr lang="en-US" sz="1200" dirty="0">
                 <a:solidFill>
-                  <a:srgbClr val="CBD5E1"/>
+                  <a:srgbClr val="334155"/>
                 </a:solidFill>
                 <a:latin typeface="Calibri" pitchFamily="34" charset="0"/>
                 <a:ea typeface="Calibri" pitchFamily="34" charset="-122"/>
@@ -2528,7 +2538,7 @@
             <a:r>
               <a:rPr lang="en-US" sz="1100" b="1" spc="200" kern="0" dirty="0">
                 <a:solidFill>
-                  <a:srgbClr val="38BDF8"/>
+                  <a:srgbClr val="0E7490"/>
                 </a:solidFill>
                 <a:latin typeface="Calibri" pitchFamily="34" charset="0"/>
                 <a:ea typeface="Calibri" pitchFamily="34" charset="-122"/>
@@ -2569,7 +2579,7 @@
             <a:r>
               <a:rPr lang="en-US" sz="3400" b="1" dirty="0">
                 <a:solidFill>
-                  <a:schemeClr val="bg1"/>
+                  <a:schemeClr val="tx1"/>
                 </a:solidFill>
               </a:rPr>
               <a:t>Why Should Medreach </a:t>
@@ -2580,7 +2590,7 @@
             <a:r>
               <a:rPr lang="en-US" sz="3400" b="1" dirty="0">
                 <a:solidFill>
-                  <a:srgbClr val="38BDF8"/>
+                  <a:srgbClr val="0E7490"/>
                 </a:solidFill>
               </a:rPr>
               <a:t>Be Selected?</a:t>
@@ -2616,7 +2626,7 @@
             <a:r>
               <a:rPr lang="en-US" sz="2800" b="1" dirty="0">
                 <a:solidFill>
-                  <a:srgbClr val="38BDF8"/>
+                  <a:srgbClr val="0E7490"/>
                 </a:solidFill>
                 <a:latin typeface="Arial" pitchFamily="34" charset="0"/>
                 <a:ea typeface="Arial" pitchFamily="34" charset="-122"/>
@@ -2645,13 +2655,11 @@
             </a:avLst>
           </a:prstGeom>
           <a:solidFill>
-            <a:srgbClr val="0E1F3D">
-              <a:alpha val="85000"/>
-            </a:srgbClr>
+            <a:srgbClr val="F1F5F9"/>
           </a:solidFill>
           <a:ln w="12700">
             <a:solidFill>
-              <a:srgbClr val="1E3A5F"/>
+              <a:srgbClr val="D6DEE8"/>
             </a:solidFill>
             <a:prstDash val="solid"/>
           </a:ln>
@@ -2708,7 +2716,7 @@
             <a:r>
               <a:rPr lang="en-US" sz="1300" b="1" spc="100" kern="0" dirty="0">
                 <a:solidFill>
-                  <a:srgbClr val="38BDF8"/>
+                  <a:srgbClr val="0E7490"/>
                 </a:solidFill>
                 <a:latin typeface="Calibri" pitchFamily="34" charset="0"/>
                 <a:ea typeface="Calibri" pitchFamily="34" charset="-122"/>
@@ -2747,7 +2755,7 @@
             <a:r>
               <a:rPr lang="en-US" sz="1150" dirty="0">
                 <a:solidFill>
-                  <a:srgbClr val="FFFFFF"/>
+                  <a:srgbClr val="0F172A"/>
                 </a:solidFill>
                 <a:latin typeface="Calibri" pitchFamily="34" charset="0"/>
                 <a:ea typeface="Calibri" pitchFamily="34" charset="-122"/>
@@ -2776,13 +2784,11 @@
             </a:avLst>
           </a:prstGeom>
           <a:solidFill>
-            <a:srgbClr val="0E1F3D">
-              <a:alpha val="85000"/>
-            </a:srgbClr>
+            <a:srgbClr val="F1F5F9"/>
           </a:solidFill>
           <a:ln w="12700">
             <a:solidFill>
-              <a:srgbClr val="1E3A5F"/>
+              <a:srgbClr val="D6DEE8"/>
             </a:solidFill>
             <a:prstDash val="solid"/>
           </a:ln>
@@ -2839,7 +2845,7 @@
             <a:r>
               <a:rPr lang="en-US" sz="1300" b="1" spc="100" kern="0" dirty="0">
                 <a:solidFill>
-                  <a:srgbClr val="38BDF8"/>
+                  <a:srgbClr val="0E7490"/>
                 </a:solidFill>
                 <a:latin typeface="Calibri" pitchFamily="34" charset="0"/>
                 <a:ea typeface="Calibri" pitchFamily="34" charset="-122"/>
@@ -2878,7 +2884,7 @@
             <a:r>
               <a:rPr lang="en-US" sz="1150" dirty="0">
                 <a:solidFill>
-                  <a:srgbClr val="FFFFFF"/>
+                  <a:srgbClr val="0F172A"/>
                 </a:solidFill>
                 <a:latin typeface="Calibri" pitchFamily="34" charset="0"/>
                 <a:ea typeface="Calibri" pitchFamily="34" charset="-122"/>
@@ -2907,13 +2913,11 @@
             </a:avLst>
           </a:prstGeom>
           <a:solidFill>
-            <a:srgbClr val="0E1F3D">
-              <a:alpha val="85000"/>
-            </a:srgbClr>
+            <a:srgbClr val="F1F5F9"/>
           </a:solidFill>
           <a:ln w="12700">
             <a:solidFill>
-              <a:srgbClr val="1E3A5F"/>
+              <a:srgbClr val="D6DEE8"/>
             </a:solidFill>
             <a:prstDash val="solid"/>
           </a:ln>
@@ -2970,7 +2974,7 @@
             <a:r>
               <a:rPr lang="en-US" sz="1300" b="1" spc="100" kern="0" dirty="0">
                 <a:solidFill>
-                  <a:srgbClr val="38BDF8"/>
+                  <a:srgbClr val="0E7490"/>
                 </a:solidFill>
                 <a:latin typeface="Calibri" pitchFamily="34" charset="0"/>
                 <a:ea typeface="Calibri" pitchFamily="34" charset="-122"/>
@@ -3009,7 +3013,7 @@
             <a:r>
               <a:rPr lang="en-US" sz="1150" dirty="0">
                 <a:solidFill>
-                  <a:srgbClr val="FFFFFF"/>
+                  <a:srgbClr val="0F172A"/>
                 </a:solidFill>
                 <a:latin typeface="Calibri" pitchFamily="34" charset="0"/>
                 <a:ea typeface="Calibri" pitchFamily="34" charset="-122"/>
@@ -3038,13 +3042,11 @@
             </a:avLst>
           </a:prstGeom>
           <a:solidFill>
-            <a:srgbClr val="0E1F3D">
-              <a:alpha val="85000"/>
-            </a:srgbClr>
+            <a:srgbClr val="F1F5F9"/>
           </a:solidFill>
           <a:ln w="12700">
             <a:solidFill>
-              <a:srgbClr val="1E3A5F"/>
+              <a:srgbClr val="D6DEE8"/>
             </a:solidFill>
             <a:prstDash val="solid"/>
           </a:ln>
@@ -3101,7 +3103,7 @@
             <a:r>
               <a:rPr lang="en-US" sz="1300" b="1" spc="100" kern="0" dirty="0">
                 <a:solidFill>
-                  <a:srgbClr val="38BDF8"/>
+                  <a:srgbClr val="0E7490"/>
                 </a:solidFill>
                 <a:latin typeface="Calibri" pitchFamily="34" charset="0"/>
                 <a:ea typeface="Calibri" pitchFamily="34" charset="-122"/>
@@ -3140,7 +3142,7 @@
             <a:r>
               <a:rPr lang="en-US" sz="1150" dirty="0">
                 <a:solidFill>
-                  <a:srgbClr val="FFFFFF"/>
+                  <a:srgbClr val="0F172A"/>
                 </a:solidFill>
                 <a:latin typeface="Calibri" pitchFamily="34" charset="0"/>
                 <a:ea typeface="Calibri" pitchFamily="34" charset="-122"/>
@@ -3169,13 +3171,11 @@
             </a:avLst>
           </a:prstGeom>
           <a:solidFill>
-            <a:srgbClr val="0E1F3D">
-              <a:alpha val="85000"/>
-            </a:srgbClr>
+            <a:srgbClr val="F1F5F9"/>
           </a:solidFill>
           <a:ln w="12700">
             <a:solidFill>
-              <a:srgbClr val="1E3A5F"/>
+              <a:srgbClr val="D6DEE8"/>
             </a:solidFill>
             <a:prstDash val="solid"/>
           </a:ln>
@@ -3232,7 +3232,7 @@
             <a:r>
               <a:rPr lang="en-US" sz="1300" b="1" spc="100" kern="0" dirty="0">
                 <a:solidFill>
-                  <a:srgbClr val="38BDF8"/>
+                  <a:srgbClr val="0E7490"/>
                 </a:solidFill>
                 <a:latin typeface="Calibri" pitchFamily="34" charset="0"/>
                 <a:ea typeface="Calibri" pitchFamily="34" charset="-122"/>
@@ -3271,7 +3271,7 @@
             <a:r>
               <a:rPr lang="en-US" sz="1150" dirty="0">
                 <a:solidFill>
-                  <a:srgbClr val="FFFFFF"/>
+                  <a:srgbClr val="0F172A"/>
                 </a:solidFill>
                 <a:latin typeface="Calibri" pitchFamily="34" charset="0"/>
                 <a:ea typeface="Calibri" pitchFamily="34" charset="-122"/>
@@ -3300,13 +3300,11 @@
             </a:avLst>
           </a:prstGeom>
           <a:solidFill>
-            <a:srgbClr val="0E1F3D">
-              <a:alpha val="85000"/>
-            </a:srgbClr>
+            <a:srgbClr val="F1F5F9"/>
           </a:solidFill>
           <a:ln w="12700">
             <a:solidFill>
-              <a:srgbClr val="1E3A5F"/>
+              <a:srgbClr val="D6DEE8"/>
             </a:solidFill>
             <a:prstDash val="solid"/>
           </a:ln>
@@ -3363,7 +3361,7 @@
             <a:r>
               <a:rPr lang="en-US" sz="1300" b="1" spc="100" kern="0" dirty="0">
                 <a:solidFill>
-                  <a:srgbClr val="38BDF8"/>
+                  <a:srgbClr val="0E7490"/>
                 </a:solidFill>
                 <a:latin typeface="Calibri" pitchFamily="34" charset="0"/>
                 <a:ea typeface="Calibri" pitchFamily="34" charset="-122"/>
@@ -3402,7 +3400,7 @@
             <a:r>
               <a:rPr lang="en-US" sz="1150" dirty="0">
                 <a:solidFill>
-                  <a:srgbClr val="FFFFFF"/>
+                  <a:srgbClr val="0F172A"/>
                 </a:solidFill>
                 <a:latin typeface="Calibri" pitchFamily="34" charset="0"/>
                 <a:ea typeface="Calibri" pitchFamily="34" charset="-122"/>
@@ -3431,11 +3429,11 @@
             </a:avLst>
           </a:prstGeom>
           <a:solidFill>
-            <a:srgbClr val="0E1F3D"/>
+            <a:srgbClr val="F1F5F9"/>
           </a:solidFill>
           <a:ln w="19050">
             <a:solidFill>
-              <a:srgbClr val="38BDF8"/>
+              <a:srgbClr val="0E7490"/>
             </a:solidFill>
             <a:prstDash val="solid"/>
           </a:ln>
@@ -3468,7 +3466,7 @@
             <a:r>
               <a:rPr lang="en-US" sz="1500" b="1" spc="200" kern="0" dirty="0">
                 <a:solidFill>
-                  <a:srgbClr val="38BDF8"/>
+                  <a:srgbClr val="0E7490"/>
                 </a:solidFill>
                 <a:latin typeface="Calibri" pitchFamily="34" charset="0"/>
                 <a:ea typeface="Calibri" pitchFamily="34" charset="-122"/>
@@ -3507,7 +3505,7 @@
             <a:r>
               <a:rPr lang="en-US" sz="1300" dirty="0">
                 <a:solidFill>
-                  <a:srgbClr val="FFFFFF"/>
+                  <a:srgbClr val="0F172A"/>
                 </a:solidFill>
                 <a:latin typeface="Calibri" pitchFamily="34" charset="0"/>
                 <a:ea typeface="Calibri" pitchFamily="34" charset="-122"/>
@@ -3546,7 +3544,7 @@
             <a:r>
               <a:rPr lang="en-US" sz="1150" b="1" dirty="0">
                 <a:solidFill>
-                  <a:srgbClr val="38BDF8"/>
+                  <a:srgbClr val="0E7490"/>
                 </a:solidFill>
                 <a:latin typeface="Calibri" pitchFamily="34" charset="0"/>
                 <a:ea typeface="Calibri" pitchFamily="34" charset="-122"/>
@@ -3560,7 +3558,7 @@
             <a:r>
               <a:rPr lang="en-US" sz="1150" dirty="0">
                 <a:solidFill>
-                  <a:srgbClr val="FFFFFF"/>
+                  <a:srgbClr val="0F172A"/>
                 </a:solidFill>
                 <a:latin typeface="Calibri" pitchFamily="34" charset="0"/>
                 <a:ea typeface="Calibri" pitchFamily="34" charset="-122"/>
@@ -3574,7 +3572,7 @@
             <a:r>
               <a:rPr lang="en-US" sz="1150" b="1" dirty="0">
                 <a:solidFill>
-                  <a:srgbClr val="38BDF8"/>
+                  <a:srgbClr val="0E7490"/>
                 </a:solidFill>
                 <a:latin typeface="Calibri" pitchFamily="34" charset="0"/>
                 <a:ea typeface="Calibri" pitchFamily="34" charset="-122"/>
@@ -3588,7 +3586,7 @@
             <a:r>
               <a:rPr lang="en-US" sz="1150" dirty="0">
                 <a:solidFill>
-                  <a:srgbClr val="FFFFFF"/>
+                  <a:srgbClr val="0F172A"/>
                 </a:solidFill>
                 <a:latin typeface="Calibri" pitchFamily="34" charset="0"/>
                 <a:ea typeface="Calibri" pitchFamily="34" charset="-122"/>
@@ -3602,7 +3600,7 @@
             <a:r>
               <a:rPr lang="en-US" sz="1150" b="1" dirty="0">
                 <a:solidFill>
-                  <a:srgbClr val="38BDF8"/>
+                  <a:srgbClr val="0E7490"/>
                 </a:solidFill>
                 <a:latin typeface="Calibri" pitchFamily="34" charset="0"/>
                 <a:ea typeface="Calibri" pitchFamily="34" charset="-122"/>
@@ -3616,7 +3614,7 @@
             <a:r>
               <a:rPr lang="en-US" sz="1150" dirty="0">
                 <a:solidFill>
-                  <a:srgbClr val="FFFFFF"/>
+                  <a:srgbClr val="0F172A"/>
                 </a:solidFill>
                 <a:latin typeface="Calibri" pitchFamily="34" charset="0"/>
                 <a:ea typeface="Calibri" pitchFamily="34" charset="-122"/>
@@ -3658,7 +3656,7 @@
             <a:lvl1pPr>
               <a:defRPr sz="900">
                 <a:solidFill>
-                  <a:srgbClr val="94A3B8"/>
+                  <a:srgbClr val="64748B"/>
                 </a:solidFill>
               </a:defRPr>
             </a:lvl1pPr>
@@ -3725,7 +3723,7 @@
             <a:r>
               <a:rPr lang="en-US" sz="1100" b="1" spc="200" kern="0" dirty="0">
                 <a:solidFill>
-                  <a:srgbClr val="38BDF8"/>
+                  <a:srgbClr val="0E7490"/>
                 </a:solidFill>
                 <a:latin typeface="Calibri" pitchFamily="34" charset="0"/>
                 <a:ea typeface="Calibri" pitchFamily="34" charset="-122"/>
@@ -3766,7 +3764,7 @@
             <a:r>
               <a:rPr lang="en-US" sz="3400" b="1" dirty="0">
                 <a:solidFill>
-                  <a:schemeClr val="bg1"/>
+                  <a:schemeClr val="tx1"/>
                 </a:solidFill>
               </a:rPr>
               <a:t>What </a:t>
@@ -3777,7 +3775,7 @@
             <a:r>
               <a:rPr lang="en-US" sz="3400" b="1" dirty="0">
                 <a:solidFill>
-                  <a:srgbClr val="38BDF8"/>
+                  <a:srgbClr val="0E7490"/>
                 </a:solidFill>
               </a:rPr>
               <a:t>Medreach</a:t>
@@ -3788,7 +3786,7 @@
             <a:r>
               <a:rPr lang="en-US" sz="3400" b="1" dirty="0">
                 <a:solidFill>
-                  <a:schemeClr val="bg1"/>
+                  <a:schemeClr val="tx1"/>
                 </a:solidFill>
               </a:rPr>
               <a:t> Is</a:t>
@@ -3827,7 +3825,7 @@
             <a:r>
               <a:rPr lang="en-US" sz="1500" b="1" dirty="0">
                 <a:solidFill>
-                  <a:srgbClr val="FFFFFF"/>
+                  <a:srgbClr val="0F172A"/>
                 </a:solidFill>
                 <a:latin typeface="Calibri" pitchFamily="34" charset="0"/>
                 <a:ea typeface="Calibri" pitchFamily="34" charset="-122"/>
@@ -3844,7 +3842,7 @@
             <a:r>
               <a:rPr lang="en-US" sz="1500" b="1" dirty="0">
                 <a:solidFill>
-                  <a:srgbClr val="38BDF8"/>
+                  <a:srgbClr val="0E7490"/>
                 </a:solidFill>
                 <a:latin typeface="Calibri" pitchFamily="34" charset="0"/>
                 <a:ea typeface="Calibri" pitchFamily="34" charset="-122"/>
@@ -3861,7 +3859,7 @@
             <a:r>
               <a:rPr lang="en-US" sz="1500" dirty="0">
                 <a:solidFill>
-                  <a:srgbClr val="CBD5E1"/>
+                  <a:srgbClr val="334155"/>
                 </a:solidFill>
                 <a:latin typeface="Calibri" pitchFamily="34" charset="0"/>
                 <a:ea typeface="Calibri" pitchFamily="34" charset="-122"/>
@@ -3890,13 +3888,11 @@
             </a:avLst>
           </a:prstGeom>
           <a:solidFill>
-            <a:srgbClr val="0E1F3D">
-              <a:alpha val="85000"/>
-            </a:srgbClr>
+            <a:srgbClr val="F1F5F9"/>
           </a:solidFill>
           <a:ln w="12700">
             <a:solidFill>
-              <a:srgbClr val="1E3A5F"/>
+              <a:srgbClr val="D6DEE8"/>
             </a:solidFill>
             <a:prstDash val="solid"/>
           </a:ln>
@@ -3953,7 +3949,7 @@
             <a:r>
               <a:rPr lang="en-US" sz="1250" b="1" spc="100" kern="0" dirty="0">
                 <a:solidFill>
-                  <a:srgbClr val="38BDF8"/>
+                  <a:srgbClr val="0E7490"/>
                 </a:solidFill>
                 <a:latin typeface="Calibri" pitchFamily="34" charset="0"/>
                 <a:ea typeface="Calibri" pitchFamily="34" charset="-122"/>
@@ -3992,7 +3988,7 @@
             <a:r>
               <a:rPr lang="en-US" sz="1150" dirty="0">
                 <a:solidFill>
-                  <a:srgbClr val="CBD5E1"/>
+                  <a:srgbClr val="334155"/>
                 </a:solidFill>
                 <a:latin typeface="Calibri" pitchFamily="34" charset="0"/>
                 <a:ea typeface="Calibri" pitchFamily="34" charset="-122"/>
@@ -4021,13 +4017,11 @@
             </a:avLst>
           </a:prstGeom>
           <a:solidFill>
-            <a:srgbClr val="0E1F3D">
-              <a:alpha val="85000"/>
-            </a:srgbClr>
+            <a:srgbClr val="F1F5F9"/>
           </a:solidFill>
           <a:ln w="12700">
             <a:solidFill>
-              <a:srgbClr val="1E3A5F"/>
+              <a:srgbClr val="D6DEE8"/>
             </a:solidFill>
             <a:prstDash val="solid"/>
           </a:ln>
@@ -4084,7 +4078,7 @@
             <a:r>
               <a:rPr lang="en-US" sz="1250" b="1" spc="100" kern="0" dirty="0">
                 <a:solidFill>
-                  <a:srgbClr val="38BDF8"/>
+                  <a:srgbClr val="0E7490"/>
                 </a:solidFill>
                 <a:latin typeface="Calibri" pitchFamily="34" charset="0"/>
                 <a:ea typeface="Calibri" pitchFamily="34" charset="-122"/>
@@ -4123,7 +4117,7 @@
             <a:r>
               <a:rPr lang="en-US" sz="1150" dirty="0">
                 <a:solidFill>
-                  <a:srgbClr val="CBD5E1"/>
+                  <a:srgbClr val="334155"/>
                 </a:solidFill>
                 <a:latin typeface="Calibri" pitchFamily="34" charset="0"/>
                 <a:ea typeface="Calibri" pitchFamily="34" charset="-122"/>
@@ -4152,13 +4146,11 @@
             </a:avLst>
           </a:prstGeom>
           <a:solidFill>
-            <a:srgbClr val="0E1F3D">
-              <a:alpha val="85000"/>
-            </a:srgbClr>
+            <a:srgbClr val="F1F5F9"/>
           </a:solidFill>
           <a:ln w="12700">
             <a:solidFill>
-              <a:srgbClr val="1E3A5F"/>
+              <a:srgbClr val="D6DEE8"/>
             </a:solidFill>
             <a:prstDash val="solid"/>
           </a:ln>
@@ -4215,7 +4207,7 @@
             <a:r>
               <a:rPr lang="en-US" sz="1250" b="1" spc="100" kern="0" dirty="0">
                 <a:solidFill>
-                  <a:srgbClr val="38BDF8"/>
+                  <a:srgbClr val="0E7490"/>
                 </a:solidFill>
                 <a:latin typeface="Calibri" pitchFamily="34" charset="0"/>
                 <a:ea typeface="Calibri" pitchFamily="34" charset="-122"/>
@@ -4254,7 +4246,7 @@
             <a:r>
               <a:rPr lang="en-US" sz="1150" dirty="0">
                 <a:solidFill>
-                  <a:srgbClr val="CBD5E1"/>
+                  <a:srgbClr val="334155"/>
                 </a:solidFill>
                 <a:latin typeface="Calibri" pitchFamily="34" charset="0"/>
                 <a:ea typeface="Calibri" pitchFamily="34" charset="-122"/>
@@ -4281,18 +4273,18 @@
             <a:avLst/>
           </a:prstGeom>
           <a:solidFill>
-            <a:srgbClr val="0E1F3D"/>
+            <a:srgbClr val="FFFFFF"/>
           </a:solidFill>
           <a:ln w="12700">
             <a:solidFill>
-              <a:srgbClr val="38BDF8"/>
+              <a:srgbClr val="D6DEE8"/>
             </a:solidFill>
             <a:prstDash val="solid"/>
           </a:ln>
           <a:effectLst>
-            <a:outerShdw sx="100000" sy="100000" kx="0" ky="0" algn="bl" rotWithShape="0" blurRad="177800" dist="50800" dir="5400000">
-              <a:srgbClr val="38BDF8">
-                <a:alpha val="35000"/>
+            <a:outerShdw sx="100000" sy="100000" kx="0" ky="0" algn="bl" rotWithShape="0" blurRad="127000" dist="25400" dir="5400000">
+              <a:srgbClr val="0F172A">
+                <a:alpha val="16000"/>
               </a:srgbClr>
             </a:outerShdw>
           </a:effectLst>
@@ -4349,7 +4341,7 @@
             <a:r>
               <a:rPr lang="en-US" sz="1050" dirty="0">
                 <a:solidFill>
-                  <a:srgbClr val="94A3B8"/>
+                  <a:srgbClr val="64748B"/>
                 </a:solidFill>
                 <a:latin typeface="Calibri" pitchFamily="34" charset="0"/>
                 <a:ea typeface="Calibri" pitchFamily="34" charset="-122"/>
@@ -4378,13 +4370,13 @@
             </a:avLst>
           </a:prstGeom>
           <a:solidFill>
-            <a:srgbClr val="0E1F3D">
+            <a:srgbClr val="F1F5F9">
               <a:alpha val="90000"/>
             </a:srgbClr>
           </a:solidFill>
           <a:ln w="12700">
             <a:solidFill>
-              <a:srgbClr val="1E3A5F"/>
+              <a:srgbClr val="D6DEE8"/>
             </a:solidFill>
             <a:prstDash val="solid"/>
           </a:ln>
@@ -4417,7 +4409,7 @@
             <a:r>
               <a:rPr lang="en-US" sz="3200" b="1" dirty="0">
                 <a:solidFill>
-                  <a:srgbClr val="38BDF8"/>
+                  <a:srgbClr val="0E7490"/>
                 </a:solidFill>
                 <a:latin typeface="Arial" pitchFamily="34" charset="0"/>
                 <a:ea typeface="Arial" pitchFamily="34" charset="-122"/>
@@ -4456,7 +4448,7 @@
             <a:r>
               <a:rPr lang="en-US" sz="1050" dirty="0">
                 <a:solidFill>
-                  <a:srgbClr val="CBD5E1"/>
+                  <a:srgbClr val="334155"/>
                 </a:solidFill>
                 <a:latin typeface="Calibri" pitchFamily="34" charset="0"/>
                 <a:ea typeface="Calibri" pitchFamily="34" charset="-122"/>
@@ -4495,7 +4487,7 @@
             <a:r>
               <a:rPr lang="en-US" sz="3200" b="1" dirty="0">
                 <a:solidFill>
-                  <a:srgbClr val="38BDF8"/>
+                  <a:srgbClr val="0E7490"/>
                 </a:solidFill>
                 <a:latin typeface="Arial" pitchFamily="34" charset="0"/>
                 <a:ea typeface="Arial" pitchFamily="34" charset="-122"/>
@@ -4534,7 +4526,7 @@
             <a:r>
               <a:rPr lang="en-US" sz="1050" dirty="0">
                 <a:solidFill>
-                  <a:srgbClr val="CBD5E1"/>
+                  <a:srgbClr val="334155"/>
                 </a:solidFill>
                 <a:latin typeface="Calibri" pitchFamily="34" charset="0"/>
                 <a:ea typeface="Calibri" pitchFamily="34" charset="-122"/>
@@ -4573,7 +4565,7 @@
             <a:r>
               <a:rPr lang="en-US" sz="3200" b="1" dirty="0">
                 <a:solidFill>
-                  <a:srgbClr val="38BDF8"/>
+                  <a:srgbClr val="0E7490"/>
                 </a:solidFill>
                 <a:latin typeface="Arial" pitchFamily="34" charset="0"/>
                 <a:ea typeface="Arial" pitchFamily="34" charset="-122"/>
@@ -4612,7 +4604,7 @@
             <a:r>
               <a:rPr lang="en-US" sz="1050" dirty="0">
                 <a:solidFill>
-                  <a:srgbClr val="CBD5E1"/>
+                  <a:srgbClr val="334155"/>
                 </a:solidFill>
                 <a:latin typeface="Calibri" pitchFamily="34" charset="0"/>
                 <a:ea typeface="Calibri" pitchFamily="34" charset="-122"/>
@@ -4651,13 +4643,13 @@
             <a:r>
               <a:rPr lang="en-US" sz="3200" b="1" dirty="0">
                 <a:solidFill>
-                  <a:srgbClr val="38BDF8"/>
+                  <a:srgbClr val="0E7490"/>
                 </a:solidFill>
                 <a:latin typeface="Arial" pitchFamily="34" charset="0"/>
                 <a:ea typeface="Arial" pitchFamily="34" charset="-122"/>
                 <a:cs typeface="Arial" pitchFamily="34" charset="-120"/>
               </a:rPr>
-              <a:t>51</a:t>
+              <a:t>62</a:t>
             </a:r>
             <a:endParaRPr lang="en-US" sz="3200" dirty="0"/>
           </a:p>
@@ -4690,7 +4682,7 @@
             <a:r>
               <a:rPr lang="en-US" sz="1050" dirty="0">
                 <a:solidFill>
-                  <a:srgbClr val="CBD5E1"/>
+                  <a:srgbClr val="334155"/>
                 </a:solidFill>
                 <a:latin typeface="Calibri" pitchFamily="34" charset="0"/>
                 <a:ea typeface="Calibri" pitchFamily="34" charset="-122"/>
@@ -4729,7 +4721,7 @@
             <a:r>
               <a:rPr lang="en-US" sz="1100" b="1" spc="200" kern="0" dirty="0">
                 <a:solidFill>
-                  <a:srgbClr val="34D399"/>
+                  <a:srgbClr val="059669"/>
                 </a:solidFill>
                 <a:latin typeface="Calibri" pitchFamily="34" charset="0"/>
                 <a:ea typeface="Calibri" pitchFamily="34" charset="-122"/>
@@ -4768,7 +4760,7 @@
             <a:r>
               <a:rPr lang="en-US" sz="1200" dirty="0">
                 <a:solidFill>
-                  <a:srgbClr val="FFFFFF"/>
+                  <a:srgbClr val="0F172A"/>
                 </a:solidFill>
                 <a:latin typeface="Calibri" pitchFamily="34" charset="0"/>
                 <a:ea typeface="Calibri" pitchFamily="34" charset="-122"/>
@@ -4810,7 +4802,7 @@
             <a:lvl1pPr>
               <a:defRPr sz="900">
                 <a:solidFill>
-                  <a:srgbClr val="94A3B8"/>
+                  <a:srgbClr val="64748B"/>
                 </a:solidFill>
               </a:defRPr>
             </a:lvl1pPr>
@@ -4877,7 +4869,7 @@
             <a:r>
               <a:rPr lang="en-US" sz="1100" b="1" spc="200" kern="0" dirty="0">
                 <a:solidFill>
-                  <a:srgbClr val="38BDF8"/>
+                  <a:srgbClr val="0E7490"/>
                 </a:solidFill>
                 <a:latin typeface="Calibri" pitchFamily="34" charset="0"/>
                 <a:ea typeface="Calibri" pitchFamily="34" charset="-122"/>
@@ -4918,7 +4910,7 @@
             <a:r>
               <a:rPr lang="en-US" sz="3400" b="1" dirty="0">
                 <a:solidFill>
-                  <a:srgbClr val="38BDF8"/>
+                  <a:srgbClr val="0E7490"/>
                 </a:solidFill>
               </a:rPr>
               <a:t>Chest Pain </a:t>
@@ -4929,7 +4921,7 @@
             <a:r>
               <a:rPr lang="en-US" sz="3400" b="1" dirty="0">
                 <a:solidFill>
-                  <a:schemeClr val="bg1"/>
+                  <a:schemeClr val="tx1"/>
                 </a:solidFill>
               </a:rPr>
               <a:t>at </a:t>
@@ -4940,7 +4932,7 @@
             <a:r>
               <a:rPr lang="en-US" sz="3400" b="1" dirty="0">
                 <a:solidFill>
-                  <a:srgbClr val="38BDF8"/>
+                  <a:srgbClr val="0E7490"/>
                 </a:solidFill>
               </a:rPr>
               <a:t>11 pm </a:t>
@@ -4951,7 +4943,7 @@
             <a:r>
               <a:rPr lang="en-US" sz="3400" b="1" dirty="0">
                 <a:solidFill>
-                  <a:schemeClr val="bg1"/>
+                  <a:schemeClr val="tx1"/>
                 </a:solidFill>
               </a:rPr>
               <a:t>in Bhopal</a:t>
@@ -4987,7 +4979,7 @@
             <a:r>
               <a:rPr lang="en-US" sz="1400" dirty="0">
                 <a:solidFill>
-                  <a:srgbClr val="CBD5E1"/>
+                  <a:srgbClr val="334155"/>
                 </a:solidFill>
                 <a:latin typeface="Calibri" pitchFamily="34" charset="0"/>
                 <a:ea typeface="Calibri" pitchFamily="34" charset="-122"/>
@@ -5016,13 +5008,11 @@
             </a:avLst>
           </a:prstGeom>
           <a:solidFill>
-            <a:srgbClr val="0E1F3D">
-              <a:alpha val="85000"/>
-            </a:srgbClr>
+            <a:srgbClr val="F1F5F9"/>
           </a:solidFill>
           <a:ln w="15875">
             <a:solidFill>
-              <a:srgbClr val="F87171"/>
+              <a:srgbClr val="DC2626"/>
             </a:solidFill>
             <a:prstDash val="solid"/>
           </a:ln>
@@ -5055,7 +5045,7 @@
             <a:r>
               <a:rPr lang="en-US" sz="1800" b="1" dirty="0">
                 <a:solidFill>
-                  <a:srgbClr val="F87171"/>
+                  <a:srgbClr val="DC2626"/>
                 </a:solidFill>
                 <a:latin typeface="Arial" pitchFamily="34" charset="0"/>
                 <a:ea typeface="Arial" pitchFamily="34" charset="-122"/>
@@ -5094,7 +5084,7 @@
             <a:r>
               <a:rPr lang="en-US" sz="1100" dirty="0">
                 <a:solidFill>
-                  <a:srgbClr val="CBD5E1"/>
+                  <a:srgbClr val="334155"/>
                 </a:solidFill>
                 <a:latin typeface="Calibri" pitchFamily="34" charset="0"/>
                 <a:ea typeface="Calibri" pitchFamily="34" charset="-122"/>
@@ -5123,13 +5113,11 @@
             </a:avLst>
           </a:prstGeom>
           <a:solidFill>
-            <a:srgbClr val="0E1F3D">
-              <a:alpha val="85000"/>
-            </a:srgbClr>
+            <a:srgbClr val="F1F5F9"/>
           </a:solidFill>
           <a:ln w="12700">
             <a:solidFill>
-              <a:srgbClr val="1E3A5F"/>
+              <a:srgbClr val="D6DEE8"/>
             </a:solidFill>
             <a:prstDash val="solid"/>
           </a:ln>
@@ -5162,7 +5150,7 @@
             <a:r>
               <a:rPr lang="en-US" sz="1700" b="1" dirty="0">
                 <a:solidFill>
-                  <a:srgbClr val="F87171"/>
+                  <a:srgbClr val="DC2626"/>
                 </a:solidFill>
                 <a:latin typeface="Arial" pitchFamily="34" charset="0"/>
                 <a:ea typeface="Arial" pitchFamily="34" charset="-122"/>
@@ -5201,7 +5189,7 @@
             <a:r>
               <a:rPr lang="en-US" sz="1150" dirty="0">
                 <a:solidFill>
-                  <a:srgbClr val="FFFFFF"/>
+                  <a:srgbClr val="0F172A"/>
                 </a:solidFill>
                 <a:latin typeface="Calibri" pitchFamily="34" charset="0"/>
                 <a:ea typeface="Calibri" pitchFamily="34" charset="-122"/>
@@ -5240,7 +5228,7 @@
             <a:r>
               <a:rPr lang="en-US" sz="1800" b="1" dirty="0">
                 <a:solidFill>
-                  <a:srgbClr val="F87171"/>
+                  <a:srgbClr val="DC2626"/>
                 </a:solidFill>
                 <a:latin typeface="Calibri" pitchFamily="34" charset="0"/>
                 <a:ea typeface="Calibri" pitchFamily="34" charset="-122"/>
@@ -5269,13 +5257,11 @@
             </a:avLst>
           </a:prstGeom>
           <a:solidFill>
-            <a:srgbClr val="0E1F3D">
-              <a:alpha val="85000"/>
-            </a:srgbClr>
+            <a:srgbClr val="F1F5F9"/>
           </a:solidFill>
           <a:ln w="12700">
             <a:solidFill>
-              <a:srgbClr val="1E3A5F"/>
+              <a:srgbClr val="D6DEE8"/>
             </a:solidFill>
             <a:prstDash val="solid"/>
           </a:ln>
@@ -5308,7 +5294,7 @@
             <a:r>
               <a:rPr lang="en-US" sz="1700" b="1" dirty="0">
                 <a:solidFill>
-                  <a:srgbClr val="F87171"/>
+                  <a:srgbClr val="DC2626"/>
                 </a:solidFill>
                 <a:latin typeface="Arial" pitchFamily="34" charset="0"/>
                 <a:ea typeface="Arial" pitchFamily="34" charset="-122"/>
@@ -5347,7 +5333,7 @@
             <a:r>
               <a:rPr lang="en-US" sz="1150" dirty="0">
                 <a:solidFill>
-                  <a:srgbClr val="FFFFFF"/>
+                  <a:srgbClr val="0F172A"/>
                 </a:solidFill>
                 <a:latin typeface="Calibri" pitchFamily="34" charset="0"/>
                 <a:ea typeface="Calibri" pitchFamily="34" charset="-122"/>
@@ -5386,7 +5372,7 @@
             <a:r>
               <a:rPr lang="en-US" sz="1800" b="1" dirty="0">
                 <a:solidFill>
-                  <a:srgbClr val="F87171"/>
+                  <a:srgbClr val="DC2626"/>
                 </a:solidFill>
                 <a:latin typeface="Calibri" pitchFamily="34" charset="0"/>
                 <a:ea typeface="Calibri" pitchFamily="34" charset="-122"/>
@@ -5415,13 +5401,11 @@
             </a:avLst>
           </a:prstGeom>
           <a:solidFill>
-            <a:srgbClr val="0E1F3D">
-              <a:alpha val="85000"/>
-            </a:srgbClr>
+            <a:srgbClr val="F1F5F9"/>
           </a:solidFill>
           <a:ln w="12700">
             <a:solidFill>
-              <a:srgbClr val="1E3A5F"/>
+              <a:srgbClr val="D6DEE8"/>
             </a:solidFill>
             <a:prstDash val="solid"/>
           </a:ln>
@@ -5454,7 +5438,7 @@
             <a:r>
               <a:rPr lang="en-US" sz="1700" b="1" dirty="0">
                 <a:solidFill>
-                  <a:srgbClr val="F87171"/>
+                  <a:srgbClr val="DC2626"/>
                 </a:solidFill>
                 <a:latin typeface="Arial" pitchFamily="34" charset="0"/>
                 <a:ea typeface="Arial" pitchFamily="34" charset="-122"/>
@@ -5493,7 +5477,7 @@
             <a:r>
               <a:rPr lang="en-US" sz="1150" dirty="0">
                 <a:solidFill>
-                  <a:srgbClr val="FFFFFF"/>
+                  <a:srgbClr val="0F172A"/>
                 </a:solidFill>
                 <a:latin typeface="Calibri" pitchFamily="34" charset="0"/>
                 <a:ea typeface="Calibri" pitchFamily="34" charset="-122"/>
@@ -5532,7 +5516,7 @@
             <a:r>
               <a:rPr lang="en-US" sz="1800" b="1" dirty="0">
                 <a:solidFill>
-                  <a:srgbClr val="F87171"/>
+                  <a:srgbClr val="DC2626"/>
                 </a:solidFill>
                 <a:latin typeface="Calibri" pitchFamily="34" charset="0"/>
                 <a:ea typeface="Calibri" pitchFamily="34" charset="-122"/>
@@ -5561,13 +5545,11 @@
             </a:avLst>
           </a:prstGeom>
           <a:solidFill>
-            <a:srgbClr val="0E1F3D">
-              <a:alpha val="85000"/>
-            </a:srgbClr>
+            <a:srgbClr val="F1F5F9"/>
           </a:solidFill>
           <a:ln w="12700">
             <a:solidFill>
-              <a:srgbClr val="1E3A5F"/>
+              <a:srgbClr val="D6DEE8"/>
             </a:solidFill>
             <a:prstDash val="solid"/>
           </a:ln>
@@ -5600,7 +5582,7 @@
             <a:r>
               <a:rPr lang="en-US" sz="1700" b="1" dirty="0">
                 <a:solidFill>
-                  <a:srgbClr val="F87171"/>
+                  <a:srgbClr val="DC2626"/>
                 </a:solidFill>
                 <a:latin typeface="Arial" pitchFamily="34" charset="0"/>
                 <a:ea typeface="Arial" pitchFamily="34" charset="-122"/>
@@ -5639,7 +5621,7 @@
             <a:r>
               <a:rPr lang="en-US" sz="1150" dirty="0">
                 <a:solidFill>
-                  <a:srgbClr val="FFFFFF"/>
+                  <a:srgbClr val="0F172A"/>
                 </a:solidFill>
                 <a:latin typeface="Calibri" pitchFamily="34" charset="0"/>
                 <a:ea typeface="Calibri" pitchFamily="34" charset="-122"/>
@@ -5668,13 +5650,11 @@
             </a:avLst>
           </a:prstGeom>
           <a:solidFill>
-            <a:srgbClr val="0E1F3D">
-              <a:alpha val="85000"/>
-            </a:srgbClr>
+            <a:srgbClr val="F1F5F9"/>
           </a:solidFill>
           <a:ln w="12700">
             <a:solidFill>
-              <a:srgbClr val="1E3A5F"/>
+              <a:srgbClr val="D6DEE8"/>
             </a:solidFill>
             <a:prstDash val="solid"/>
           </a:ln>
@@ -5697,13 +5677,11 @@
             </a:avLst>
           </a:prstGeom>
           <a:solidFill>
-            <a:srgbClr val="0E1F3D">
-              <a:alpha val="85000"/>
-            </a:srgbClr>
+            <a:srgbClr val="F1F5F9"/>
           </a:solidFill>
           <a:ln w="15875">
             <a:solidFill>
-              <a:srgbClr val="38BDF8"/>
+              <a:srgbClr val="0E7490"/>
             </a:solidFill>
             <a:prstDash val="solid"/>
           </a:ln>
@@ -5736,7 +5714,7 @@
             <a:r>
               <a:rPr lang="en-US" sz="1800" b="1" dirty="0">
                 <a:solidFill>
-                  <a:srgbClr val="38BDF8"/>
+                  <a:srgbClr val="0E7490"/>
                 </a:solidFill>
                 <a:latin typeface="Arial" pitchFamily="34" charset="0"/>
                 <a:ea typeface="Arial" pitchFamily="34" charset="-122"/>
@@ -5775,7 +5753,7 @@
             <a:r>
               <a:rPr lang="en-US" sz="1100" dirty="0">
                 <a:solidFill>
-                  <a:srgbClr val="CBD5E1"/>
+                  <a:srgbClr val="334155"/>
                 </a:solidFill>
                 <a:latin typeface="Calibri" pitchFamily="34" charset="0"/>
                 <a:ea typeface="Calibri" pitchFamily="34" charset="-122"/>
@@ -5804,13 +5782,11 @@
             </a:avLst>
           </a:prstGeom>
           <a:solidFill>
-            <a:srgbClr val="0E1F3D">
-              <a:alpha val="85000"/>
-            </a:srgbClr>
+            <a:srgbClr val="F1F5F9"/>
           </a:solidFill>
           <a:ln w="12700">
             <a:solidFill>
-              <a:srgbClr val="1E3A5F"/>
+              <a:srgbClr val="D6DEE8"/>
             </a:solidFill>
             <a:prstDash val="solid"/>
           </a:ln>
@@ -5843,7 +5819,7 @@
             <a:r>
               <a:rPr lang="en-US" sz="1700" b="1" dirty="0">
                 <a:solidFill>
-                  <a:srgbClr val="38BDF8"/>
+                  <a:srgbClr val="0E7490"/>
                 </a:solidFill>
                 <a:latin typeface="Arial" pitchFamily="34" charset="0"/>
                 <a:ea typeface="Arial" pitchFamily="34" charset="-122"/>
@@ -5882,7 +5858,7 @@
             <a:r>
               <a:rPr lang="en-US" sz="1150" dirty="0">
                 <a:solidFill>
-                  <a:srgbClr val="FFFFFF"/>
+                  <a:srgbClr val="0F172A"/>
                 </a:solidFill>
                 <a:latin typeface="Calibri" pitchFamily="34" charset="0"/>
                 <a:ea typeface="Calibri" pitchFamily="34" charset="-122"/>
@@ -5921,7 +5897,7 @@
             <a:r>
               <a:rPr lang="en-US" sz="1800" b="1" dirty="0">
                 <a:solidFill>
-                  <a:srgbClr val="38BDF8"/>
+                  <a:srgbClr val="0E7490"/>
                 </a:solidFill>
                 <a:latin typeface="Calibri" pitchFamily="34" charset="0"/>
                 <a:ea typeface="Calibri" pitchFamily="34" charset="-122"/>
@@ -5950,13 +5926,11 @@
             </a:avLst>
           </a:prstGeom>
           <a:solidFill>
-            <a:srgbClr val="0E1F3D">
-              <a:alpha val="85000"/>
-            </a:srgbClr>
+            <a:srgbClr val="F1F5F9"/>
           </a:solidFill>
           <a:ln w="12700">
             <a:solidFill>
-              <a:srgbClr val="1E3A5F"/>
+              <a:srgbClr val="D6DEE8"/>
             </a:solidFill>
             <a:prstDash val="solid"/>
           </a:ln>
@@ -5989,7 +5963,7 @@
             <a:r>
               <a:rPr lang="en-US" sz="1700" b="1" dirty="0">
                 <a:solidFill>
-                  <a:srgbClr val="38BDF8"/>
+                  <a:srgbClr val="0E7490"/>
                 </a:solidFill>
                 <a:latin typeface="Arial" pitchFamily="34" charset="0"/>
                 <a:ea typeface="Arial" pitchFamily="34" charset="-122"/>
@@ -6028,7 +6002,7 @@
             <a:r>
               <a:rPr lang="en-US" sz="1150" dirty="0">
                 <a:solidFill>
-                  <a:srgbClr val="FFFFFF"/>
+                  <a:srgbClr val="0F172A"/>
                 </a:solidFill>
                 <a:latin typeface="Calibri" pitchFamily="34" charset="0"/>
                 <a:ea typeface="Calibri" pitchFamily="34" charset="-122"/>
@@ -6067,7 +6041,7 @@
             <a:r>
               <a:rPr lang="en-US" sz="1800" b="1" dirty="0">
                 <a:solidFill>
-                  <a:srgbClr val="38BDF8"/>
+                  <a:srgbClr val="0E7490"/>
                 </a:solidFill>
                 <a:latin typeface="Calibri" pitchFamily="34" charset="0"/>
                 <a:ea typeface="Calibri" pitchFamily="34" charset="-122"/>
@@ -6096,13 +6070,11 @@
             </a:avLst>
           </a:prstGeom>
           <a:solidFill>
-            <a:srgbClr val="0E1F3D">
-              <a:alpha val="85000"/>
-            </a:srgbClr>
+            <a:srgbClr val="F1F5F9"/>
           </a:solidFill>
           <a:ln w="12700">
             <a:solidFill>
-              <a:srgbClr val="1E3A5F"/>
+              <a:srgbClr val="D6DEE8"/>
             </a:solidFill>
             <a:prstDash val="solid"/>
           </a:ln>
@@ -6135,7 +6107,7 @@
             <a:r>
               <a:rPr lang="en-US" sz="1700" b="1" dirty="0">
                 <a:solidFill>
-                  <a:srgbClr val="38BDF8"/>
+                  <a:srgbClr val="0E7490"/>
                 </a:solidFill>
                 <a:latin typeface="Arial" pitchFamily="34" charset="0"/>
                 <a:ea typeface="Arial" pitchFamily="34" charset="-122"/>
@@ -6174,7 +6146,7 @@
             <a:r>
               <a:rPr lang="en-US" sz="1150" dirty="0">
                 <a:solidFill>
-                  <a:srgbClr val="FFFFFF"/>
+                  <a:srgbClr val="0F172A"/>
                 </a:solidFill>
                 <a:latin typeface="Calibri" pitchFamily="34" charset="0"/>
                 <a:ea typeface="Calibri" pitchFamily="34" charset="-122"/>
@@ -6213,7 +6185,7 @@
             <a:r>
               <a:rPr lang="en-US" sz="1800" b="1" dirty="0">
                 <a:solidFill>
-                  <a:srgbClr val="38BDF8"/>
+                  <a:srgbClr val="0E7490"/>
                 </a:solidFill>
                 <a:latin typeface="Calibri" pitchFamily="34" charset="0"/>
                 <a:ea typeface="Calibri" pitchFamily="34" charset="-122"/>
@@ -6242,13 +6214,11 @@
             </a:avLst>
           </a:prstGeom>
           <a:solidFill>
-            <a:srgbClr val="0E1F3D">
-              <a:alpha val="85000"/>
-            </a:srgbClr>
+            <a:srgbClr val="F1F5F9"/>
           </a:solidFill>
           <a:ln w="12700">
             <a:solidFill>
-              <a:srgbClr val="1E3A5F"/>
+              <a:srgbClr val="D6DEE8"/>
             </a:solidFill>
             <a:prstDash val="solid"/>
           </a:ln>
@@ -6281,7 +6251,7 @@
             <a:r>
               <a:rPr lang="en-US" sz="1700" b="1" dirty="0">
                 <a:solidFill>
-                  <a:srgbClr val="38BDF8"/>
+                  <a:srgbClr val="0E7490"/>
                 </a:solidFill>
                 <a:latin typeface="Arial" pitchFamily="34" charset="0"/>
                 <a:ea typeface="Arial" pitchFamily="34" charset="-122"/>
@@ -6320,7 +6290,7 @@
             <a:r>
               <a:rPr lang="en-US" sz="1150" dirty="0">
                 <a:solidFill>
-                  <a:srgbClr val="FFFFFF"/>
+                  <a:srgbClr val="0F172A"/>
                 </a:solidFill>
                 <a:latin typeface="Calibri" pitchFamily="34" charset="0"/>
                 <a:ea typeface="Calibri" pitchFamily="34" charset="-122"/>
@@ -6349,13 +6319,11 @@
             </a:avLst>
           </a:prstGeom>
           <a:solidFill>
-            <a:srgbClr val="0E1F3D">
-              <a:alpha val="85000"/>
-            </a:srgbClr>
+            <a:srgbClr val="F1F5F9"/>
           </a:solidFill>
           <a:ln w="12700">
             <a:solidFill>
-              <a:srgbClr val="1E3A5F"/>
+              <a:srgbClr val="D6DEE8"/>
             </a:solidFill>
             <a:prstDash val="solid"/>
           </a:ln>
@@ -6388,7 +6356,7 @@
             <a:r>
               <a:rPr lang="en-US" sz="1050" i="1" dirty="0">
                 <a:solidFill>
-                  <a:srgbClr val="94A3B8"/>
+                  <a:srgbClr val="64748B"/>
                 </a:solidFill>
                 <a:latin typeface="Calibri" pitchFamily="34" charset="0"/>
                 <a:ea typeface="Calibri" pitchFamily="34" charset="-122"/>
@@ -6417,18 +6385,18 @@
             </a:avLst>
           </a:prstGeom>
           <a:solidFill>
-            <a:srgbClr val="020617"/>
+            <a:srgbClr val="0F172A"/>
           </a:solidFill>
           <a:ln w="12700">
             <a:solidFill>
-              <a:srgbClr val="38BDF8"/>
+              <a:srgbClr val="0F172A"/>
             </a:solidFill>
             <a:prstDash val="solid"/>
           </a:ln>
           <a:effectLst>
-            <a:outerShdw sx="100000" sy="100000" kx="0" ky="0" algn="bl" rotWithShape="0" blurRad="177800" dist="50800" dir="5400000">
-              <a:srgbClr val="38BDF8">
-                <a:alpha val="35000"/>
+            <a:outerShdw sx="100000" sy="100000" kx="0" ky="0" algn="bl" rotWithShape="0" blurRad="127000" dist="25400" dir="5400000">
+              <a:srgbClr val="0F172A">
+                <a:alpha val="16000"/>
               </a:srgbClr>
             </a:outerShdw>
           </a:effectLst>
@@ -6485,7 +6453,7 @@
             <a:r>
               <a:rPr lang="en-US" sz="1050" dirty="0">
                 <a:solidFill>
-                  <a:srgbClr val="94A3B8"/>
+                  <a:srgbClr val="64748B"/>
                 </a:solidFill>
                 <a:latin typeface="Calibri" pitchFamily="34" charset="0"/>
                 <a:ea typeface="Calibri" pitchFamily="34" charset="-122"/>
@@ -6527,7 +6495,7 @@
             <a:lvl1pPr>
               <a:defRPr sz="900">
                 <a:solidFill>
-                  <a:srgbClr val="94A3B8"/>
+                  <a:srgbClr val="64748B"/>
                 </a:solidFill>
               </a:defRPr>
             </a:lvl1pPr>
@@ -6594,7 +6562,7 @@
             <a:r>
               <a:rPr lang="en-US" sz="1100" b="1" spc="200" kern="0" dirty="0">
                 <a:solidFill>
-                  <a:srgbClr val="38BDF8"/>
+                  <a:srgbClr val="0E7490"/>
                 </a:solidFill>
                 <a:latin typeface="Calibri" pitchFamily="34" charset="0"/>
                 <a:ea typeface="Calibri" pitchFamily="34" charset="-122"/>
@@ -6635,7 +6603,7 @@
             <a:r>
               <a:rPr lang="en-US" sz="3400" b="1" dirty="0">
                 <a:solidFill>
-                  <a:schemeClr val="bg1"/>
+                  <a:schemeClr val="tx1"/>
                 </a:solidFill>
               </a:rPr>
               <a:t>Why Patients Lose the </a:t>
@@ -6646,7 +6614,7 @@
             <a:r>
               <a:rPr lang="en-US" sz="3400" b="1" dirty="0">
                 <a:solidFill>
-                  <a:srgbClr val="38BDF8"/>
+                  <a:srgbClr val="0E7490"/>
                 </a:solidFill>
               </a:rPr>
               <a:t>Golden Hour</a:t>
@@ -6672,13 +6640,11 @@
             </a:avLst>
           </a:prstGeom>
           <a:solidFill>
-            <a:srgbClr val="0E1F3D">
-              <a:alpha val="85000"/>
-            </a:srgbClr>
+            <a:srgbClr val="F1F5F9"/>
           </a:solidFill>
           <a:ln w="15875">
             <a:solidFill>
-              <a:srgbClr val="F87171"/>
+              <a:srgbClr val="DC2626"/>
             </a:solidFill>
             <a:prstDash val="solid"/>
           </a:ln>
@@ -6735,7 +6701,7 @@
             <a:r>
               <a:rPr lang="en-US" sz="5200" b="1" dirty="0">
                 <a:solidFill>
-                  <a:srgbClr val="F87171"/>
+                  <a:srgbClr val="DC2626"/>
                 </a:solidFill>
                 <a:latin typeface="Arial" pitchFamily="34" charset="0"/>
                 <a:ea typeface="Arial" pitchFamily="34" charset="-122"/>
@@ -6774,7 +6740,7 @@
             <a:r>
               <a:rPr lang="en-US" sz="1500" b="1" dirty="0">
                 <a:solidFill>
-                  <a:srgbClr val="FFFFFF"/>
+                  <a:srgbClr val="0F172A"/>
                 </a:solidFill>
                 <a:latin typeface="Calibri" pitchFamily="34" charset="0"/>
                 <a:ea typeface="Calibri" pitchFamily="34" charset="-122"/>
@@ -6813,7 +6779,7 @@
             <a:r>
               <a:rPr lang="en-US" sz="1100" dirty="0">
                 <a:solidFill>
-                  <a:srgbClr val="94A3B8"/>
+                  <a:srgbClr val="64748B"/>
                 </a:solidFill>
                 <a:latin typeface="Calibri" pitchFamily="34" charset="0"/>
                 <a:ea typeface="Calibri" pitchFamily="34" charset="-122"/>
@@ -6842,13 +6808,11 @@
             </a:avLst>
           </a:prstGeom>
           <a:solidFill>
-            <a:srgbClr val="0E1F3D">
-              <a:alpha val="85000"/>
-            </a:srgbClr>
+            <a:srgbClr val="F1F5F9"/>
           </a:solidFill>
           <a:ln w="12700">
             <a:solidFill>
-              <a:srgbClr val="1E3A5F"/>
+              <a:srgbClr val="D6DEE8"/>
             </a:solidFill>
             <a:prstDash val="solid"/>
           </a:ln>
@@ -6905,7 +6869,7 @@
             <a:r>
               <a:rPr lang="en-US" sz="1300" b="1" dirty="0">
                 <a:solidFill>
-                  <a:srgbClr val="FFFFFF"/>
+                  <a:srgbClr val="0F172A"/>
                 </a:solidFill>
                 <a:latin typeface="Calibri" pitchFamily="34" charset="0"/>
                 <a:ea typeface="Calibri" pitchFamily="34" charset="-122"/>
@@ -6944,7 +6908,7 @@
             <a:r>
               <a:rPr lang="en-US" sz="1050" dirty="0">
                 <a:solidFill>
-                  <a:srgbClr val="CBD5E1"/>
+                  <a:srgbClr val="334155"/>
                 </a:solidFill>
                 <a:latin typeface="Calibri" pitchFamily="34" charset="0"/>
                 <a:ea typeface="Calibri" pitchFamily="34" charset="-122"/>
@@ -6973,13 +6937,11 @@
             </a:avLst>
           </a:prstGeom>
           <a:solidFill>
-            <a:srgbClr val="0E1F3D">
-              <a:alpha val="85000"/>
-            </a:srgbClr>
+            <a:srgbClr val="F1F5F9"/>
           </a:solidFill>
           <a:ln w="12700">
             <a:solidFill>
-              <a:srgbClr val="1E3A5F"/>
+              <a:srgbClr val="D6DEE8"/>
             </a:solidFill>
             <a:prstDash val="solid"/>
           </a:ln>
@@ -7036,7 +6998,7 @@
             <a:r>
               <a:rPr lang="en-US" sz="1300" b="1" dirty="0">
                 <a:solidFill>
-                  <a:srgbClr val="FFFFFF"/>
+                  <a:srgbClr val="0F172A"/>
                 </a:solidFill>
                 <a:latin typeface="Calibri" pitchFamily="34" charset="0"/>
                 <a:ea typeface="Calibri" pitchFamily="34" charset="-122"/>
@@ -7075,7 +7037,7 @@
             <a:r>
               <a:rPr lang="en-US" sz="1050" dirty="0">
                 <a:solidFill>
-                  <a:srgbClr val="CBD5E1"/>
+                  <a:srgbClr val="334155"/>
                 </a:solidFill>
                 <a:latin typeface="Calibri" pitchFamily="34" charset="0"/>
                 <a:ea typeface="Calibri" pitchFamily="34" charset="-122"/>
@@ -7104,13 +7066,11 @@
             </a:avLst>
           </a:prstGeom>
           <a:solidFill>
-            <a:srgbClr val="0E1F3D">
-              <a:alpha val="85000"/>
-            </a:srgbClr>
+            <a:srgbClr val="F1F5F9"/>
           </a:solidFill>
           <a:ln w="12700">
             <a:solidFill>
-              <a:srgbClr val="1E3A5F"/>
+              <a:srgbClr val="D6DEE8"/>
             </a:solidFill>
             <a:prstDash val="solid"/>
           </a:ln>
@@ -7167,7 +7127,7 @@
             <a:r>
               <a:rPr lang="en-US" sz="1300" b="1" dirty="0">
                 <a:solidFill>
-                  <a:srgbClr val="FFFFFF"/>
+                  <a:srgbClr val="0F172A"/>
                 </a:solidFill>
                 <a:latin typeface="Calibri" pitchFamily="34" charset="0"/>
                 <a:ea typeface="Calibri" pitchFamily="34" charset="-122"/>
@@ -7206,7 +7166,7 @@
             <a:r>
               <a:rPr lang="en-US" sz="1050" dirty="0">
                 <a:solidFill>
-                  <a:srgbClr val="CBD5E1"/>
+                  <a:srgbClr val="334155"/>
                 </a:solidFill>
                 <a:latin typeface="Calibri" pitchFamily="34" charset="0"/>
                 <a:ea typeface="Calibri" pitchFamily="34" charset="-122"/>
@@ -7235,13 +7195,11 @@
             </a:avLst>
           </a:prstGeom>
           <a:solidFill>
-            <a:srgbClr val="0E1F3D">
-              <a:alpha val="85000"/>
-            </a:srgbClr>
+            <a:srgbClr val="F1F5F9"/>
           </a:solidFill>
           <a:ln w="12700">
             <a:solidFill>
-              <a:srgbClr val="1E3A5F"/>
+              <a:srgbClr val="D6DEE8"/>
             </a:solidFill>
             <a:prstDash val="solid"/>
           </a:ln>
@@ -7298,7 +7256,7 @@
             <a:r>
               <a:rPr lang="en-US" sz="1300" b="1" dirty="0">
                 <a:solidFill>
-                  <a:srgbClr val="FFFFFF"/>
+                  <a:srgbClr val="0F172A"/>
                 </a:solidFill>
                 <a:latin typeface="Calibri" pitchFamily="34" charset="0"/>
                 <a:ea typeface="Calibri" pitchFamily="34" charset="-122"/>
@@ -7337,7 +7295,7 @@
             <a:r>
               <a:rPr lang="en-US" sz="1050" dirty="0">
                 <a:solidFill>
-                  <a:srgbClr val="CBD5E1"/>
+                  <a:srgbClr val="334155"/>
                 </a:solidFill>
                 <a:latin typeface="Calibri" pitchFamily="34" charset="0"/>
                 <a:ea typeface="Calibri" pitchFamily="34" charset="-122"/>
@@ -7366,13 +7324,11 @@
             </a:avLst>
           </a:prstGeom>
           <a:solidFill>
-            <a:srgbClr val="0E1F3D">
-              <a:alpha val="85000"/>
-            </a:srgbClr>
+            <a:srgbClr val="F1F5F9"/>
           </a:solidFill>
           <a:ln w="12700">
             <a:solidFill>
-              <a:srgbClr val="1E3A5F"/>
+              <a:srgbClr val="D6DEE8"/>
             </a:solidFill>
             <a:prstDash val="solid"/>
           </a:ln>
@@ -7429,7 +7385,7 @@
             <a:r>
               <a:rPr lang="en-US" sz="1300" b="1" dirty="0">
                 <a:solidFill>
-                  <a:srgbClr val="FFFFFF"/>
+                  <a:srgbClr val="0F172A"/>
                 </a:solidFill>
                 <a:latin typeface="Calibri" pitchFamily="34" charset="0"/>
                 <a:ea typeface="Calibri" pitchFamily="34" charset="-122"/>
@@ -7468,7 +7424,7 @@
             <a:r>
               <a:rPr lang="en-US" sz="1050" dirty="0">
                 <a:solidFill>
-                  <a:srgbClr val="CBD5E1"/>
+                  <a:srgbClr val="334155"/>
                 </a:solidFill>
                 <a:latin typeface="Calibri" pitchFamily="34" charset="0"/>
                 <a:ea typeface="Calibri" pitchFamily="34" charset="-122"/>
@@ -7497,13 +7453,11 @@
             </a:avLst>
           </a:prstGeom>
           <a:solidFill>
-            <a:srgbClr val="0E1F3D">
-              <a:alpha val="85000"/>
-            </a:srgbClr>
+            <a:srgbClr val="F1F5F9"/>
           </a:solidFill>
           <a:ln w="12700">
             <a:solidFill>
-              <a:srgbClr val="1E3A5F"/>
+              <a:srgbClr val="D6DEE8"/>
             </a:solidFill>
             <a:prstDash val="solid"/>
           </a:ln>
@@ -7560,7 +7514,7 @@
             <a:r>
               <a:rPr lang="en-US" sz="1300" b="1" dirty="0">
                 <a:solidFill>
-                  <a:srgbClr val="FFFFFF"/>
+                  <a:srgbClr val="0F172A"/>
                 </a:solidFill>
                 <a:latin typeface="Calibri" pitchFamily="34" charset="0"/>
                 <a:ea typeface="Calibri" pitchFamily="34" charset="-122"/>
@@ -7599,7 +7553,7 @@
             <a:r>
               <a:rPr lang="en-US" sz="1050" dirty="0">
                 <a:solidFill>
-                  <a:srgbClr val="CBD5E1"/>
+                  <a:srgbClr val="334155"/>
                 </a:solidFill>
                 <a:latin typeface="Calibri" pitchFamily="34" charset="0"/>
                 <a:ea typeface="Calibri" pitchFamily="34" charset="-122"/>
@@ -7638,7 +7592,7 @@
             <a:r>
               <a:rPr lang="en-US" sz="1100" b="1" spc="200" kern="0" dirty="0">
                 <a:solidFill>
-                  <a:srgbClr val="38BDF8"/>
+                  <a:srgbClr val="0E7490"/>
                 </a:solidFill>
                 <a:latin typeface="Calibri" pitchFamily="34" charset="0"/>
                 <a:ea typeface="Calibri" pitchFamily="34" charset="-122"/>
@@ -7701,7 +7655,7 @@
             <a:r>
               <a:rPr lang="en-US" sz="1100" b="1" dirty="0">
                 <a:solidFill>
-                  <a:srgbClr val="FFFFFF"/>
+                  <a:srgbClr val="0F172A"/>
                 </a:solidFill>
                 <a:latin typeface="Calibri" pitchFamily="34" charset="0"/>
                 <a:ea typeface="Calibri" pitchFamily="34" charset="-122"/>
@@ -7718,7 +7672,7 @@
             <a:r>
               <a:rPr lang="en-US" sz="1100" dirty="0">
                 <a:solidFill>
-                  <a:srgbClr val="CBD5E1"/>
+                  <a:srgbClr val="334155"/>
                 </a:solidFill>
                 <a:latin typeface="Calibri" pitchFamily="34" charset="0"/>
                 <a:ea typeface="Calibri" pitchFamily="34" charset="-122"/>
@@ -7781,7 +7735,7 @@
             <a:r>
               <a:rPr lang="en-US" sz="1100" b="1" dirty="0">
                 <a:solidFill>
-                  <a:srgbClr val="FFFFFF"/>
+                  <a:srgbClr val="0F172A"/>
                 </a:solidFill>
                 <a:latin typeface="Calibri" pitchFamily="34" charset="0"/>
                 <a:ea typeface="Calibri" pitchFamily="34" charset="-122"/>
@@ -7798,7 +7752,7 @@
             <a:r>
               <a:rPr lang="en-US" sz="1100" dirty="0">
                 <a:solidFill>
-                  <a:srgbClr val="CBD5E1"/>
+                  <a:srgbClr val="334155"/>
                 </a:solidFill>
                 <a:latin typeface="Calibri" pitchFamily="34" charset="0"/>
                 <a:ea typeface="Calibri" pitchFamily="34" charset="-122"/>
@@ -7861,7 +7815,7 @@
             <a:r>
               <a:rPr lang="en-US" sz="1100" b="1" dirty="0">
                 <a:solidFill>
-                  <a:srgbClr val="FFFFFF"/>
+                  <a:srgbClr val="0F172A"/>
                 </a:solidFill>
                 <a:latin typeface="Calibri" pitchFamily="34" charset="0"/>
                 <a:ea typeface="Calibri" pitchFamily="34" charset="-122"/>
@@ -7878,7 +7832,7 @@
             <a:r>
               <a:rPr lang="en-US" sz="1100" dirty="0">
                 <a:solidFill>
-                  <a:srgbClr val="CBD5E1"/>
+                  <a:srgbClr val="334155"/>
                 </a:solidFill>
                 <a:latin typeface="Calibri" pitchFamily="34" charset="0"/>
                 <a:ea typeface="Calibri" pitchFamily="34" charset="-122"/>
@@ -7941,7 +7895,7 @@
             <a:r>
               <a:rPr lang="en-US" sz="1100" b="1" dirty="0">
                 <a:solidFill>
-                  <a:srgbClr val="FFFFFF"/>
+                  <a:srgbClr val="0F172A"/>
                 </a:solidFill>
                 <a:latin typeface="Calibri" pitchFamily="34" charset="0"/>
                 <a:ea typeface="Calibri" pitchFamily="34" charset="-122"/>
@@ -7958,7 +7912,7 @@
             <a:r>
               <a:rPr lang="en-US" sz="1100" dirty="0">
                 <a:solidFill>
-                  <a:srgbClr val="CBD5E1"/>
+                  <a:srgbClr val="334155"/>
                 </a:solidFill>
                 <a:latin typeface="Calibri" pitchFamily="34" charset="0"/>
                 <a:ea typeface="Calibri" pitchFamily="34" charset="-122"/>
@@ -8000,7 +7954,7 @@
             <a:lvl1pPr>
               <a:defRPr sz="900">
                 <a:solidFill>
-                  <a:srgbClr val="94A3B8"/>
+                  <a:srgbClr val="64748B"/>
                 </a:solidFill>
               </a:defRPr>
             </a:lvl1pPr>
@@ -8067,7 +8021,7 @@
             <a:r>
               <a:rPr lang="en-US" sz="1100" b="1" spc="200" kern="0" dirty="0">
                 <a:solidFill>
-                  <a:srgbClr val="38BDF8"/>
+                  <a:srgbClr val="0E7490"/>
                 </a:solidFill>
                 <a:latin typeface="Calibri" pitchFamily="34" charset="0"/>
                 <a:ea typeface="Calibri" pitchFamily="34" charset="-122"/>
@@ -8108,7 +8062,7 @@
             <a:r>
               <a:rPr lang="en-US" sz="3400" b="1" dirty="0">
                 <a:solidFill>
-                  <a:schemeClr val="bg1"/>
+                  <a:schemeClr val="tx1"/>
                 </a:solidFill>
               </a:rPr>
               <a:t>One Flow from Emergency to </a:t>
@@ -8119,7 +8073,7 @@
             <a:r>
               <a:rPr lang="en-US" sz="3400" b="1" dirty="0">
                 <a:solidFill>
-                  <a:srgbClr val="38BDF8"/>
+                  <a:srgbClr val="0E7490"/>
                 </a:solidFill>
               </a:rPr>
               <a:t>Confirmed Bed</a:t>
@@ -8145,13 +8099,11 @@
             </a:avLst>
           </a:prstGeom>
           <a:solidFill>
-            <a:srgbClr val="0E1F3D">
-              <a:alpha val="85000"/>
-            </a:srgbClr>
+            <a:srgbClr val="F1F5F9"/>
           </a:solidFill>
           <a:ln w="12700">
             <a:solidFill>
-              <a:srgbClr val="1E3A5F"/>
+              <a:srgbClr val="D6DEE8"/>
             </a:solidFill>
             <a:prstDash val="solid"/>
           </a:ln>
@@ -8172,7 +8124,7 @@
             <a:avLst/>
           </a:prstGeom>
           <a:solidFill>
-            <a:srgbClr val="38BDF8"/>
+            <a:srgbClr val="0E7490"/>
           </a:solidFill>
           <a:ln/>
         </p:spPr>
@@ -8186,7 +8138,7 @@
             <a:r>
               <a:rPr lang="en-US" sz="1100" b="1" dirty="0">
                 <a:solidFill>
-                  <a:srgbClr val="07122A"/>
+                  <a:srgbClr val="FFFFFF"/>
                 </a:solidFill>
                 <a:latin typeface="Calibri" pitchFamily="34" charset="0"/>
                 <a:ea typeface="Calibri" pitchFamily="34" charset="-122"/>
@@ -8249,7 +8201,7 @@
             <a:r>
               <a:rPr lang="en-US" sz="1150" b="1" dirty="0">
                 <a:solidFill>
-                  <a:srgbClr val="38BDF8"/>
+                  <a:srgbClr val="0E7490"/>
                 </a:solidFill>
                 <a:latin typeface="Calibri" pitchFamily="34" charset="0"/>
                 <a:ea typeface="Calibri" pitchFamily="34" charset="-122"/>
@@ -8288,7 +8240,7 @@
             <a:r>
               <a:rPr lang="en-US" sz="1000" dirty="0">
                 <a:solidFill>
-                  <a:srgbClr val="CBD5E1"/>
+                  <a:srgbClr val="334155"/>
                 </a:solidFill>
                 <a:latin typeface="Calibri" pitchFamily="34" charset="0"/>
                 <a:ea typeface="Calibri" pitchFamily="34" charset="-122"/>
@@ -8327,7 +8279,7 @@
             <a:r>
               <a:rPr lang="en-US" sz="1800" b="1" dirty="0">
                 <a:solidFill>
-                  <a:srgbClr val="38BDF8"/>
+                  <a:srgbClr val="0E7490"/>
                 </a:solidFill>
                 <a:latin typeface="Calibri" pitchFamily="34" charset="0"/>
                 <a:ea typeface="Calibri" pitchFamily="34" charset="-122"/>
@@ -8356,13 +8308,11 @@
             </a:avLst>
           </a:prstGeom>
           <a:solidFill>
-            <a:srgbClr val="0E1F3D">
-              <a:alpha val="85000"/>
-            </a:srgbClr>
+            <a:srgbClr val="F1F5F9"/>
           </a:solidFill>
           <a:ln w="12700">
             <a:solidFill>
-              <a:srgbClr val="1E3A5F"/>
+              <a:srgbClr val="D6DEE8"/>
             </a:solidFill>
             <a:prstDash val="solid"/>
           </a:ln>
@@ -8383,7 +8333,7 @@
             <a:avLst/>
           </a:prstGeom>
           <a:solidFill>
-            <a:srgbClr val="38BDF8"/>
+            <a:srgbClr val="0E7490"/>
           </a:solidFill>
           <a:ln/>
         </p:spPr>
@@ -8397,7 +8347,7 @@
             <a:r>
               <a:rPr lang="en-US" sz="1100" b="1" dirty="0">
                 <a:solidFill>
-                  <a:srgbClr val="07122A"/>
+                  <a:srgbClr val="FFFFFF"/>
                 </a:solidFill>
                 <a:latin typeface="Calibri" pitchFamily="34" charset="0"/>
                 <a:ea typeface="Calibri" pitchFamily="34" charset="-122"/>
@@ -8460,7 +8410,7 @@
             <a:r>
               <a:rPr lang="en-US" sz="1150" b="1" dirty="0">
                 <a:solidFill>
-                  <a:srgbClr val="38BDF8"/>
+                  <a:srgbClr val="0E7490"/>
                 </a:solidFill>
                 <a:latin typeface="Calibri" pitchFamily="34" charset="0"/>
                 <a:ea typeface="Calibri" pitchFamily="34" charset="-122"/>
@@ -8499,7 +8449,7 @@
             <a:r>
               <a:rPr lang="en-US" sz="1000" dirty="0">
                 <a:solidFill>
-                  <a:srgbClr val="CBD5E1"/>
+                  <a:srgbClr val="334155"/>
                 </a:solidFill>
                 <a:latin typeface="Calibri" pitchFamily="34" charset="0"/>
                 <a:ea typeface="Calibri" pitchFamily="34" charset="-122"/>
@@ -8538,7 +8488,7 @@
             <a:r>
               <a:rPr lang="en-US" sz="1800" b="1" dirty="0">
                 <a:solidFill>
-                  <a:srgbClr val="38BDF8"/>
+                  <a:srgbClr val="0E7490"/>
                 </a:solidFill>
                 <a:latin typeface="Calibri" pitchFamily="34" charset="0"/>
                 <a:ea typeface="Calibri" pitchFamily="34" charset="-122"/>
@@ -8567,13 +8517,11 @@
             </a:avLst>
           </a:prstGeom>
           <a:solidFill>
-            <a:srgbClr val="0E1F3D">
-              <a:alpha val="85000"/>
-            </a:srgbClr>
+            <a:srgbClr val="F1F5F9"/>
           </a:solidFill>
           <a:ln w="12700">
             <a:solidFill>
-              <a:srgbClr val="1E3A5F"/>
+              <a:srgbClr val="D6DEE8"/>
             </a:solidFill>
             <a:prstDash val="solid"/>
           </a:ln>
@@ -8594,7 +8542,7 @@
             <a:avLst/>
           </a:prstGeom>
           <a:solidFill>
-            <a:srgbClr val="38BDF8"/>
+            <a:srgbClr val="0E7490"/>
           </a:solidFill>
           <a:ln/>
         </p:spPr>
@@ -8608,7 +8556,7 @@
             <a:r>
               <a:rPr lang="en-US" sz="1100" b="1" dirty="0">
                 <a:solidFill>
-                  <a:srgbClr val="07122A"/>
+                  <a:srgbClr val="FFFFFF"/>
                 </a:solidFill>
                 <a:latin typeface="Calibri" pitchFamily="34" charset="0"/>
                 <a:ea typeface="Calibri" pitchFamily="34" charset="-122"/>
@@ -8671,7 +8619,7 @@
             <a:r>
               <a:rPr lang="en-US" sz="1150" b="1" dirty="0">
                 <a:solidFill>
-                  <a:srgbClr val="38BDF8"/>
+                  <a:srgbClr val="0E7490"/>
                 </a:solidFill>
                 <a:latin typeface="Calibri" pitchFamily="34" charset="0"/>
                 <a:ea typeface="Calibri" pitchFamily="34" charset="-122"/>
@@ -8710,7 +8658,7 @@
             <a:r>
               <a:rPr lang="en-US" sz="1000" dirty="0">
                 <a:solidFill>
-                  <a:srgbClr val="CBD5E1"/>
+                  <a:srgbClr val="334155"/>
                 </a:solidFill>
                 <a:latin typeface="Calibri" pitchFamily="34" charset="0"/>
                 <a:ea typeface="Calibri" pitchFamily="34" charset="-122"/>
@@ -8749,7 +8697,7 @@
             <a:r>
               <a:rPr lang="en-US" sz="1800" b="1" dirty="0">
                 <a:solidFill>
-                  <a:srgbClr val="38BDF8"/>
+                  <a:srgbClr val="0E7490"/>
                 </a:solidFill>
                 <a:latin typeface="Calibri" pitchFamily="34" charset="0"/>
                 <a:ea typeface="Calibri" pitchFamily="34" charset="-122"/>
@@ -8778,13 +8726,11 @@
             </a:avLst>
           </a:prstGeom>
           <a:solidFill>
-            <a:srgbClr val="0E1F3D">
-              <a:alpha val="85000"/>
-            </a:srgbClr>
+            <a:srgbClr val="F1F5F9"/>
           </a:solidFill>
           <a:ln w="12700">
             <a:solidFill>
-              <a:srgbClr val="1E3A5F"/>
+              <a:srgbClr val="D6DEE8"/>
             </a:solidFill>
             <a:prstDash val="solid"/>
           </a:ln>
@@ -8805,7 +8751,7 @@
             <a:avLst/>
           </a:prstGeom>
           <a:solidFill>
-            <a:srgbClr val="38BDF8"/>
+            <a:srgbClr val="0E7490"/>
           </a:solidFill>
           <a:ln/>
         </p:spPr>
@@ -8819,7 +8765,7 @@
             <a:r>
               <a:rPr lang="en-US" sz="1100" b="1" dirty="0">
                 <a:solidFill>
-                  <a:srgbClr val="07122A"/>
+                  <a:srgbClr val="FFFFFF"/>
                 </a:solidFill>
                 <a:latin typeface="Calibri" pitchFamily="34" charset="0"/>
                 <a:ea typeface="Calibri" pitchFamily="34" charset="-122"/>
@@ -8882,7 +8828,7 @@
             <a:r>
               <a:rPr lang="en-US" sz="1150" b="1" dirty="0">
                 <a:solidFill>
-                  <a:srgbClr val="38BDF8"/>
+                  <a:srgbClr val="0E7490"/>
                 </a:solidFill>
                 <a:latin typeface="Calibri" pitchFamily="34" charset="0"/>
                 <a:ea typeface="Calibri" pitchFamily="34" charset="-122"/>
@@ -8921,7 +8867,7 @@
             <a:r>
               <a:rPr lang="en-US" sz="1000" dirty="0">
                 <a:solidFill>
-                  <a:srgbClr val="CBD5E1"/>
+                  <a:srgbClr val="334155"/>
                 </a:solidFill>
                 <a:latin typeface="Calibri" pitchFamily="34" charset="0"/>
                 <a:ea typeface="Calibri" pitchFamily="34" charset="-122"/>
@@ -8960,7 +8906,7 @@
             <a:r>
               <a:rPr lang="en-US" sz="1800" b="1" dirty="0">
                 <a:solidFill>
-                  <a:srgbClr val="38BDF8"/>
+                  <a:srgbClr val="0E7490"/>
                 </a:solidFill>
                 <a:latin typeface="Calibri" pitchFamily="34" charset="0"/>
                 <a:ea typeface="Calibri" pitchFamily="34" charset="-122"/>
@@ -8989,13 +8935,11 @@
             </a:avLst>
           </a:prstGeom>
           <a:solidFill>
-            <a:srgbClr val="0E1F3D">
-              <a:alpha val="85000"/>
-            </a:srgbClr>
+            <a:srgbClr val="F1F5F9"/>
           </a:solidFill>
           <a:ln w="12700">
             <a:solidFill>
-              <a:srgbClr val="1E3A5F"/>
+              <a:srgbClr val="D6DEE8"/>
             </a:solidFill>
             <a:prstDash val="solid"/>
           </a:ln>
@@ -9016,7 +8960,7 @@
             <a:avLst/>
           </a:prstGeom>
           <a:solidFill>
-            <a:srgbClr val="38BDF8"/>
+            <a:srgbClr val="0E7490"/>
           </a:solidFill>
           <a:ln/>
         </p:spPr>
@@ -9030,7 +8974,7 @@
             <a:r>
               <a:rPr lang="en-US" sz="1100" b="1" dirty="0">
                 <a:solidFill>
-                  <a:srgbClr val="07122A"/>
+                  <a:srgbClr val="FFFFFF"/>
                 </a:solidFill>
                 <a:latin typeface="Calibri" pitchFamily="34" charset="0"/>
                 <a:ea typeface="Calibri" pitchFamily="34" charset="-122"/>
@@ -9093,7 +9037,7 @@
             <a:r>
               <a:rPr lang="en-US" sz="1150" b="1" dirty="0">
                 <a:solidFill>
-                  <a:srgbClr val="38BDF8"/>
+                  <a:srgbClr val="0E7490"/>
                 </a:solidFill>
                 <a:latin typeface="Calibri" pitchFamily="34" charset="0"/>
                 <a:ea typeface="Calibri" pitchFamily="34" charset="-122"/>
@@ -9132,7 +9076,7 @@
             <a:r>
               <a:rPr lang="en-US" sz="1000" dirty="0">
                 <a:solidFill>
-                  <a:srgbClr val="CBD5E1"/>
+                  <a:srgbClr val="334155"/>
                 </a:solidFill>
                 <a:latin typeface="Calibri" pitchFamily="34" charset="0"/>
                 <a:ea typeface="Calibri" pitchFamily="34" charset="-122"/>
@@ -9171,7 +9115,7 @@
             <a:r>
               <a:rPr lang="en-US" sz="1800" b="1" dirty="0">
                 <a:solidFill>
-                  <a:srgbClr val="38BDF8"/>
+                  <a:srgbClr val="0E7490"/>
                 </a:solidFill>
                 <a:latin typeface="Calibri" pitchFamily="34" charset="0"/>
                 <a:ea typeface="Calibri" pitchFamily="34" charset="-122"/>
@@ -9200,13 +9144,11 @@
             </a:avLst>
           </a:prstGeom>
           <a:solidFill>
-            <a:srgbClr val="0E1F3D">
-              <a:alpha val="85000"/>
-            </a:srgbClr>
+            <a:srgbClr val="F1F5F9"/>
           </a:solidFill>
           <a:ln w="12700">
             <a:solidFill>
-              <a:srgbClr val="1E3A5F"/>
+              <a:srgbClr val="D6DEE8"/>
             </a:solidFill>
             <a:prstDash val="solid"/>
           </a:ln>
@@ -9227,7 +9169,7 @@
             <a:avLst/>
           </a:prstGeom>
           <a:solidFill>
-            <a:srgbClr val="38BDF8"/>
+            <a:srgbClr val="0E7490"/>
           </a:solidFill>
           <a:ln/>
         </p:spPr>
@@ -9241,7 +9183,7 @@
             <a:r>
               <a:rPr lang="en-US" sz="1100" b="1" dirty="0">
                 <a:solidFill>
-                  <a:srgbClr val="07122A"/>
+                  <a:srgbClr val="FFFFFF"/>
                 </a:solidFill>
                 <a:latin typeface="Calibri" pitchFamily="34" charset="0"/>
                 <a:ea typeface="Calibri" pitchFamily="34" charset="-122"/>
@@ -9304,7 +9246,7 @@
             <a:r>
               <a:rPr lang="en-US" sz="1150" b="1" dirty="0">
                 <a:solidFill>
-                  <a:srgbClr val="38BDF8"/>
+                  <a:srgbClr val="0E7490"/>
                 </a:solidFill>
                 <a:latin typeface="Calibri" pitchFamily="34" charset="0"/>
                 <a:ea typeface="Calibri" pitchFamily="34" charset="-122"/>
@@ -9343,7 +9285,7 @@
             <a:r>
               <a:rPr lang="en-US" sz="1000" dirty="0">
                 <a:solidFill>
-                  <a:srgbClr val="CBD5E1"/>
+                  <a:srgbClr val="334155"/>
                 </a:solidFill>
                 <a:latin typeface="Calibri" pitchFamily="34" charset="0"/>
                 <a:ea typeface="Calibri" pitchFamily="34" charset="-122"/>
@@ -9382,7 +9324,7 @@
             <a:r>
               <a:rPr lang="en-US" sz="1800" b="1" dirty="0">
                 <a:solidFill>
-                  <a:srgbClr val="38BDF8"/>
+                  <a:srgbClr val="0E7490"/>
                 </a:solidFill>
                 <a:latin typeface="Calibri" pitchFamily="34" charset="0"/>
                 <a:ea typeface="Calibri" pitchFamily="34" charset="-122"/>
@@ -9411,13 +9353,11 @@
             </a:avLst>
           </a:prstGeom>
           <a:solidFill>
-            <a:srgbClr val="0E1F3D">
-              <a:alpha val="85000"/>
-            </a:srgbClr>
+            <a:srgbClr val="F1F5F9"/>
           </a:solidFill>
           <a:ln w="12700">
             <a:solidFill>
-              <a:srgbClr val="1E3A5F"/>
+              <a:srgbClr val="D6DEE8"/>
             </a:solidFill>
             <a:prstDash val="solid"/>
           </a:ln>
@@ -9438,7 +9378,7 @@
             <a:avLst/>
           </a:prstGeom>
           <a:solidFill>
-            <a:srgbClr val="38BDF8"/>
+            <a:srgbClr val="0E7490"/>
           </a:solidFill>
           <a:ln/>
         </p:spPr>
@@ -9452,7 +9392,7 @@
             <a:r>
               <a:rPr lang="en-US" sz="1100" b="1" dirty="0">
                 <a:solidFill>
-                  <a:srgbClr val="07122A"/>
+                  <a:srgbClr val="FFFFFF"/>
                 </a:solidFill>
                 <a:latin typeface="Calibri" pitchFamily="34" charset="0"/>
                 <a:ea typeface="Calibri" pitchFamily="34" charset="-122"/>
@@ -9515,7 +9455,7 @@
             <a:r>
               <a:rPr lang="en-US" sz="1150" b="1" dirty="0">
                 <a:solidFill>
-                  <a:srgbClr val="38BDF8"/>
+                  <a:srgbClr val="0E7490"/>
                 </a:solidFill>
                 <a:latin typeface="Calibri" pitchFamily="34" charset="0"/>
                 <a:ea typeface="Calibri" pitchFamily="34" charset="-122"/>
@@ -9554,7 +9494,7 @@
             <a:r>
               <a:rPr lang="en-US" sz="1000" dirty="0">
                 <a:solidFill>
-                  <a:srgbClr val="CBD5E1"/>
+                  <a:srgbClr val="334155"/>
                 </a:solidFill>
                 <a:latin typeface="Calibri" pitchFamily="34" charset="0"/>
                 <a:ea typeface="Calibri" pitchFamily="34" charset="-122"/>
@@ -9583,18 +9523,18 @@
             </a:avLst>
           </a:prstGeom>
           <a:solidFill>
-            <a:srgbClr val="020617"/>
+            <a:srgbClr val="0F172A"/>
           </a:solidFill>
           <a:ln w="12700">
             <a:solidFill>
-              <a:srgbClr val="38BDF8"/>
+              <a:srgbClr val="0F172A"/>
             </a:solidFill>
             <a:prstDash val="solid"/>
           </a:ln>
           <a:effectLst>
-            <a:outerShdw sx="100000" sy="100000" kx="0" ky="0" algn="bl" rotWithShape="0" blurRad="177800" dist="50800" dir="5400000">
-              <a:srgbClr val="38BDF8">
-                <a:alpha val="35000"/>
+            <a:outerShdw sx="100000" sy="100000" kx="0" ky="0" algn="bl" rotWithShape="0" blurRad="127000" dist="25400" dir="5400000">
+              <a:srgbClr val="0F172A">
+                <a:alpha val="16000"/>
               </a:srgbClr>
             </a:outerShdw>
           </a:effectLst>
@@ -9651,7 +9591,7 @@
             <a:r>
               <a:rPr lang="en-US" sz="1050" dirty="0">
                 <a:solidFill>
-                  <a:srgbClr val="94A3B8"/>
+                  <a:srgbClr val="64748B"/>
                 </a:solidFill>
                 <a:latin typeface="Calibri" pitchFamily="34" charset="0"/>
                 <a:ea typeface="Calibri" pitchFamily="34" charset="-122"/>
@@ -9680,18 +9620,18 @@
             </a:avLst>
           </a:prstGeom>
           <a:solidFill>
-            <a:srgbClr val="020617"/>
+            <a:srgbClr val="0F172A"/>
           </a:solidFill>
           <a:ln w="12700">
             <a:solidFill>
-              <a:srgbClr val="38BDF8"/>
+              <a:srgbClr val="0F172A"/>
             </a:solidFill>
             <a:prstDash val="solid"/>
           </a:ln>
           <a:effectLst>
-            <a:outerShdw sx="100000" sy="100000" kx="0" ky="0" algn="bl" rotWithShape="0" blurRad="177800" dist="50800" dir="5400000">
-              <a:srgbClr val="38BDF8">
-                <a:alpha val="35000"/>
+            <a:outerShdw sx="100000" sy="100000" kx="0" ky="0" algn="bl" rotWithShape="0" blurRad="127000" dist="25400" dir="5400000">
+              <a:srgbClr val="0F172A">
+                <a:alpha val="16000"/>
               </a:srgbClr>
             </a:outerShdw>
           </a:effectLst>
@@ -9748,7 +9688,7 @@
             <a:r>
               <a:rPr lang="en-US" sz="1050" dirty="0">
                 <a:solidFill>
-                  <a:srgbClr val="94A3B8"/>
+                  <a:srgbClr val="64748B"/>
                 </a:solidFill>
                 <a:latin typeface="Calibri" pitchFamily="34" charset="0"/>
                 <a:ea typeface="Calibri" pitchFamily="34" charset="-122"/>
@@ -9777,18 +9717,18 @@
             </a:avLst>
           </a:prstGeom>
           <a:solidFill>
-            <a:srgbClr val="020617"/>
+            <a:srgbClr val="0F172A"/>
           </a:solidFill>
           <a:ln w="12700">
             <a:solidFill>
-              <a:srgbClr val="38BDF8"/>
+              <a:srgbClr val="0F172A"/>
             </a:solidFill>
             <a:prstDash val="solid"/>
           </a:ln>
           <a:effectLst>
-            <a:outerShdw sx="100000" sy="100000" kx="0" ky="0" algn="bl" rotWithShape="0" blurRad="177800" dist="50800" dir="5400000">
-              <a:srgbClr val="38BDF8">
-                <a:alpha val="35000"/>
+            <a:outerShdw sx="100000" sy="100000" kx="0" ky="0" algn="bl" rotWithShape="0" blurRad="127000" dist="25400" dir="5400000">
+              <a:srgbClr val="0F172A">
+                <a:alpha val="16000"/>
               </a:srgbClr>
             </a:outerShdw>
           </a:effectLst>
@@ -9845,7 +9785,7 @@
             <a:r>
               <a:rPr lang="en-US" sz="1050" dirty="0">
                 <a:solidFill>
-                  <a:srgbClr val="94A3B8"/>
+                  <a:srgbClr val="64748B"/>
                 </a:solidFill>
                 <a:latin typeface="Calibri" pitchFamily="34" charset="0"/>
                 <a:ea typeface="Calibri" pitchFamily="34" charset="-122"/>
@@ -9874,18 +9814,18 @@
             </a:avLst>
           </a:prstGeom>
           <a:solidFill>
-            <a:srgbClr val="020617"/>
+            <a:srgbClr val="0F172A"/>
           </a:solidFill>
           <a:ln w="12700">
             <a:solidFill>
-              <a:srgbClr val="38BDF8"/>
+              <a:srgbClr val="0F172A"/>
             </a:solidFill>
             <a:prstDash val="solid"/>
           </a:ln>
           <a:effectLst>
-            <a:outerShdw sx="100000" sy="100000" kx="0" ky="0" algn="bl" rotWithShape="0" blurRad="177800" dist="50800" dir="5400000">
-              <a:srgbClr val="38BDF8">
-                <a:alpha val="35000"/>
+            <a:outerShdw sx="100000" sy="100000" kx="0" ky="0" algn="bl" rotWithShape="0" blurRad="127000" dist="25400" dir="5400000">
+              <a:srgbClr val="0F172A">
+                <a:alpha val="16000"/>
               </a:srgbClr>
             </a:outerShdw>
           </a:effectLst>
@@ -9942,7 +9882,7 @@
             <a:r>
               <a:rPr lang="en-US" sz="1050" dirty="0">
                 <a:solidFill>
-                  <a:srgbClr val="94A3B8"/>
+                  <a:srgbClr val="64748B"/>
                 </a:solidFill>
                 <a:latin typeface="Calibri" pitchFamily="34" charset="0"/>
                 <a:ea typeface="Calibri" pitchFamily="34" charset="-122"/>
@@ -9971,13 +9911,11 @@
             </a:avLst>
           </a:prstGeom>
           <a:solidFill>
-            <a:srgbClr val="0E1F3D">
-              <a:alpha val="85000"/>
-            </a:srgbClr>
+            <a:srgbClr val="F1F5F9"/>
           </a:solidFill>
           <a:ln w="12700">
             <a:solidFill>
-              <a:srgbClr val="38BDF8"/>
+              <a:srgbClr val="0E7490"/>
             </a:solidFill>
             <a:prstDash val="solid"/>
           </a:ln>
@@ -10010,7 +9948,7 @@
             <a:r>
               <a:rPr lang="en-US" sz="1200" b="1" spc="150" kern="0" dirty="0">
                 <a:solidFill>
-                  <a:srgbClr val="38BDF8"/>
+                  <a:srgbClr val="0E7490"/>
                 </a:solidFill>
                 <a:latin typeface="Calibri" pitchFamily="34" charset="0"/>
                 <a:ea typeface="Calibri" pitchFamily="34" charset="-122"/>
@@ -10073,7 +10011,7 @@
             <a:r>
               <a:rPr lang="en-US" sz="1150" dirty="0">
                 <a:solidFill>
-                  <a:srgbClr val="FFFFFF"/>
+                  <a:srgbClr val="0F172A"/>
                 </a:solidFill>
                 <a:latin typeface="Calibri" pitchFamily="34" charset="0"/>
                 <a:ea typeface="Calibri" pitchFamily="34" charset="-122"/>
@@ -10136,7 +10074,7 @@
             <a:r>
               <a:rPr lang="en-US" sz="1150" dirty="0">
                 <a:solidFill>
-                  <a:srgbClr val="FFFFFF"/>
+                  <a:srgbClr val="0F172A"/>
                 </a:solidFill>
                 <a:latin typeface="Calibri" pitchFamily="34" charset="0"/>
                 <a:ea typeface="Calibri" pitchFamily="34" charset="-122"/>
@@ -10199,7 +10137,7 @@
             <a:r>
               <a:rPr lang="en-US" sz="1150" dirty="0">
                 <a:solidFill>
-                  <a:srgbClr val="FFFFFF"/>
+                  <a:srgbClr val="0F172A"/>
                 </a:solidFill>
                 <a:latin typeface="Calibri" pitchFamily="34" charset="0"/>
                 <a:ea typeface="Calibri" pitchFamily="34" charset="-122"/>
@@ -10262,7 +10200,7 @@
             <a:r>
               <a:rPr lang="en-US" sz="1150" dirty="0">
                 <a:solidFill>
-                  <a:srgbClr val="FFFFFF"/>
+                  <a:srgbClr val="0F172A"/>
                 </a:solidFill>
                 <a:latin typeface="Calibri" pitchFamily="34" charset="0"/>
                 <a:ea typeface="Calibri" pitchFamily="34" charset="-122"/>
@@ -10325,7 +10263,7 @@
             <a:r>
               <a:rPr lang="en-US" sz="1150" dirty="0">
                 <a:solidFill>
-                  <a:srgbClr val="FFFFFF"/>
+                  <a:srgbClr val="0F172A"/>
                 </a:solidFill>
                 <a:latin typeface="Calibri" pitchFamily="34" charset="0"/>
                 <a:ea typeface="Calibri" pitchFamily="34" charset="-122"/>
@@ -10367,7 +10305,7 @@
             <a:lvl1pPr>
               <a:defRPr sz="900">
                 <a:solidFill>
-                  <a:srgbClr val="94A3B8"/>
+                  <a:srgbClr val="64748B"/>
                 </a:solidFill>
               </a:defRPr>
             </a:lvl1pPr>
@@ -10434,7 +10372,7 @@
             <a:r>
               <a:rPr lang="en-US" sz="1100" b="1" spc="200" kern="0" dirty="0">
                 <a:solidFill>
-                  <a:srgbClr val="38BDF8"/>
+                  <a:srgbClr val="0E7490"/>
                 </a:solidFill>
                 <a:latin typeface="Calibri" pitchFamily="34" charset="0"/>
                 <a:ea typeface="Calibri" pitchFamily="34" charset="-122"/>
@@ -10475,7 +10413,7 @@
             <a:r>
               <a:rPr lang="en-US" sz="3400" b="1" dirty="0">
                 <a:solidFill>
-                  <a:schemeClr val="bg1"/>
+                  <a:schemeClr val="tx1"/>
                 </a:solidFill>
               </a:rPr>
               <a:t>Technical </a:t>
@@ -10486,7 +10424,7 @@
             <a:r>
               <a:rPr lang="en-US" sz="3400" b="1" dirty="0">
                 <a:solidFill>
-                  <a:srgbClr val="38BDF8"/>
+                  <a:srgbClr val="0E7490"/>
                 </a:solidFill>
               </a:rPr>
               <a:t>Approach</a:t>
@@ -10512,13 +10450,11 @@
             </a:avLst>
           </a:prstGeom>
           <a:solidFill>
-            <a:srgbClr val="0E1F3D">
-              <a:alpha val="90000"/>
-            </a:srgbClr>
+            <a:srgbClr val="F1F5F9"/>
           </a:solidFill>
           <a:ln w="12700">
             <a:solidFill>
-              <a:srgbClr val="38BDF8"/>
+              <a:srgbClr val="0E7490"/>
             </a:solidFill>
             <a:prstDash val="solid"/>
           </a:ln>
@@ -10551,7 +10487,7 @@
             <a:r>
               <a:rPr lang="en-US" sz="1150" b="1" dirty="0">
                 <a:solidFill>
-                  <a:srgbClr val="38BDF8"/>
+                  <a:srgbClr val="0E7490"/>
                 </a:solidFill>
                 <a:latin typeface="Calibri" pitchFamily="34" charset="0"/>
                 <a:ea typeface="Calibri" pitchFamily="34" charset="-122"/>
@@ -10590,7 +10526,7 @@
             <a:r>
               <a:rPr lang="en-US" sz="1000" dirty="0">
                 <a:solidFill>
-                  <a:srgbClr val="CBD5E1"/>
+                  <a:srgbClr val="334155"/>
                 </a:solidFill>
                 <a:latin typeface="Calibri" pitchFamily="34" charset="0"/>
                 <a:ea typeface="Calibri" pitchFamily="34" charset="-122"/>
@@ -10619,13 +10555,11 @@
             </a:avLst>
           </a:prstGeom>
           <a:solidFill>
-            <a:srgbClr val="0E1F3D">
-              <a:alpha val="90000"/>
-            </a:srgbClr>
+            <a:srgbClr val="F1F5F9"/>
           </a:solidFill>
           <a:ln w="12700">
             <a:solidFill>
-              <a:srgbClr val="38BDF8"/>
+              <a:srgbClr val="0E7490"/>
             </a:solidFill>
             <a:prstDash val="solid"/>
           </a:ln>
@@ -10658,7 +10592,7 @@
             <a:r>
               <a:rPr lang="en-US" sz="1150" b="1" dirty="0">
                 <a:solidFill>
-                  <a:srgbClr val="38BDF8"/>
+                  <a:srgbClr val="0E7490"/>
                 </a:solidFill>
                 <a:latin typeface="Calibri" pitchFamily="34" charset="0"/>
                 <a:ea typeface="Calibri" pitchFamily="34" charset="-122"/>
@@ -10697,7 +10631,7 @@
             <a:r>
               <a:rPr lang="en-US" sz="1000" dirty="0">
                 <a:solidFill>
-                  <a:srgbClr val="CBD5E1"/>
+                  <a:srgbClr val="334155"/>
                 </a:solidFill>
                 <a:latin typeface="Calibri" pitchFamily="34" charset="0"/>
                 <a:ea typeface="Calibri" pitchFamily="34" charset="-122"/>
@@ -10726,13 +10660,11 @@
             </a:avLst>
           </a:prstGeom>
           <a:solidFill>
-            <a:srgbClr val="0E1F3D">
-              <a:alpha val="90000"/>
-            </a:srgbClr>
+            <a:srgbClr val="F1F5F9"/>
           </a:solidFill>
           <a:ln w="12700">
             <a:solidFill>
-              <a:srgbClr val="38BDF8"/>
+              <a:srgbClr val="0E7490"/>
             </a:solidFill>
             <a:prstDash val="solid"/>
           </a:ln>
@@ -10765,7 +10697,7 @@
             <a:r>
               <a:rPr lang="en-US" sz="1150" b="1" dirty="0">
                 <a:solidFill>
-                  <a:srgbClr val="38BDF8"/>
+                  <a:srgbClr val="0E7490"/>
                 </a:solidFill>
                 <a:latin typeface="Calibri" pitchFamily="34" charset="0"/>
                 <a:ea typeface="Calibri" pitchFamily="34" charset="-122"/>
@@ -10804,7 +10736,7 @@
             <a:r>
               <a:rPr lang="en-US" sz="1000" dirty="0">
                 <a:solidFill>
-                  <a:srgbClr val="CBD5E1"/>
+                  <a:srgbClr val="334155"/>
                 </a:solidFill>
                 <a:latin typeface="Calibri" pitchFamily="34" charset="0"/>
                 <a:ea typeface="Calibri" pitchFamily="34" charset="-122"/>
@@ -10833,7 +10765,7 @@
           <a:noFill/>
           <a:ln w="15875">
             <a:solidFill>
-              <a:srgbClr val="38BDF8"/>
+              <a:srgbClr val="0E7490"/>
             </a:solidFill>
             <a:prstDash val="solid"/>
             <a:headEnd type="triangle"/>
@@ -10858,13 +10790,11 @@
             </a:avLst>
           </a:prstGeom>
           <a:solidFill>
-            <a:srgbClr val="0E1F3D">
-              <a:alpha val="90000"/>
-            </a:srgbClr>
+            <a:srgbClr val="F1F5F9"/>
           </a:solidFill>
           <a:ln w="12700">
             <a:solidFill>
-              <a:srgbClr val="38BDF8"/>
+              <a:srgbClr val="0E7490"/>
             </a:solidFill>
             <a:prstDash val="solid"/>
           </a:ln>
@@ -10897,7 +10827,7 @@
             <a:r>
               <a:rPr lang="en-US" sz="1150" b="1" dirty="0">
                 <a:solidFill>
-                  <a:srgbClr val="38BDF8"/>
+                  <a:srgbClr val="0E7490"/>
                 </a:solidFill>
                 <a:latin typeface="Calibri" pitchFamily="34" charset="0"/>
                 <a:ea typeface="Calibri" pitchFamily="34" charset="-122"/>
@@ -10936,7 +10866,7 @@
             <a:r>
               <a:rPr lang="en-US" sz="1000" dirty="0">
                 <a:solidFill>
-                  <a:srgbClr val="CBD5E1"/>
+                  <a:srgbClr val="334155"/>
                 </a:solidFill>
                 <a:latin typeface="Calibri" pitchFamily="34" charset="0"/>
                 <a:ea typeface="Calibri" pitchFamily="34" charset="-122"/>
@@ -10965,7 +10895,7 @@
           <a:noFill/>
           <a:ln w="15875">
             <a:solidFill>
-              <a:srgbClr val="38BDF8"/>
+              <a:srgbClr val="0E7490"/>
             </a:solidFill>
             <a:prstDash val="solid"/>
             <a:headEnd type="triangle"/>
@@ -10990,7 +10920,7 @@
           <a:noFill/>
           <a:ln w="15875">
             <a:solidFill>
-              <a:srgbClr val="38BDF8"/>
+              <a:srgbClr val="0E7490"/>
             </a:solidFill>
             <a:prstDash val="solid"/>
             <a:headEnd type="triangle"/>
@@ -11015,7 +10945,7 @@
           <a:noFill/>
           <a:ln w="15875">
             <a:solidFill>
-              <a:srgbClr val="38BDF8"/>
+              <a:srgbClr val="0E7490"/>
             </a:solidFill>
             <a:prstDash val="solid"/>
             <a:headEnd type="triangle"/>
@@ -11040,13 +10970,11 @@
             </a:avLst>
           </a:prstGeom>
           <a:solidFill>
-            <a:srgbClr val="0E1F3D">
-              <a:alpha val="90000"/>
-            </a:srgbClr>
+            <a:srgbClr val="F1F5F9"/>
           </a:solidFill>
           <a:ln w="12700">
             <a:solidFill>
-              <a:srgbClr val="38BDF8"/>
+              <a:srgbClr val="0E7490"/>
             </a:solidFill>
             <a:prstDash val="solid"/>
           </a:ln>
@@ -11079,7 +11007,7 @@
             <a:r>
               <a:rPr lang="en-US" sz="1150" b="1" dirty="0">
                 <a:solidFill>
-                  <a:srgbClr val="38BDF8"/>
+                  <a:srgbClr val="0E7490"/>
                 </a:solidFill>
                 <a:latin typeface="Calibri" pitchFamily="34" charset="0"/>
                 <a:ea typeface="Calibri" pitchFamily="34" charset="-122"/>
@@ -11118,7 +11046,7 @@
             <a:r>
               <a:rPr lang="en-US" sz="1000" dirty="0">
                 <a:solidFill>
-                  <a:srgbClr val="CBD5E1"/>
+                  <a:srgbClr val="334155"/>
                 </a:solidFill>
                 <a:latin typeface="Calibri" pitchFamily="34" charset="0"/>
                 <a:ea typeface="Calibri" pitchFamily="34" charset="-122"/>
@@ -11147,13 +11075,11 @@
             </a:avLst>
           </a:prstGeom>
           <a:solidFill>
-            <a:srgbClr val="0E1F3D">
-              <a:alpha val="90000"/>
-            </a:srgbClr>
+            <a:srgbClr val="F1F5F9"/>
           </a:solidFill>
           <a:ln w="12700">
             <a:solidFill>
-              <a:srgbClr val="38BDF8"/>
+              <a:srgbClr val="0E7490"/>
             </a:solidFill>
             <a:prstDash val="solid"/>
           </a:ln>
@@ -11186,7 +11112,7 @@
             <a:r>
               <a:rPr lang="en-US" sz="1150" b="1" dirty="0">
                 <a:solidFill>
-                  <a:srgbClr val="38BDF8"/>
+                  <a:srgbClr val="0E7490"/>
                 </a:solidFill>
                 <a:latin typeface="Calibri" pitchFamily="34" charset="0"/>
                 <a:ea typeface="Calibri" pitchFamily="34" charset="-122"/>
@@ -11225,7 +11151,7 @@
             <a:r>
               <a:rPr lang="en-US" sz="1000" dirty="0">
                 <a:solidFill>
-                  <a:srgbClr val="CBD5E1"/>
+                  <a:srgbClr val="334155"/>
                 </a:solidFill>
                 <a:latin typeface="Calibri" pitchFamily="34" charset="0"/>
                 <a:ea typeface="Calibri" pitchFamily="34" charset="-122"/>
@@ -11254,13 +11180,11 @@
             </a:avLst>
           </a:prstGeom>
           <a:solidFill>
-            <a:srgbClr val="0E1F3D">
-              <a:alpha val="90000"/>
-            </a:srgbClr>
+            <a:srgbClr val="F1F5F9"/>
           </a:solidFill>
           <a:ln w="12700">
             <a:solidFill>
-              <a:srgbClr val="38BDF8"/>
+              <a:srgbClr val="0E7490"/>
             </a:solidFill>
             <a:prstDash val="solid"/>
           </a:ln>
@@ -11293,7 +11217,7 @@
             <a:r>
               <a:rPr lang="en-US" sz="1150" b="1" dirty="0">
                 <a:solidFill>
-                  <a:srgbClr val="38BDF8"/>
+                  <a:srgbClr val="0E7490"/>
                 </a:solidFill>
                 <a:latin typeface="Calibri" pitchFamily="34" charset="0"/>
                 <a:ea typeface="Calibri" pitchFamily="34" charset="-122"/>
@@ -11332,7 +11256,7 @@
             <a:r>
               <a:rPr lang="en-US" sz="1000" dirty="0">
                 <a:solidFill>
-                  <a:srgbClr val="CBD5E1"/>
+                  <a:srgbClr val="334155"/>
                 </a:solidFill>
                 <a:latin typeface="Calibri" pitchFamily="34" charset="0"/>
                 <a:ea typeface="Calibri" pitchFamily="34" charset="-122"/>
@@ -11371,13 +11295,13 @@
             <a:r>
               <a:rPr lang="en-US" sz="1050" dirty="0">
                 <a:solidFill>
-                  <a:srgbClr val="94A3B8"/>
-                </a:solidFill>
-                <a:latin typeface="Calibri" pitchFamily="34" charset="0"/>
-                <a:ea typeface="Calibri" pitchFamily="34" charset="-122"/>
-                <a:cs typeface="Calibri" pitchFamily="34" charset="-120"/>
-              </a:rPr>
-              <a:t>Engines run on the server and on the phone, so triage works offline. Claude (optional) adds understanding and writes the SBAR note.</a:t>
+                  <a:srgbClr val="64748B"/>
+                </a:solidFill>
+                <a:latin typeface="Calibri" pitchFamily="34" charset="0"/>
+                <a:ea typeface="Calibri" pitchFamily="34" charset="-122"/>
+                <a:cs typeface="Calibri" pitchFamily="34" charset="-120"/>
+              </a:rPr>
+              <a:t>Engines run on the server and on the phone, so triage works offline. Gemini or Claude (optional) adds understanding and writes the SBAR note.</a:t>
             </a:r>
             <a:endParaRPr lang="en-US" sz="1050" dirty="0"/>
           </a:p>
@@ -11421,7 +11345,7 @@
                       <a:r>
                         <a:rPr lang="en-US" sz="1050" b="1" dirty="0">
                           <a:solidFill>
-                            <a:srgbClr val="38BDF8"/>
+                            <a:srgbClr val="0E7490"/>
                           </a:solidFill>
                           <a:latin typeface="Calibri" pitchFamily="34" charset="0"/>
                           <a:ea typeface="Calibri" pitchFamily="34" charset="-122"/>
@@ -11439,7 +11363,7 @@
                   <a:tcPr marL="91440" marR="91440" marT="45720" marB="45720" anchor="ctr">
                     <a:lnL w="9525" cap="flat" cmpd="sng" algn="ctr">
                       <a:solidFill>
-                        <a:srgbClr val="1E3A5F"/>
+                        <a:srgbClr val="D6DEE8"/>
                       </a:solidFill>
                       <a:prstDash val="solid"/>
                       <a:round/>
@@ -11448,7 +11372,7 @@
                     </a:lnL>
                     <a:lnR w="9525" cap="flat" cmpd="sng" algn="ctr">
                       <a:solidFill>
-                        <a:srgbClr val="1E3A5F"/>
+                        <a:srgbClr val="D6DEE8"/>
                       </a:solidFill>
                       <a:prstDash val="solid"/>
                       <a:round/>
@@ -11457,7 +11381,7 @@
                     </a:lnR>
                     <a:lnT w="9525" cap="flat" cmpd="sng" algn="ctr">
                       <a:solidFill>
-                        <a:srgbClr val="1E3A5F"/>
+                        <a:srgbClr val="D6DEE8"/>
                       </a:solidFill>
                       <a:prstDash val="solid"/>
                       <a:round/>
@@ -11466,7 +11390,7 @@
                     </a:lnT>
                     <a:lnB w="9525" cap="flat" cmpd="sng" algn="ctr">
                       <a:solidFill>
-                        <a:srgbClr val="1E3A5F"/>
+                        <a:srgbClr val="D6DEE8"/>
                       </a:solidFill>
                       <a:prstDash val="solid"/>
                       <a:round/>
@@ -11474,7 +11398,7 @@
                       <a:tailEnd type="none" w="med" len="med"/>
                     </a:lnB>
                     <a:solidFill>
-                      <a:srgbClr val="12304A"/>
+                      <a:srgbClr val="E0F2FE"/>
                     </a:solidFill>
                   </a:tcPr>
                 </a:tc>
@@ -11489,7 +11413,7 @@
                       <a:r>
                         <a:rPr lang="en-US" sz="1050" b="1" dirty="0">
                           <a:solidFill>
-                            <a:srgbClr val="38BDF8"/>
+                            <a:srgbClr val="0E7490"/>
                           </a:solidFill>
                           <a:latin typeface="Calibri" pitchFamily="34" charset="0"/>
                           <a:ea typeface="Calibri" pitchFamily="34" charset="-122"/>
@@ -11507,7 +11431,7 @@
                   <a:tcPr marL="91440" marR="91440" marT="45720" marB="45720" anchor="ctr">
                     <a:lnL w="9525" cap="flat" cmpd="sng" algn="ctr">
                       <a:solidFill>
-                        <a:srgbClr val="1E3A5F"/>
+                        <a:srgbClr val="D6DEE8"/>
                       </a:solidFill>
                       <a:prstDash val="solid"/>
                       <a:round/>
@@ -11516,7 +11440,7 @@
                     </a:lnL>
                     <a:lnR w="9525" cap="flat" cmpd="sng" algn="ctr">
                       <a:solidFill>
-                        <a:srgbClr val="1E3A5F"/>
+                        <a:srgbClr val="D6DEE8"/>
                       </a:solidFill>
                       <a:prstDash val="solid"/>
                       <a:round/>
@@ -11525,7 +11449,7 @@
                     </a:lnR>
                     <a:lnT w="9525" cap="flat" cmpd="sng" algn="ctr">
                       <a:solidFill>
-                        <a:srgbClr val="1E3A5F"/>
+                        <a:srgbClr val="D6DEE8"/>
                       </a:solidFill>
                       <a:prstDash val="solid"/>
                       <a:round/>
@@ -11534,7 +11458,7 @@
                     </a:lnT>
                     <a:lnB w="9525" cap="flat" cmpd="sng" algn="ctr">
                       <a:solidFill>
-                        <a:srgbClr val="1E3A5F"/>
+                        <a:srgbClr val="D6DEE8"/>
                       </a:solidFill>
                       <a:prstDash val="solid"/>
                       <a:round/>
@@ -11542,7 +11466,7 @@
                       <a:tailEnd type="none" w="med" len="med"/>
                     </a:lnB>
                     <a:solidFill>
-                      <a:srgbClr val="12304A"/>
+                      <a:srgbClr val="E0F2FE"/>
                     </a:solidFill>
                   </a:tcPr>
                 </a:tc>
@@ -11559,7 +11483,7 @@
                       <a:r>
                         <a:rPr lang="en-US" sz="1050" b="1" dirty="0">
                           <a:solidFill>
-                            <a:srgbClr val="FFFFFF"/>
+                            <a:srgbClr val="0F172A"/>
                           </a:solidFill>
                           <a:latin typeface="Calibri" pitchFamily="34" charset="0"/>
                           <a:ea typeface="Calibri" pitchFamily="34" charset="-122"/>
@@ -11577,7 +11501,7 @@
                   <a:tcPr marL="91440" marR="91440" marT="45720" marB="45720" anchor="ctr">
                     <a:lnL w="9525" cap="flat" cmpd="sng" algn="ctr">
                       <a:solidFill>
-                        <a:srgbClr val="1E3A5F"/>
+                        <a:srgbClr val="D6DEE8"/>
                       </a:solidFill>
                       <a:prstDash val="solid"/>
                       <a:round/>
@@ -11586,7 +11510,7 @@
                     </a:lnL>
                     <a:lnR w="9525" cap="flat" cmpd="sng" algn="ctr">
                       <a:solidFill>
-                        <a:srgbClr val="1E3A5F"/>
+                        <a:srgbClr val="D6DEE8"/>
                       </a:solidFill>
                       <a:prstDash val="solid"/>
                       <a:round/>
@@ -11595,7 +11519,7 @@
                     </a:lnR>
                     <a:lnT w="9525" cap="flat" cmpd="sng" algn="ctr">
                       <a:solidFill>
-                        <a:srgbClr val="1E3A5F"/>
+                        <a:srgbClr val="D6DEE8"/>
                       </a:solidFill>
                       <a:prstDash val="solid"/>
                       <a:round/>
@@ -11604,7 +11528,7 @@
                     </a:lnT>
                     <a:lnB w="9525" cap="flat" cmpd="sng" algn="ctr">
                       <a:solidFill>
-                        <a:srgbClr val="1E3A5F"/>
+                        <a:srgbClr val="D6DEE8"/>
                       </a:solidFill>
                       <a:prstDash val="solid"/>
                       <a:round/>
@@ -11612,7 +11536,7 @@
                       <a:tailEnd type="none" w="med" len="med"/>
                     </a:lnB>
                     <a:solidFill>
-                      <a:srgbClr val="0B1A33"/>
+                      <a:srgbClr val="FFFFFF"/>
                     </a:solidFill>
                   </a:tcPr>
                 </a:tc>
@@ -11627,7 +11551,7 @@
                       <a:r>
                         <a:rPr lang="en-US" sz="1050" dirty="0">
                           <a:solidFill>
-                            <a:srgbClr val="CBD5E1"/>
+                            <a:srgbClr val="334155"/>
                           </a:solidFill>
                           <a:latin typeface="Calibri" pitchFamily="34" charset="0"/>
                           <a:ea typeface="Calibri" pitchFamily="34" charset="-122"/>
@@ -11645,7 +11569,7 @@
                   <a:tcPr marL="91440" marR="91440" marT="45720" marB="45720" anchor="ctr">
                     <a:lnL w="9525" cap="flat" cmpd="sng" algn="ctr">
                       <a:solidFill>
-                        <a:srgbClr val="1E3A5F"/>
+                        <a:srgbClr val="D6DEE8"/>
                       </a:solidFill>
                       <a:prstDash val="solid"/>
                       <a:round/>
@@ -11654,7 +11578,7 @@
                     </a:lnL>
                     <a:lnR w="9525" cap="flat" cmpd="sng" algn="ctr">
                       <a:solidFill>
-                        <a:srgbClr val="1E3A5F"/>
+                        <a:srgbClr val="D6DEE8"/>
                       </a:solidFill>
                       <a:prstDash val="solid"/>
                       <a:round/>
@@ -11663,7 +11587,7 @@
                     </a:lnR>
                     <a:lnT w="9525" cap="flat" cmpd="sng" algn="ctr">
                       <a:solidFill>
-                        <a:srgbClr val="1E3A5F"/>
+                        <a:srgbClr val="D6DEE8"/>
                       </a:solidFill>
                       <a:prstDash val="solid"/>
                       <a:round/>
@@ -11672,7 +11596,7 @@
                     </a:lnT>
                     <a:lnB w="9525" cap="flat" cmpd="sng" algn="ctr">
                       <a:solidFill>
-                        <a:srgbClr val="1E3A5F"/>
+                        <a:srgbClr val="D6DEE8"/>
                       </a:solidFill>
                       <a:prstDash val="solid"/>
                       <a:round/>
@@ -11680,7 +11604,7 @@
                       <a:tailEnd type="none" w="med" len="med"/>
                     </a:lnB>
                     <a:solidFill>
-                      <a:srgbClr val="0B1A33"/>
+                      <a:srgbClr val="FFFFFF"/>
                     </a:solidFill>
                   </a:tcPr>
                 </a:tc>
@@ -11697,7 +11621,7 @@
                       <a:r>
                         <a:rPr lang="en-US" sz="1050" b="1" dirty="0">
                           <a:solidFill>
-                            <a:srgbClr val="FFFFFF"/>
+                            <a:srgbClr val="0F172A"/>
                           </a:solidFill>
                           <a:latin typeface="Calibri" pitchFamily="34" charset="0"/>
                           <a:ea typeface="Calibri" pitchFamily="34" charset="-122"/>
@@ -11715,7 +11639,7 @@
                   <a:tcPr marL="91440" marR="91440" marT="45720" marB="45720" anchor="ctr">
                     <a:lnL w="9525" cap="flat" cmpd="sng" algn="ctr">
                       <a:solidFill>
-                        <a:srgbClr val="1E3A5F"/>
+                        <a:srgbClr val="D6DEE8"/>
                       </a:solidFill>
                       <a:prstDash val="solid"/>
                       <a:round/>
@@ -11724,7 +11648,7 @@
                     </a:lnL>
                     <a:lnR w="9525" cap="flat" cmpd="sng" algn="ctr">
                       <a:solidFill>
-                        <a:srgbClr val="1E3A5F"/>
+                        <a:srgbClr val="D6DEE8"/>
                       </a:solidFill>
                       <a:prstDash val="solid"/>
                       <a:round/>
@@ -11733,7 +11657,7 @@
                     </a:lnR>
                     <a:lnT w="9525" cap="flat" cmpd="sng" algn="ctr">
                       <a:solidFill>
-                        <a:srgbClr val="1E3A5F"/>
+                        <a:srgbClr val="D6DEE8"/>
                       </a:solidFill>
                       <a:prstDash val="solid"/>
                       <a:round/>
@@ -11742,7 +11666,7 @@
                     </a:lnT>
                     <a:lnB w="9525" cap="flat" cmpd="sng" algn="ctr">
                       <a:solidFill>
-                        <a:srgbClr val="1E3A5F"/>
+                        <a:srgbClr val="D6DEE8"/>
                       </a:solidFill>
                       <a:prstDash val="solid"/>
                       <a:round/>
@@ -11750,7 +11674,7 @@
                       <a:tailEnd type="none" w="med" len="med"/>
                     </a:lnB>
                     <a:solidFill>
-                      <a:srgbClr val="0E2140"/>
+                      <a:srgbClr val="F8FAFC"/>
                     </a:solidFill>
                   </a:tcPr>
                 </a:tc>
@@ -11765,7 +11689,7 @@
                       <a:r>
                         <a:rPr lang="en-US" sz="1050" dirty="0">
                           <a:solidFill>
-                            <a:srgbClr val="CBD5E1"/>
+                            <a:srgbClr val="334155"/>
                           </a:solidFill>
                           <a:latin typeface="Calibri" pitchFamily="34" charset="0"/>
                           <a:ea typeface="Calibri" pitchFamily="34" charset="-122"/>
@@ -11783,7 +11707,7 @@
                   <a:tcPr marL="91440" marR="91440" marT="45720" marB="45720" anchor="ctr">
                     <a:lnL w="9525" cap="flat" cmpd="sng" algn="ctr">
                       <a:solidFill>
-                        <a:srgbClr val="1E3A5F"/>
+                        <a:srgbClr val="D6DEE8"/>
                       </a:solidFill>
                       <a:prstDash val="solid"/>
                       <a:round/>
@@ -11792,7 +11716,7 @@
                     </a:lnL>
                     <a:lnR w="9525" cap="flat" cmpd="sng" algn="ctr">
                       <a:solidFill>
-                        <a:srgbClr val="1E3A5F"/>
+                        <a:srgbClr val="D6DEE8"/>
                       </a:solidFill>
                       <a:prstDash val="solid"/>
                       <a:round/>
@@ -11801,7 +11725,7 @@
                     </a:lnR>
                     <a:lnT w="9525" cap="flat" cmpd="sng" algn="ctr">
                       <a:solidFill>
-                        <a:srgbClr val="1E3A5F"/>
+                        <a:srgbClr val="D6DEE8"/>
                       </a:solidFill>
                       <a:prstDash val="solid"/>
                       <a:round/>
@@ -11810,7 +11734,7 @@
                     </a:lnT>
                     <a:lnB w="9525" cap="flat" cmpd="sng" algn="ctr">
                       <a:solidFill>
-                        <a:srgbClr val="1E3A5F"/>
+                        <a:srgbClr val="D6DEE8"/>
                       </a:solidFill>
                       <a:prstDash val="solid"/>
                       <a:round/>
@@ -11818,7 +11742,7 @@
                       <a:tailEnd type="none" w="med" len="med"/>
                     </a:lnB>
                     <a:solidFill>
-                      <a:srgbClr val="0E2140"/>
+                      <a:srgbClr val="F8FAFC"/>
                     </a:solidFill>
                   </a:tcPr>
                 </a:tc>
@@ -11835,7 +11759,7 @@
                       <a:r>
                         <a:rPr lang="en-US" sz="1050" b="1" dirty="0">
                           <a:solidFill>
-                            <a:srgbClr val="FFFFFF"/>
+                            <a:srgbClr val="0F172A"/>
                           </a:solidFill>
                           <a:latin typeface="Calibri" pitchFamily="34" charset="0"/>
                           <a:ea typeface="Calibri" pitchFamily="34" charset="-122"/>
@@ -11853,7 +11777,7 @@
                   <a:tcPr marL="91440" marR="91440" marT="45720" marB="45720" anchor="ctr">
                     <a:lnL w="9525" cap="flat" cmpd="sng" algn="ctr">
                       <a:solidFill>
-                        <a:srgbClr val="1E3A5F"/>
+                        <a:srgbClr val="D6DEE8"/>
                       </a:solidFill>
                       <a:prstDash val="solid"/>
                       <a:round/>
@@ -11862,7 +11786,7 @@
                     </a:lnL>
                     <a:lnR w="9525" cap="flat" cmpd="sng" algn="ctr">
                       <a:solidFill>
-                        <a:srgbClr val="1E3A5F"/>
+                        <a:srgbClr val="D6DEE8"/>
                       </a:solidFill>
                       <a:prstDash val="solid"/>
                       <a:round/>
@@ -11871,7 +11795,7 @@
                     </a:lnR>
                     <a:lnT w="9525" cap="flat" cmpd="sng" algn="ctr">
                       <a:solidFill>
-                        <a:srgbClr val="1E3A5F"/>
+                        <a:srgbClr val="D6DEE8"/>
                       </a:solidFill>
                       <a:prstDash val="solid"/>
                       <a:round/>
@@ -11880,7 +11804,7 @@
                     </a:lnT>
                     <a:lnB w="9525" cap="flat" cmpd="sng" algn="ctr">
                       <a:solidFill>
-                        <a:srgbClr val="1E3A5F"/>
+                        <a:srgbClr val="D6DEE8"/>
                       </a:solidFill>
                       <a:prstDash val="solid"/>
                       <a:round/>
@@ -11888,7 +11812,7 @@
                       <a:tailEnd type="none" w="med" len="med"/>
                     </a:lnB>
                     <a:solidFill>
-                      <a:srgbClr val="0B1A33"/>
+                      <a:srgbClr val="FFFFFF"/>
                     </a:solidFill>
                   </a:tcPr>
                 </a:tc>
@@ -11903,7 +11827,7 @@
                       <a:r>
                         <a:rPr lang="en-US" sz="1050" dirty="0">
                           <a:solidFill>
-                            <a:srgbClr val="CBD5E1"/>
+                            <a:srgbClr val="334155"/>
                           </a:solidFill>
                           <a:latin typeface="Calibri" pitchFamily="34" charset="0"/>
                           <a:ea typeface="Calibri" pitchFamily="34" charset="-122"/>
@@ -11921,7 +11845,7 @@
                   <a:tcPr marL="91440" marR="91440" marT="45720" marB="45720" anchor="ctr">
                     <a:lnL w="9525" cap="flat" cmpd="sng" algn="ctr">
                       <a:solidFill>
-                        <a:srgbClr val="1E3A5F"/>
+                        <a:srgbClr val="D6DEE8"/>
                       </a:solidFill>
                       <a:prstDash val="solid"/>
                       <a:round/>
@@ -11930,7 +11854,7 @@
                     </a:lnL>
                     <a:lnR w="9525" cap="flat" cmpd="sng" algn="ctr">
                       <a:solidFill>
-                        <a:srgbClr val="1E3A5F"/>
+                        <a:srgbClr val="D6DEE8"/>
                       </a:solidFill>
                       <a:prstDash val="solid"/>
                       <a:round/>
@@ -11939,7 +11863,7 @@
                     </a:lnR>
                     <a:lnT w="9525" cap="flat" cmpd="sng" algn="ctr">
                       <a:solidFill>
-                        <a:srgbClr val="1E3A5F"/>
+                        <a:srgbClr val="D6DEE8"/>
                       </a:solidFill>
                       <a:prstDash val="solid"/>
                       <a:round/>
@@ -11948,7 +11872,7 @@
                     </a:lnT>
                     <a:lnB w="9525" cap="flat" cmpd="sng" algn="ctr">
                       <a:solidFill>
-                        <a:srgbClr val="1E3A5F"/>
+                        <a:srgbClr val="D6DEE8"/>
                       </a:solidFill>
                       <a:prstDash val="solid"/>
                       <a:round/>
@@ -11956,7 +11880,7 @@
                       <a:tailEnd type="none" w="med" len="med"/>
                     </a:lnB>
                     <a:solidFill>
-                      <a:srgbClr val="0B1A33"/>
+                      <a:srgbClr val="FFFFFF"/>
                     </a:solidFill>
                   </a:tcPr>
                 </a:tc>
@@ -11973,7 +11897,7 @@
                       <a:r>
                         <a:rPr lang="en-US" sz="1050" b="1" dirty="0">
                           <a:solidFill>
-                            <a:srgbClr val="FFFFFF"/>
+                            <a:srgbClr val="0F172A"/>
                           </a:solidFill>
                           <a:latin typeface="Calibri" pitchFamily="34" charset="0"/>
                           <a:ea typeface="Calibri" pitchFamily="34" charset="-122"/>
@@ -11991,7 +11915,7 @@
                   <a:tcPr marL="91440" marR="91440" marT="45720" marB="45720" anchor="ctr">
                     <a:lnL w="9525" cap="flat" cmpd="sng" algn="ctr">
                       <a:solidFill>
-                        <a:srgbClr val="1E3A5F"/>
+                        <a:srgbClr val="D6DEE8"/>
                       </a:solidFill>
                       <a:prstDash val="solid"/>
                       <a:round/>
@@ -12000,7 +11924,7 @@
                     </a:lnL>
                     <a:lnR w="9525" cap="flat" cmpd="sng" algn="ctr">
                       <a:solidFill>
-                        <a:srgbClr val="1E3A5F"/>
+                        <a:srgbClr val="D6DEE8"/>
                       </a:solidFill>
                       <a:prstDash val="solid"/>
                       <a:round/>
@@ -12009,7 +11933,7 @@
                     </a:lnR>
                     <a:lnT w="9525" cap="flat" cmpd="sng" algn="ctr">
                       <a:solidFill>
-                        <a:srgbClr val="1E3A5F"/>
+                        <a:srgbClr val="D6DEE8"/>
                       </a:solidFill>
                       <a:prstDash val="solid"/>
                       <a:round/>
@@ -12018,7 +11942,7 @@
                     </a:lnT>
                     <a:lnB w="9525" cap="flat" cmpd="sng" algn="ctr">
                       <a:solidFill>
-                        <a:srgbClr val="1E3A5F"/>
+                        <a:srgbClr val="D6DEE8"/>
                       </a:solidFill>
                       <a:prstDash val="solid"/>
                       <a:round/>
@@ -12026,7 +11950,7 @@
                       <a:tailEnd type="none" w="med" len="med"/>
                     </a:lnB>
                     <a:solidFill>
-                      <a:srgbClr val="0E2140"/>
+                      <a:srgbClr val="F8FAFC"/>
                     </a:solidFill>
                   </a:tcPr>
                 </a:tc>
@@ -12041,7 +11965,7 @@
                       <a:r>
                         <a:rPr lang="en-US" sz="1050" dirty="0">
                           <a:solidFill>
-                            <a:srgbClr val="CBD5E1"/>
+                            <a:srgbClr val="334155"/>
                           </a:solidFill>
                           <a:latin typeface="Calibri" pitchFamily="34" charset="0"/>
                           <a:ea typeface="Calibri" pitchFamily="34" charset="-122"/>
@@ -12059,7 +11983,7 @@
                   <a:tcPr marL="91440" marR="91440" marT="45720" marB="45720" anchor="ctr">
                     <a:lnL w="9525" cap="flat" cmpd="sng" algn="ctr">
                       <a:solidFill>
-                        <a:srgbClr val="1E3A5F"/>
+                        <a:srgbClr val="D6DEE8"/>
                       </a:solidFill>
                       <a:prstDash val="solid"/>
                       <a:round/>
@@ -12068,7 +11992,7 @@
                     </a:lnL>
                     <a:lnR w="9525" cap="flat" cmpd="sng" algn="ctr">
                       <a:solidFill>
-                        <a:srgbClr val="1E3A5F"/>
+                        <a:srgbClr val="D6DEE8"/>
                       </a:solidFill>
                       <a:prstDash val="solid"/>
                       <a:round/>
@@ -12077,7 +12001,7 @@
                     </a:lnR>
                     <a:lnT w="9525" cap="flat" cmpd="sng" algn="ctr">
                       <a:solidFill>
-                        <a:srgbClr val="1E3A5F"/>
+                        <a:srgbClr val="D6DEE8"/>
                       </a:solidFill>
                       <a:prstDash val="solid"/>
                       <a:round/>
@@ -12086,7 +12010,7 @@
                     </a:lnT>
                     <a:lnB w="9525" cap="flat" cmpd="sng" algn="ctr">
                       <a:solidFill>
-                        <a:srgbClr val="1E3A5F"/>
+                        <a:srgbClr val="D6DEE8"/>
                       </a:solidFill>
                       <a:prstDash val="solid"/>
                       <a:round/>
@@ -12094,7 +12018,7 @@
                       <a:tailEnd type="none" w="med" len="med"/>
                     </a:lnB>
                     <a:solidFill>
-                      <a:srgbClr val="0E2140"/>
+                      <a:srgbClr val="F8FAFC"/>
                     </a:solidFill>
                   </a:tcPr>
                 </a:tc>
@@ -12111,7 +12035,7 @@
                       <a:r>
                         <a:rPr lang="en-US" sz="1050" b="1" dirty="0">
                           <a:solidFill>
-                            <a:srgbClr val="FFFFFF"/>
+                            <a:srgbClr val="0F172A"/>
                           </a:solidFill>
                           <a:latin typeface="Calibri" pitchFamily="34" charset="0"/>
                           <a:ea typeface="Calibri" pitchFamily="34" charset="-122"/>
@@ -12129,7 +12053,7 @@
                   <a:tcPr marL="91440" marR="91440" marT="45720" marB="45720" anchor="ctr">
                     <a:lnL w="9525" cap="flat" cmpd="sng" algn="ctr">
                       <a:solidFill>
-                        <a:srgbClr val="1E3A5F"/>
+                        <a:srgbClr val="D6DEE8"/>
                       </a:solidFill>
                       <a:prstDash val="solid"/>
                       <a:round/>
@@ -12138,7 +12062,7 @@
                     </a:lnL>
                     <a:lnR w="9525" cap="flat" cmpd="sng" algn="ctr">
                       <a:solidFill>
-                        <a:srgbClr val="1E3A5F"/>
+                        <a:srgbClr val="D6DEE8"/>
                       </a:solidFill>
                       <a:prstDash val="solid"/>
                       <a:round/>
@@ -12147,7 +12071,7 @@
                     </a:lnR>
                     <a:lnT w="9525" cap="flat" cmpd="sng" algn="ctr">
                       <a:solidFill>
-                        <a:srgbClr val="1E3A5F"/>
+                        <a:srgbClr val="D6DEE8"/>
                       </a:solidFill>
                       <a:prstDash val="solid"/>
                       <a:round/>
@@ -12156,7 +12080,7 @@
                     </a:lnT>
                     <a:lnB w="9525" cap="flat" cmpd="sng" algn="ctr">
                       <a:solidFill>
-                        <a:srgbClr val="1E3A5F"/>
+                        <a:srgbClr val="D6DEE8"/>
                       </a:solidFill>
                       <a:prstDash val="solid"/>
                       <a:round/>
@@ -12164,7 +12088,7 @@
                       <a:tailEnd type="none" w="med" len="med"/>
                     </a:lnB>
                     <a:solidFill>
-                      <a:srgbClr val="0B1A33"/>
+                      <a:srgbClr val="FFFFFF"/>
                     </a:solidFill>
                   </a:tcPr>
                 </a:tc>
@@ -12179,7 +12103,7 @@
                       <a:r>
                         <a:rPr lang="en-US" sz="1050" dirty="0">
                           <a:solidFill>
-                            <a:srgbClr val="CBD5E1"/>
+                            <a:srgbClr val="334155"/>
                           </a:solidFill>
                           <a:latin typeface="Calibri" pitchFamily="34" charset="0"/>
                           <a:ea typeface="Calibri" pitchFamily="34" charset="-122"/>
@@ -12197,7 +12121,7 @@
                   <a:tcPr marL="91440" marR="91440" marT="45720" marB="45720" anchor="ctr">
                     <a:lnL w="9525" cap="flat" cmpd="sng" algn="ctr">
                       <a:solidFill>
-                        <a:srgbClr val="1E3A5F"/>
+                        <a:srgbClr val="D6DEE8"/>
                       </a:solidFill>
                       <a:prstDash val="solid"/>
                       <a:round/>
@@ -12206,7 +12130,7 @@
                     </a:lnL>
                     <a:lnR w="9525" cap="flat" cmpd="sng" algn="ctr">
                       <a:solidFill>
-                        <a:srgbClr val="1E3A5F"/>
+                        <a:srgbClr val="D6DEE8"/>
                       </a:solidFill>
                       <a:prstDash val="solid"/>
                       <a:round/>
@@ -12215,7 +12139,7 @@
                     </a:lnR>
                     <a:lnT w="9525" cap="flat" cmpd="sng" algn="ctr">
                       <a:solidFill>
-                        <a:srgbClr val="1E3A5F"/>
+                        <a:srgbClr val="D6DEE8"/>
                       </a:solidFill>
                       <a:prstDash val="solid"/>
                       <a:round/>
@@ -12224,7 +12148,7 @@
                     </a:lnT>
                     <a:lnB w="9525" cap="flat" cmpd="sng" algn="ctr">
                       <a:solidFill>
-                        <a:srgbClr val="1E3A5F"/>
+                        <a:srgbClr val="D6DEE8"/>
                       </a:solidFill>
                       <a:prstDash val="solid"/>
                       <a:round/>
@@ -12232,7 +12156,7 @@
                       <a:tailEnd type="none" w="med" len="med"/>
                     </a:lnB>
                     <a:solidFill>
-                      <a:srgbClr val="0B1A33"/>
+                      <a:srgbClr val="FFFFFF"/>
                     </a:solidFill>
                   </a:tcPr>
                 </a:tc>
@@ -12249,7 +12173,7 @@
                       <a:r>
                         <a:rPr lang="en-US" sz="1050" b="1" dirty="0">
                           <a:solidFill>
-                            <a:srgbClr val="FFFFFF"/>
+                            <a:srgbClr val="0F172A"/>
                           </a:solidFill>
                           <a:latin typeface="Calibri" pitchFamily="34" charset="0"/>
                           <a:ea typeface="Calibri" pitchFamily="34" charset="-122"/>
@@ -12267,7 +12191,7 @@
                   <a:tcPr marL="91440" marR="91440" marT="45720" marB="45720" anchor="ctr">
                     <a:lnL w="9525" cap="flat" cmpd="sng" algn="ctr">
                       <a:solidFill>
-                        <a:srgbClr val="1E3A5F"/>
+                        <a:srgbClr val="D6DEE8"/>
                       </a:solidFill>
                       <a:prstDash val="solid"/>
                       <a:round/>
@@ -12276,7 +12200,7 @@
                     </a:lnL>
                     <a:lnR w="9525" cap="flat" cmpd="sng" algn="ctr">
                       <a:solidFill>
-                        <a:srgbClr val="1E3A5F"/>
+                        <a:srgbClr val="D6DEE8"/>
                       </a:solidFill>
                       <a:prstDash val="solid"/>
                       <a:round/>
@@ -12285,7 +12209,7 @@
                     </a:lnR>
                     <a:lnT w="9525" cap="flat" cmpd="sng" algn="ctr">
                       <a:solidFill>
-                        <a:srgbClr val="1E3A5F"/>
+                        <a:srgbClr val="D6DEE8"/>
                       </a:solidFill>
                       <a:prstDash val="solid"/>
                       <a:round/>
@@ -12294,7 +12218,7 @@
                     </a:lnT>
                     <a:lnB w="9525" cap="flat" cmpd="sng" algn="ctr">
                       <a:solidFill>
-                        <a:srgbClr val="1E3A5F"/>
+                        <a:srgbClr val="D6DEE8"/>
                       </a:solidFill>
                       <a:prstDash val="solid"/>
                       <a:round/>
@@ -12302,7 +12226,7 @@
                       <a:tailEnd type="none" w="med" len="med"/>
                     </a:lnB>
                     <a:solidFill>
-                      <a:srgbClr val="0E2140"/>
+                      <a:srgbClr val="F8FAFC"/>
                     </a:solidFill>
                   </a:tcPr>
                 </a:tc>
@@ -12317,7 +12241,7 @@
                       <a:r>
                         <a:rPr lang="en-US" sz="1050" dirty="0">
                           <a:solidFill>
-                            <a:srgbClr val="CBD5E1"/>
+                            <a:srgbClr val="334155"/>
                           </a:solidFill>
                           <a:latin typeface="Calibri" pitchFamily="34" charset="0"/>
                           <a:ea typeface="Calibri" pitchFamily="34" charset="-122"/>
@@ -12335,7 +12259,7 @@
                   <a:tcPr marL="91440" marR="91440" marT="45720" marB="45720" anchor="ctr">
                     <a:lnL w="9525" cap="flat" cmpd="sng" algn="ctr">
                       <a:solidFill>
-                        <a:srgbClr val="1E3A5F"/>
+                        <a:srgbClr val="D6DEE8"/>
                       </a:solidFill>
                       <a:prstDash val="solid"/>
                       <a:round/>
@@ -12344,7 +12268,7 @@
                     </a:lnL>
                     <a:lnR w="9525" cap="flat" cmpd="sng" algn="ctr">
                       <a:solidFill>
-                        <a:srgbClr val="1E3A5F"/>
+                        <a:srgbClr val="D6DEE8"/>
                       </a:solidFill>
                       <a:prstDash val="solid"/>
                       <a:round/>
@@ -12353,7 +12277,7 @@
                     </a:lnR>
                     <a:lnT w="9525" cap="flat" cmpd="sng" algn="ctr">
                       <a:solidFill>
-                        <a:srgbClr val="1E3A5F"/>
+                        <a:srgbClr val="D6DEE8"/>
                       </a:solidFill>
                       <a:prstDash val="solid"/>
                       <a:round/>
@@ -12362,7 +12286,7 @@
                     </a:lnT>
                     <a:lnB w="9525" cap="flat" cmpd="sng" algn="ctr">
                       <a:solidFill>
-                        <a:srgbClr val="1E3A5F"/>
+                        <a:srgbClr val="D6DEE8"/>
                       </a:solidFill>
                       <a:prstDash val="solid"/>
                       <a:round/>
@@ -12370,7 +12294,7 @@
                       <a:tailEnd type="none" w="med" len="med"/>
                     </a:lnB>
                     <a:solidFill>
-                      <a:srgbClr val="0E2140"/>
+                      <a:srgbClr val="F8FAFC"/>
                     </a:solidFill>
                   </a:tcPr>
                 </a:tc>
@@ -12387,7 +12311,7 @@
                       <a:r>
                         <a:rPr lang="en-US" sz="1050" b="1" dirty="0">
                           <a:solidFill>
-                            <a:srgbClr val="FFFFFF"/>
+                            <a:srgbClr val="0F172A"/>
                           </a:solidFill>
                           <a:latin typeface="Calibri" pitchFamily="34" charset="0"/>
                           <a:ea typeface="Calibri" pitchFamily="34" charset="-122"/>
@@ -12405,7 +12329,7 @@
                   <a:tcPr marL="91440" marR="91440" marT="45720" marB="45720" anchor="ctr">
                     <a:lnL w="9525" cap="flat" cmpd="sng" algn="ctr">
                       <a:solidFill>
-                        <a:srgbClr val="1E3A5F"/>
+                        <a:srgbClr val="D6DEE8"/>
                       </a:solidFill>
                       <a:prstDash val="solid"/>
                       <a:round/>
@@ -12414,7 +12338,7 @@
                     </a:lnL>
                     <a:lnR w="9525" cap="flat" cmpd="sng" algn="ctr">
                       <a:solidFill>
-                        <a:srgbClr val="1E3A5F"/>
+                        <a:srgbClr val="D6DEE8"/>
                       </a:solidFill>
                       <a:prstDash val="solid"/>
                       <a:round/>
@@ -12423,7 +12347,7 @@
                     </a:lnR>
                     <a:lnT w="9525" cap="flat" cmpd="sng" algn="ctr">
                       <a:solidFill>
-                        <a:srgbClr val="1E3A5F"/>
+                        <a:srgbClr val="D6DEE8"/>
                       </a:solidFill>
                       <a:prstDash val="solid"/>
                       <a:round/>
@@ -12432,7 +12356,7 @@
                     </a:lnT>
                     <a:lnB w="9525" cap="flat" cmpd="sng" algn="ctr">
                       <a:solidFill>
-                        <a:srgbClr val="1E3A5F"/>
+                        <a:srgbClr val="D6DEE8"/>
                       </a:solidFill>
                       <a:prstDash val="solid"/>
                       <a:round/>
@@ -12440,7 +12364,7 @@
                       <a:tailEnd type="none" w="med" len="med"/>
                     </a:lnB>
                     <a:solidFill>
-                      <a:srgbClr val="0B1A33"/>
+                      <a:srgbClr val="FFFFFF"/>
                     </a:solidFill>
                   </a:tcPr>
                 </a:tc>
@@ -12455,7 +12379,7 @@
                       <a:r>
                         <a:rPr lang="en-US" sz="1050" dirty="0">
                           <a:solidFill>
-                            <a:srgbClr val="CBD5E1"/>
+                            <a:srgbClr val="334155"/>
                           </a:solidFill>
                           <a:latin typeface="Calibri" pitchFamily="34" charset="0"/>
                           <a:ea typeface="Calibri" pitchFamily="34" charset="-122"/>
@@ -12473,7 +12397,7 @@
                   <a:tcPr marL="91440" marR="91440" marT="45720" marB="45720" anchor="ctr">
                     <a:lnL w="9525" cap="flat" cmpd="sng" algn="ctr">
                       <a:solidFill>
-                        <a:srgbClr val="1E3A5F"/>
+                        <a:srgbClr val="D6DEE8"/>
                       </a:solidFill>
                       <a:prstDash val="solid"/>
                       <a:round/>
@@ -12482,7 +12406,7 @@
                     </a:lnL>
                     <a:lnR w="9525" cap="flat" cmpd="sng" algn="ctr">
                       <a:solidFill>
-                        <a:srgbClr val="1E3A5F"/>
+                        <a:srgbClr val="D6DEE8"/>
                       </a:solidFill>
                       <a:prstDash val="solid"/>
                       <a:round/>
@@ -12491,7 +12415,7 @@
                     </a:lnR>
                     <a:lnT w="9525" cap="flat" cmpd="sng" algn="ctr">
                       <a:solidFill>
-                        <a:srgbClr val="1E3A5F"/>
+                        <a:srgbClr val="D6DEE8"/>
                       </a:solidFill>
                       <a:prstDash val="solid"/>
                       <a:round/>
@@ -12500,7 +12424,7 @@
                     </a:lnT>
                     <a:lnB w="9525" cap="flat" cmpd="sng" algn="ctr">
                       <a:solidFill>
-                        <a:srgbClr val="1E3A5F"/>
+                        <a:srgbClr val="D6DEE8"/>
                       </a:solidFill>
                       <a:prstDash val="solid"/>
                       <a:round/>
@@ -12508,7 +12432,7 @@
                       <a:tailEnd type="none" w="med" len="med"/>
                     </a:lnB>
                     <a:solidFill>
-                      <a:srgbClr val="0B1A33"/>
+                      <a:srgbClr val="FFFFFF"/>
                     </a:solidFill>
                   </a:tcPr>
                 </a:tc>
@@ -12544,7 +12468,7 @@
             <a:r>
               <a:rPr lang="en-US" sz="1050" b="1" dirty="0">
                 <a:solidFill>
-                  <a:srgbClr val="38BDF8"/>
+                  <a:srgbClr val="0E7490"/>
                 </a:solidFill>
                 <a:latin typeface="Calibri" pitchFamily="34" charset="0"/>
                 <a:ea typeface="Calibri" pitchFamily="34" charset="-122"/>
@@ -12558,13 +12482,13 @@
             <a:r>
               <a:rPr lang="en-US" sz="1050" dirty="0">
                 <a:solidFill>
-                  <a:srgbClr val="CBD5E1"/>
-                </a:solidFill>
-                <a:latin typeface="Calibri" pitchFamily="34" charset="0"/>
-                <a:ea typeface="Calibri" pitchFamily="34" charset="-122"/>
-                <a:cs typeface="Calibri" pitchFamily="34" charset="-120"/>
-              </a:rPr>
-              <a:t>Node.js 22 · Express 5 · PWA · Leaflet + OpenStreetMap (no API keys) · Tesseract.js · Web Speech · Claude SDK</a:t>
+                  <a:srgbClr val="334155"/>
+                </a:solidFill>
+                <a:latin typeface="Calibri" pitchFamily="34" charset="0"/>
+                <a:ea typeface="Calibri" pitchFamily="34" charset="-122"/>
+                <a:cs typeface="Calibri" pitchFamily="34" charset="-120"/>
+              </a:rPr>
+              <a:t>Node.js 22 · Express 5 · PWA · Leaflet + OpenStreetMap + OSRM roads (no API keys) · Tesseract.js · Web Speech · Gemini / Claude</a:t>
             </a:r>
             <a:endParaRPr lang="en-US" sz="1050" dirty="0"/>
           </a:p>
@@ -12587,11 +12511,11 @@
             </a:avLst>
           </a:prstGeom>
           <a:solidFill>
-            <a:srgbClr val="0E1F3D"/>
+            <a:srgbClr val="F1F5F9"/>
           </a:solidFill>
           <a:ln w="12700">
             <a:solidFill>
-              <a:srgbClr val="38BDF8"/>
+              <a:srgbClr val="0E7490"/>
             </a:solidFill>
             <a:prstDash val="solid"/>
           </a:ln>
@@ -12624,7 +12548,7 @@
             <a:r>
               <a:rPr lang="en-US" sz="1150" b="1" dirty="0">
                 <a:solidFill>
-                  <a:srgbClr val="38BDF8"/>
+                  <a:srgbClr val="0E7490"/>
                 </a:solidFill>
                 <a:latin typeface="Calibri" pitchFamily="34" charset="0"/>
                 <a:ea typeface="Calibri" pitchFamily="34" charset="-122"/>
@@ -12638,7 +12562,7 @@
             <a:r>
               <a:rPr lang="en-US" sz="1150" dirty="0">
                 <a:solidFill>
-                  <a:srgbClr val="FFFFFF"/>
+                  <a:srgbClr val="0F172A"/>
                 </a:solidFill>
                 <a:latin typeface="Calibri" pitchFamily="34" charset="0"/>
                 <a:ea typeface="Calibri" pitchFamily="34" charset="-122"/>
@@ -12652,7 +12576,7 @@
             <a:r>
               <a:rPr lang="en-US" sz="1150" b="1" dirty="0">
                 <a:solidFill>
-                  <a:srgbClr val="38BDF8"/>
+                  <a:srgbClr val="0E7490"/>
                 </a:solidFill>
                 <a:latin typeface="Calibri" pitchFamily="34" charset="0"/>
                 <a:ea typeface="Calibri" pitchFamily="34" charset="-122"/>
@@ -12666,7 +12590,7 @@
             <a:r>
               <a:rPr lang="en-US" sz="1150" dirty="0">
                 <a:solidFill>
-                  <a:srgbClr val="FFFFFF"/>
+                  <a:srgbClr val="0F172A"/>
                 </a:solidFill>
                 <a:latin typeface="Calibri" pitchFamily="34" charset="0"/>
                 <a:ea typeface="Calibri" pitchFamily="34" charset="-122"/>
@@ -12708,7 +12632,7 @@
             <a:lvl1pPr>
               <a:defRPr sz="900">
                 <a:solidFill>
-                  <a:srgbClr val="94A3B8"/>
+                  <a:srgbClr val="64748B"/>
                 </a:solidFill>
               </a:defRPr>
             </a:lvl1pPr>
@@ -12775,7 +12699,7 @@
             <a:r>
               <a:rPr lang="en-US" sz="1100" b="1" spc="200" kern="0" dirty="0">
                 <a:solidFill>
-                  <a:srgbClr val="38BDF8"/>
+                  <a:srgbClr val="0E7490"/>
                 </a:solidFill>
                 <a:latin typeface="Calibri" pitchFamily="34" charset="0"/>
                 <a:ea typeface="Calibri" pitchFamily="34" charset="-122"/>
@@ -12816,7 +12740,7 @@
             <a:r>
               <a:rPr lang="en-US" sz="3400" b="1" dirty="0">
                 <a:solidFill>
-                  <a:schemeClr val="bg1"/>
+                  <a:schemeClr val="tx1"/>
                 </a:solidFill>
               </a:rPr>
               <a:t>From Prototype to </a:t>
@@ -12827,7 +12751,7 @@
             <a:r>
               <a:rPr lang="en-US" sz="3400" b="1" dirty="0">
                 <a:solidFill>
-                  <a:srgbClr val="38BDF8"/>
+                  <a:srgbClr val="0E7490"/>
                 </a:solidFill>
               </a:rPr>
               <a:t>Statewide</a:t>
@@ -12853,7 +12777,7 @@
           <a:noFill/>
           <a:ln w="19050">
             <a:solidFill>
-              <a:srgbClr val="38BDF8"/>
+              <a:srgbClr val="0E7490"/>
             </a:solidFill>
             <a:prstDash val="dash"/>
           </a:ln>
@@ -12874,18 +12798,18 @@
             <a:avLst/>
           </a:prstGeom>
           <a:solidFill>
-            <a:srgbClr val="0E1F3D"/>
+            <a:srgbClr val="FFFFFF"/>
           </a:solidFill>
           <a:ln w="19050">
             <a:solidFill>
-              <a:srgbClr val="38BDF8"/>
+              <a:srgbClr val="0E7490"/>
             </a:solidFill>
             <a:prstDash val="solid"/>
           </a:ln>
           <a:effectLst>
-            <a:outerShdw sx="100000" sy="100000" kx="0" ky="0" algn="bl" rotWithShape="0" blurRad="177800" dist="50800" dir="5400000">
-              <a:srgbClr val="38BDF8">
-                <a:alpha val="35000"/>
+            <a:outerShdw sx="100000" sy="100000" kx="0" ky="0" algn="bl" rotWithShape="0" blurRad="127000" dist="25400" dir="5400000">
+              <a:srgbClr val="0F172A">
+                <a:alpha val="16000"/>
               </a:srgbClr>
             </a:outerShdw>
           </a:effectLst>
@@ -12942,7 +12866,7 @@
             <a:r>
               <a:rPr lang="en-US" sz="1600" b="1" dirty="0">
                 <a:solidFill>
-                  <a:srgbClr val="FFFFFF"/>
+                  <a:srgbClr val="0F172A"/>
                 </a:solidFill>
                 <a:latin typeface="Calibri" pitchFamily="34" charset="0"/>
                 <a:ea typeface="Calibri" pitchFamily="34" charset="-122"/>
@@ -12981,7 +12905,7 @@
             <a:r>
               <a:rPr lang="en-US" sz="1200" b="1" dirty="0">
                 <a:solidFill>
-                  <a:srgbClr val="34D399"/>
+                  <a:srgbClr val="059669"/>
                 </a:solidFill>
                 <a:latin typeface="Calibri" pitchFamily="34" charset="0"/>
                 <a:ea typeface="Calibri" pitchFamily="34" charset="-122"/>
@@ -13020,13 +12944,13 @@
             <a:r>
               <a:rPr lang="en-US" sz="1100" dirty="0">
                 <a:solidFill>
-                  <a:srgbClr val="CBD5E1"/>
-                </a:solidFill>
-                <a:latin typeface="Calibri" pitchFamily="34" charset="0"/>
-                <a:ea typeface="Calibri" pitchFamily="34" charset="-122"/>
-                <a:cs typeface="Calibri" pitchFamily="34" charset="-120"/>
-              </a:rPr>
-              <a:t>Portals live, AI triage, matching, acceptance, live maps, 51 tests</a:t>
+                  <a:srgbClr val="334155"/>
+                </a:solidFill>
+                <a:latin typeface="Calibri" pitchFamily="34" charset="0"/>
+                <a:ea typeface="Calibri" pitchFamily="34" charset="-122"/>
+                <a:cs typeface="Calibri" pitchFamily="34" charset="-120"/>
+              </a:rPr>
+              <a:t>Portals live, AI triage, matching, acceptance, real-road live maps, 62 tests</a:t>
             </a:r>
             <a:endParaRPr lang="en-US" sz="1100" dirty="0"/>
           </a:p>
@@ -13047,18 +12971,18 @@
             <a:avLst/>
           </a:prstGeom>
           <a:solidFill>
-            <a:srgbClr val="0E1F3D"/>
+            <a:srgbClr val="FFFFFF"/>
           </a:solidFill>
           <a:ln w="19050">
             <a:solidFill>
-              <a:srgbClr val="38BDF8"/>
+              <a:srgbClr val="0E7490"/>
             </a:solidFill>
             <a:prstDash val="solid"/>
           </a:ln>
           <a:effectLst>
-            <a:outerShdw sx="100000" sy="100000" kx="0" ky="0" algn="bl" rotWithShape="0" blurRad="177800" dist="50800" dir="5400000">
-              <a:srgbClr val="38BDF8">
-                <a:alpha val="35000"/>
+            <a:outerShdw sx="100000" sy="100000" kx="0" ky="0" algn="bl" rotWithShape="0" blurRad="127000" dist="25400" dir="5400000">
+              <a:srgbClr val="0F172A">
+                <a:alpha val="16000"/>
               </a:srgbClr>
             </a:outerShdw>
           </a:effectLst>
@@ -13115,7 +13039,7 @@
             <a:r>
               <a:rPr lang="en-US" sz="1600" b="1" dirty="0">
                 <a:solidFill>
-                  <a:srgbClr val="FFFFFF"/>
+                  <a:srgbClr val="0F172A"/>
                 </a:solidFill>
                 <a:latin typeface="Calibri" pitchFamily="34" charset="0"/>
                 <a:ea typeface="Calibri" pitchFamily="34" charset="-122"/>
@@ -13154,7 +13078,7 @@
             <a:r>
               <a:rPr lang="en-US" sz="1200" b="1" dirty="0">
                 <a:solidFill>
-                  <a:srgbClr val="38BDF8"/>
+                  <a:srgbClr val="0E7490"/>
                 </a:solidFill>
                 <a:latin typeface="Calibri" pitchFamily="34" charset="0"/>
                 <a:ea typeface="Calibri" pitchFamily="34" charset="-122"/>
@@ -13193,7 +13117,7 @@
             <a:r>
               <a:rPr lang="en-US" sz="1100" dirty="0">
                 <a:solidFill>
-                  <a:srgbClr val="CBD5E1"/>
+                  <a:srgbClr val="334155"/>
                 </a:solidFill>
                 <a:latin typeface="Calibri" pitchFamily="34" charset="0"/>
                 <a:ea typeface="Calibri" pitchFamily="34" charset="-122"/>
@@ -13220,18 +13144,18 @@
             <a:avLst/>
           </a:prstGeom>
           <a:solidFill>
-            <a:srgbClr val="0E1F3D"/>
+            <a:srgbClr val="FFFFFF"/>
           </a:solidFill>
           <a:ln w="19050">
             <a:solidFill>
-              <a:srgbClr val="38BDF8"/>
+              <a:srgbClr val="0E7490"/>
             </a:solidFill>
             <a:prstDash val="solid"/>
           </a:ln>
           <a:effectLst>
-            <a:outerShdw sx="100000" sy="100000" kx="0" ky="0" algn="bl" rotWithShape="0" blurRad="177800" dist="50800" dir="5400000">
-              <a:srgbClr val="38BDF8">
-                <a:alpha val="35000"/>
+            <a:outerShdw sx="100000" sy="100000" kx="0" ky="0" algn="bl" rotWithShape="0" blurRad="127000" dist="25400" dir="5400000">
+              <a:srgbClr val="0F172A">
+                <a:alpha val="16000"/>
               </a:srgbClr>
             </a:outerShdw>
           </a:effectLst>
@@ -13288,7 +13212,7 @@
             <a:r>
               <a:rPr lang="en-US" sz="1600" b="1" dirty="0">
                 <a:solidFill>
-                  <a:srgbClr val="FFFFFF"/>
+                  <a:srgbClr val="0F172A"/>
                 </a:solidFill>
                 <a:latin typeface="Calibri" pitchFamily="34" charset="0"/>
                 <a:ea typeface="Calibri" pitchFamily="34" charset="-122"/>
@@ -13327,7 +13251,7 @@
             <a:r>
               <a:rPr lang="en-US" sz="1200" b="1" dirty="0">
                 <a:solidFill>
-                  <a:srgbClr val="38BDF8"/>
+                  <a:srgbClr val="0E7490"/>
                 </a:solidFill>
                 <a:latin typeface="Calibri" pitchFamily="34" charset="0"/>
                 <a:ea typeface="Calibri" pitchFamily="34" charset="-122"/>
@@ -13366,7 +13290,7 @@
             <a:r>
               <a:rPr lang="en-US" sz="1100" dirty="0">
                 <a:solidFill>
-                  <a:srgbClr val="CBD5E1"/>
+                  <a:srgbClr val="334155"/>
                 </a:solidFill>
                 <a:latin typeface="Calibri" pitchFamily="34" charset="0"/>
                 <a:ea typeface="Calibri" pitchFamily="34" charset="-122"/>
@@ -13393,18 +13317,18 @@
             <a:avLst/>
           </a:prstGeom>
           <a:solidFill>
-            <a:srgbClr val="0E1F3D"/>
+            <a:srgbClr val="FFFFFF"/>
           </a:solidFill>
           <a:ln w="19050">
             <a:solidFill>
-              <a:srgbClr val="38BDF8"/>
+              <a:srgbClr val="0E7490"/>
             </a:solidFill>
             <a:prstDash val="solid"/>
           </a:ln>
           <a:effectLst>
-            <a:outerShdw sx="100000" sy="100000" kx="0" ky="0" algn="bl" rotWithShape="0" blurRad="177800" dist="50800" dir="5400000">
-              <a:srgbClr val="38BDF8">
-                <a:alpha val="35000"/>
+            <a:outerShdw sx="100000" sy="100000" kx="0" ky="0" algn="bl" rotWithShape="0" blurRad="127000" dist="25400" dir="5400000">
+              <a:srgbClr val="0F172A">
+                <a:alpha val="16000"/>
               </a:srgbClr>
             </a:outerShdw>
           </a:effectLst>
@@ -13461,7 +13385,7 @@
             <a:r>
               <a:rPr lang="en-US" sz="1600" b="1" dirty="0">
                 <a:solidFill>
-                  <a:srgbClr val="FFFFFF"/>
+                  <a:srgbClr val="0F172A"/>
                 </a:solidFill>
                 <a:latin typeface="Calibri" pitchFamily="34" charset="0"/>
                 <a:ea typeface="Calibri" pitchFamily="34" charset="-122"/>
@@ -13500,7 +13424,7 @@
             <a:r>
               <a:rPr lang="en-US" sz="1200" b="1" dirty="0">
                 <a:solidFill>
-                  <a:srgbClr val="38BDF8"/>
+                  <a:srgbClr val="0E7490"/>
                 </a:solidFill>
                 <a:latin typeface="Calibri" pitchFamily="34" charset="0"/>
                 <a:ea typeface="Calibri" pitchFamily="34" charset="-122"/>
@@ -13539,7 +13463,7 @@
             <a:r>
               <a:rPr lang="en-US" sz="1100" dirty="0">
                 <a:solidFill>
-                  <a:srgbClr val="CBD5E1"/>
+                  <a:srgbClr val="334155"/>
                 </a:solidFill>
                 <a:latin typeface="Calibri" pitchFamily="34" charset="0"/>
                 <a:ea typeface="Calibri" pitchFamily="34" charset="-122"/>
@@ -13566,18 +13490,18 @@
             <a:avLst/>
           </a:prstGeom>
           <a:solidFill>
-            <a:srgbClr val="0E1F3D"/>
+            <a:srgbClr val="FFFFFF"/>
           </a:solidFill>
           <a:ln w="12700">
             <a:solidFill>
-              <a:srgbClr val="38BDF8"/>
+              <a:srgbClr val="D6DEE8"/>
             </a:solidFill>
             <a:prstDash val="solid"/>
           </a:ln>
           <a:effectLst>
-            <a:outerShdw sx="100000" sy="100000" kx="0" ky="0" algn="bl" rotWithShape="0" blurRad="177800" dist="50800" dir="5400000">
-              <a:srgbClr val="38BDF8">
-                <a:alpha val="35000"/>
+            <a:outerShdw sx="100000" sy="100000" kx="0" ky="0" algn="bl" rotWithShape="0" blurRad="127000" dist="25400" dir="5400000">
+              <a:srgbClr val="0F172A">
+                <a:alpha val="16000"/>
               </a:srgbClr>
             </a:outerShdw>
           </a:effectLst>
@@ -13633,7 +13557,7 @@
             <a:r>
               <a:rPr lang="en-US" sz="1050" dirty="0">
                 <a:solidFill>
-                  <a:srgbClr val="94A3B8"/>
+                  <a:srgbClr val="64748B"/>
                 </a:solidFill>
                 <a:latin typeface="Calibri" pitchFamily="34" charset="0"/>
                 <a:ea typeface="Calibri" pitchFamily="34" charset="-122"/>
@@ -13672,7 +13596,7 @@
             <a:r>
               <a:rPr lang="en-US" sz="1150" b="1" spc="150" kern="0" dirty="0">
                 <a:solidFill>
-                  <a:srgbClr val="38BDF8"/>
+                  <a:srgbClr val="0E7490"/>
                 </a:solidFill>
                 <a:latin typeface="Calibri" pitchFamily="34" charset="0"/>
                 <a:ea typeface="Calibri" pitchFamily="34" charset="-122"/>
@@ -13722,7 +13646,7 @@
                       <a:r>
                         <a:rPr lang="en-US" sz="1050" b="1" dirty="0">
                           <a:solidFill>
-                            <a:srgbClr val="38BDF8"/>
+                            <a:srgbClr val="0E7490"/>
                           </a:solidFill>
                           <a:latin typeface="Calibri" pitchFamily="34" charset="0"/>
                           <a:ea typeface="Calibri" pitchFamily="34" charset="-122"/>
@@ -13740,7 +13664,7 @@
                   <a:tcPr marL="91440" marR="91440" marT="45720" marB="45720" anchor="ctr">
                     <a:lnL w="9525" cap="flat" cmpd="sng" algn="ctr">
                       <a:solidFill>
-                        <a:srgbClr val="1E3A5F"/>
+                        <a:srgbClr val="D6DEE8"/>
                       </a:solidFill>
                       <a:prstDash val="solid"/>
                       <a:round/>
@@ -13749,7 +13673,7 @@
                     </a:lnL>
                     <a:lnR w="9525" cap="flat" cmpd="sng" algn="ctr">
                       <a:solidFill>
-                        <a:srgbClr val="1E3A5F"/>
+                        <a:srgbClr val="D6DEE8"/>
                       </a:solidFill>
                       <a:prstDash val="solid"/>
                       <a:round/>
@@ -13758,7 +13682,7 @@
                     </a:lnR>
                     <a:lnT w="9525" cap="flat" cmpd="sng" algn="ctr">
                       <a:solidFill>
-                        <a:srgbClr val="1E3A5F"/>
+                        <a:srgbClr val="D6DEE8"/>
                       </a:solidFill>
                       <a:prstDash val="solid"/>
                       <a:round/>
@@ -13767,7 +13691,7 @@
                     </a:lnT>
                     <a:lnB w="9525" cap="flat" cmpd="sng" algn="ctr">
                       <a:solidFill>
-                        <a:srgbClr val="1E3A5F"/>
+                        <a:srgbClr val="D6DEE8"/>
                       </a:solidFill>
                       <a:prstDash val="solid"/>
                       <a:round/>
@@ -13775,7 +13699,7 @@
                       <a:tailEnd type="none" w="med" len="med"/>
                     </a:lnB>
                     <a:solidFill>
-                      <a:srgbClr val="12304A"/>
+                      <a:srgbClr val="E0F2FE"/>
                     </a:solidFill>
                   </a:tcPr>
                 </a:tc>
@@ -13790,7 +13714,7 @@
                       <a:r>
                         <a:rPr lang="en-US" sz="1050" b="1" dirty="0">
                           <a:solidFill>
-                            <a:srgbClr val="38BDF8"/>
+                            <a:srgbClr val="0E7490"/>
                           </a:solidFill>
                           <a:latin typeface="Calibri" pitchFamily="34" charset="0"/>
                           <a:ea typeface="Calibri" pitchFamily="34" charset="-122"/>
@@ -13808,7 +13732,7 @@
                   <a:tcPr marL="91440" marR="91440" marT="45720" marB="45720" anchor="ctr">
                     <a:lnL w="9525" cap="flat" cmpd="sng" algn="ctr">
                       <a:solidFill>
-                        <a:srgbClr val="1E3A5F"/>
+                        <a:srgbClr val="D6DEE8"/>
                       </a:solidFill>
                       <a:prstDash val="solid"/>
                       <a:round/>
@@ -13817,7 +13741,7 @@
                     </a:lnL>
                     <a:lnR w="9525" cap="flat" cmpd="sng" algn="ctr">
                       <a:solidFill>
-                        <a:srgbClr val="1E3A5F"/>
+                        <a:srgbClr val="D6DEE8"/>
                       </a:solidFill>
                       <a:prstDash val="solid"/>
                       <a:round/>
@@ -13826,7 +13750,7 @@
                     </a:lnR>
                     <a:lnT w="9525" cap="flat" cmpd="sng" algn="ctr">
                       <a:solidFill>
-                        <a:srgbClr val="1E3A5F"/>
+                        <a:srgbClr val="D6DEE8"/>
                       </a:solidFill>
                       <a:prstDash val="solid"/>
                       <a:round/>
@@ -13835,7 +13759,7 @@
                     </a:lnT>
                     <a:lnB w="9525" cap="flat" cmpd="sng" algn="ctr">
                       <a:solidFill>
-                        <a:srgbClr val="1E3A5F"/>
+                        <a:srgbClr val="D6DEE8"/>
                       </a:solidFill>
                       <a:prstDash val="solid"/>
                       <a:round/>
@@ -13843,7 +13767,7 @@
                       <a:tailEnd type="none" w="med" len="med"/>
                     </a:lnB>
                     <a:solidFill>
-                      <a:srgbClr val="12304A"/>
+                      <a:srgbClr val="E0F2FE"/>
                     </a:solidFill>
                   </a:tcPr>
                 </a:tc>
@@ -13860,7 +13784,7 @@
                       <a:r>
                         <a:rPr lang="en-US" sz="1050" b="1" dirty="0">
                           <a:solidFill>
-                            <a:srgbClr val="FFFFFF"/>
+                            <a:srgbClr val="0F172A"/>
                           </a:solidFill>
                           <a:latin typeface="Calibri" pitchFamily="34" charset="0"/>
                           <a:ea typeface="Calibri" pitchFamily="34" charset="-122"/>
@@ -13878,7 +13802,7 @@
                   <a:tcPr marL="91440" marR="91440" marT="45720" marB="45720" anchor="ctr">
                     <a:lnL w="9525" cap="flat" cmpd="sng" algn="ctr">
                       <a:solidFill>
-                        <a:srgbClr val="1E3A5F"/>
+                        <a:srgbClr val="D6DEE8"/>
                       </a:solidFill>
                       <a:prstDash val="solid"/>
                       <a:round/>
@@ -13887,7 +13811,7 @@
                     </a:lnL>
                     <a:lnR w="9525" cap="flat" cmpd="sng" algn="ctr">
                       <a:solidFill>
-                        <a:srgbClr val="1E3A5F"/>
+                        <a:srgbClr val="D6DEE8"/>
                       </a:solidFill>
                       <a:prstDash val="solid"/>
                       <a:round/>
@@ -13896,7 +13820,7 @@
                     </a:lnR>
                     <a:lnT w="9525" cap="flat" cmpd="sng" algn="ctr">
                       <a:solidFill>
-                        <a:srgbClr val="1E3A5F"/>
+                        <a:srgbClr val="D6DEE8"/>
                       </a:solidFill>
                       <a:prstDash val="solid"/>
                       <a:round/>
@@ -13905,7 +13829,7 @@
                     </a:lnT>
                     <a:lnB w="9525" cap="flat" cmpd="sng" algn="ctr">
                       <a:solidFill>
-                        <a:srgbClr val="1E3A5F"/>
+                        <a:srgbClr val="D6DEE8"/>
                       </a:solidFill>
                       <a:prstDash val="solid"/>
                       <a:round/>
@@ -13913,7 +13837,7 @@
                       <a:tailEnd type="none" w="med" len="med"/>
                     </a:lnB>
                     <a:solidFill>
-                      <a:srgbClr val="0B1A33"/>
+                      <a:srgbClr val="FFFFFF"/>
                     </a:solidFill>
                   </a:tcPr>
                 </a:tc>
@@ -13928,7 +13852,7 @@
                       <a:r>
                         <a:rPr lang="en-US" sz="1050" dirty="0">
                           <a:solidFill>
-                            <a:srgbClr val="CBD5E1"/>
+                            <a:srgbClr val="334155"/>
                           </a:solidFill>
                           <a:latin typeface="Calibri" pitchFamily="34" charset="0"/>
                           <a:ea typeface="Calibri" pitchFamily="34" charset="-122"/>
@@ -13946,7 +13870,7 @@
                   <a:tcPr marL="91440" marR="91440" marT="45720" marB="45720" anchor="ctr">
                     <a:lnL w="9525" cap="flat" cmpd="sng" algn="ctr">
                       <a:solidFill>
-                        <a:srgbClr val="1E3A5F"/>
+                        <a:srgbClr val="D6DEE8"/>
                       </a:solidFill>
                       <a:prstDash val="solid"/>
                       <a:round/>
@@ -13955,7 +13879,7 @@
                     </a:lnL>
                     <a:lnR w="9525" cap="flat" cmpd="sng" algn="ctr">
                       <a:solidFill>
-                        <a:srgbClr val="1E3A5F"/>
+                        <a:srgbClr val="D6DEE8"/>
                       </a:solidFill>
                       <a:prstDash val="solid"/>
                       <a:round/>
@@ -13964,7 +13888,7 @@
                     </a:lnR>
                     <a:lnT w="9525" cap="flat" cmpd="sng" algn="ctr">
                       <a:solidFill>
-                        <a:srgbClr val="1E3A5F"/>
+                        <a:srgbClr val="D6DEE8"/>
                       </a:solidFill>
                       <a:prstDash val="solid"/>
                       <a:round/>
@@ -13973,7 +13897,7 @@
                     </a:lnT>
                     <a:lnB w="9525" cap="flat" cmpd="sng" algn="ctr">
                       <a:solidFill>
-                        <a:srgbClr val="1E3A5F"/>
+                        <a:srgbClr val="D6DEE8"/>
                       </a:solidFill>
                       <a:prstDash val="solid"/>
                       <a:round/>
@@ -13981,7 +13905,7 @@
                       <a:tailEnd type="none" w="med" len="med"/>
                     </a:lnB>
                     <a:solidFill>
-                      <a:srgbClr val="0B1A33"/>
+                      <a:srgbClr val="FFFFFF"/>
                     </a:solidFill>
                   </a:tcPr>
                 </a:tc>
@@ -13998,7 +13922,7 @@
                       <a:r>
                         <a:rPr lang="en-US" sz="1050" b="1" dirty="0">
                           <a:solidFill>
-                            <a:srgbClr val="FFFFFF"/>
+                            <a:srgbClr val="0F172A"/>
                           </a:solidFill>
                           <a:latin typeface="Calibri" pitchFamily="34" charset="0"/>
                           <a:ea typeface="Calibri" pitchFamily="34" charset="-122"/>
@@ -14016,7 +13940,7 @@
                   <a:tcPr marL="91440" marR="91440" marT="45720" marB="45720" anchor="ctr">
                     <a:lnL w="9525" cap="flat" cmpd="sng" algn="ctr">
                       <a:solidFill>
-                        <a:srgbClr val="1E3A5F"/>
+                        <a:srgbClr val="D6DEE8"/>
                       </a:solidFill>
                       <a:prstDash val="solid"/>
                       <a:round/>
@@ -14025,7 +13949,7 @@
                     </a:lnL>
                     <a:lnR w="9525" cap="flat" cmpd="sng" algn="ctr">
                       <a:solidFill>
-                        <a:srgbClr val="1E3A5F"/>
+                        <a:srgbClr val="D6DEE8"/>
                       </a:solidFill>
                       <a:prstDash val="solid"/>
                       <a:round/>
@@ -14034,7 +13958,7 @@
                     </a:lnR>
                     <a:lnT w="9525" cap="flat" cmpd="sng" algn="ctr">
                       <a:solidFill>
-                        <a:srgbClr val="1E3A5F"/>
+                        <a:srgbClr val="D6DEE8"/>
                       </a:solidFill>
                       <a:prstDash val="solid"/>
                       <a:round/>
@@ -14043,7 +13967,7 @@
                     </a:lnT>
                     <a:lnB w="9525" cap="flat" cmpd="sng" algn="ctr">
                       <a:solidFill>
-                        <a:srgbClr val="1E3A5F"/>
+                        <a:srgbClr val="D6DEE8"/>
                       </a:solidFill>
                       <a:prstDash val="solid"/>
                       <a:round/>
@@ -14051,7 +13975,7 @@
                       <a:tailEnd type="none" w="med" len="med"/>
                     </a:lnB>
                     <a:solidFill>
-                      <a:srgbClr val="0E2140"/>
+                      <a:srgbClr val="F8FAFC"/>
                     </a:solidFill>
                   </a:tcPr>
                 </a:tc>
@@ -14066,7 +13990,7 @@
                       <a:r>
                         <a:rPr lang="en-US" sz="1050" dirty="0">
                           <a:solidFill>
-                            <a:srgbClr val="CBD5E1"/>
+                            <a:srgbClr val="334155"/>
                           </a:solidFill>
                           <a:latin typeface="Calibri" pitchFamily="34" charset="0"/>
                           <a:ea typeface="Calibri" pitchFamily="34" charset="-122"/>
@@ -14084,7 +14008,7 @@
                   <a:tcPr marL="91440" marR="91440" marT="45720" marB="45720" anchor="ctr">
                     <a:lnL w="9525" cap="flat" cmpd="sng" algn="ctr">
                       <a:solidFill>
-                        <a:srgbClr val="1E3A5F"/>
+                        <a:srgbClr val="D6DEE8"/>
                       </a:solidFill>
                       <a:prstDash val="solid"/>
                       <a:round/>
@@ -14093,7 +14017,7 @@
                     </a:lnL>
                     <a:lnR w="9525" cap="flat" cmpd="sng" algn="ctr">
                       <a:solidFill>
-                        <a:srgbClr val="1E3A5F"/>
+                        <a:srgbClr val="D6DEE8"/>
                       </a:solidFill>
                       <a:prstDash val="solid"/>
                       <a:round/>
@@ -14102,7 +14026,7 @@
                     </a:lnR>
                     <a:lnT w="9525" cap="flat" cmpd="sng" algn="ctr">
                       <a:solidFill>
-                        <a:srgbClr val="1E3A5F"/>
+                        <a:srgbClr val="D6DEE8"/>
                       </a:solidFill>
                       <a:prstDash val="solid"/>
                       <a:round/>
@@ -14111,7 +14035,7 @@
                     </a:lnT>
                     <a:lnB w="9525" cap="flat" cmpd="sng" algn="ctr">
                       <a:solidFill>
-                        <a:srgbClr val="1E3A5F"/>
+                        <a:srgbClr val="D6DEE8"/>
                       </a:solidFill>
                       <a:prstDash val="solid"/>
                       <a:round/>
@@ -14119,7 +14043,7 @@
                       <a:tailEnd type="none" w="med" len="med"/>
                     </a:lnB>
                     <a:solidFill>
-                      <a:srgbClr val="0E2140"/>
+                      <a:srgbClr val="F8FAFC"/>
                     </a:solidFill>
                   </a:tcPr>
                 </a:tc>
@@ -14136,7 +14060,7 @@
                       <a:r>
                         <a:rPr lang="en-US" sz="1050" b="1" dirty="0">
                           <a:solidFill>
-                            <a:srgbClr val="FFFFFF"/>
+                            <a:srgbClr val="0F172A"/>
                           </a:solidFill>
                           <a:latin typeface="Calibri" pitchFamily="34" charset="0"/>
                           <a:ea typeface="Calibri" pitchFamily="34" charset="-122"/>
@@ -14154,7 +14078,7 @@
                   <a:tcPr marL="91440" marR="91440" marT="45720" marB="45720" anchor="ctr">
                     <a:lnL w="9525" cap="flat" cmpd="sng" algn="ctr">
                       <a:solidFill>
-                        <a:srgbClr val="1E3A5F"/>
+                        <a:srgbClr val="D6DEE8"/>
                       </a:solidFill>
                       <a:prstDash val="solid"/>
                       <a:round/>
@@ -14163,7 +14087,7 @@
                     </a:lnL>
                     <a:lnR w="9525" cap="flat" cmpd="sng" algn="ctr">
                       <a:solidFill>
-                        <a:srgbClr val="1E3A5F"/>
+                        <a:srgbClr val="D6DEE8"/>
                       </a:solidFill>
                       <a:prstDash val="solid"/>
                       <a:round/>
@@ -14172,7 +14096,7 @@
                     </a:lnR>
                     <a:lnT w="9525" cap="flat" cmpd="sng" algn="ctr">
                       <a:solidFill>
-                        <a:srgbClr val="1E3A5F"/>
+                        <a:srgbClr val="D6DEE8"/>
                       </a:solidFill>
                       <a:prstDash val="solid"/>
                       <a:round/>
@@ -14181,7 +14105,7 @@
                     </a:lnT>
                     <a:lnB w="9525" cap="flat" cmpd="sng" algn="ctr">
                       <a:solidFill>
-                        <a:srgbClr val="1E3A5F"/>
+                        <a:srgbClr val="D6DEE8"/>
                       </a:solidFill>
                       <a:prstDash val="solid"/>
                       <a:round/>
@@ -14189,7 +14113,7 @@
                       <a:tailEnd type="none" w="med" len="med"/>
                     </a:lnB>
                     <a:solidFill>
-                      <a:srgbClr val="0B1A33"/>
+                      <a:srgbClr val="FFFFFF"/>
                     </a:solidFill>
                   </a:tcPr>
                 </a:tc>
@@ -14204,7 +14128,7 @@
                       <a:r>
                         <a:rPr lang="en-US" sz="1050" dirty="0">
                           <a:solidFill>
-                            <a:srgbClr val="CBD5E1"/>
+                            <a:srgbClr val="334155"/>
                           </a:solidFill>
                           <a:latin typeface="Calibri" pitchFamily="34" charset="0"/>
                           <a:ea typeface="Calibri" pitchFamily="34" charset="-122"/>
@@ -14222,7 +14146,7 @@
                   <a:tcPr marL="91440" marR="91440" marT="45720" marB="45720" anchor="ctr">
                     <a:lnL w="9525" cap="flat" cmpd="sng" algn="ctr">
                       <a:solidFill>
-                        <a:srgbClr val="1E3A5F"/>
+                        <a:srgbClr val="D6DEE8"/>
                       </a:solidFill>
                       <a:prstDash val="solid"/>
                       <a:round/>
@@ -14231,7 +14155,7 @@
                     </a:lnL>
                     <a:lnR w="9525" cap="flat" cmpd="sng" algn="ctr">
                       <a:solidFill>
-                        <a:srgbClr val="1E3A5F"/>
+                        <a:srgbClr val="D6DEE8"/>
                       </a:solidFill>
                       <a:prstDash val="solid"/>
                       <a:round/>
@@ -14240,7 +14164,7 @@
                     </a:lnR>
                     <a:lnT w="9525" cap="flat" cmpd="sng" algn="ctr">
                       <a:solidFill>
-                        <a:srgbClr val="1E3A5F"/>
+                        <a:srgbClr val="D6DEE8"/>
                       </a:solidFill>
                       <a:prstDash val="solid"/>
                       <a:round/>
@@ -14249,7 +14173,7 @@
                     </a:lnT>
                     <a:lnB w="9525" cap="flat" cmpd="sng" algn="ctr">
                       <a:solidFill>
-                        <a:srgbClr val="1E3A5F"/>
+                        <a:srgbClr val="D6DEE8"/>
                       </a:solidFill>
                       <a:prstDash val="solid"/>
                       <a:round/>
@@ -14257,7 +14181,7 @@
                       <a:tailEnd type="none" w="med" len="med"/>
                     </a:lnB>
                     <a:solidFill>
-                      <a:srgbClr val="0B1A33"/>
+                      <a:srgbClr val="FFFFFF"/>
                     </a:solidFill>
                   </a:tcPr>
                 </a:tc>
@@ -14274,7 +14198,7 @@
                       <a:r>
                         <a:rPr lang="en-US" sz="1050" b="1" dirty="0">
                           <a:solidFill>
-                            <a:srgbClr val="FFFFFF"/>
+                            <a:srgbClr val="0F172A"/>
                           </a:solidFill>
                           <a:latin typeface="Calibri" pitchFamily="34" charset="0"/>
                           <a:ea typeface="Calibri" pitchFamily="34" charset="-122"/>
@@ -14292,7 +14216,7 @@
                   <a:tcPr marL="91440" marR="91440" marT="45720" marB="45720" anchor="ctr">
                     <a:lnL w="9525" cap="flat" cmpd="sng" algn="ctr">
                       <a:solidFill>
-                        <a:srgbClr val="1E3A5F"/>
+                        <a:srgbClr val="D6DEE8"/>
                       </a:solidFill>
                       <a:prstDash val="solid"/>
                       <a:round/>
@@ -14301,7 +14225,7 @@
                     </a:lnL>
                     <a:lnR w="9525" cap="flat" cmpd="sng" algn="ctr">
                       <a:solidFill>
-                        <a:srgbClr val="1E3A5F"/>
+                        <a:srgbClr val="D6DEE8"/>
                       </a:solidFill>
                       <a:prstDash val="solid"/>
                       <a:round/>
@@ -14310,7 +14234,7 @@
                     </a:lnR>
                     <a:lnT w="9525" cap="flat" cmpd="sng" algn="ctr">
                       <a:solidFill>
-                        <a:srgbClr val="1E3A5F"/>
+                        <a:srgbClr val="D6DEE8"/>
                       </a:solidFill>
                       <a:prstDash val="solid"/>
                       <a:round/>
@@ -14319,7 +14243,7 @@
                     </a:lnT>
                     <a:lnB w="9525" cap="flat" cmpd="sng" algn="ctr">
                       <a:solidFill>
-                        <a:srgbClr val="1E3A5F"/>
+                        <a:srgbClr val="D6DEE8"/>
                       </a:solidFill>
                       <a:prstDash val="solid"/>
                       <a:round/>
@@ -14327,7 +14251,7 @@
                       <a:tailEnd type="none" w="med" len="med"/>
                     </a:lnB>
                     <a:solidFill>
-                      <a:srgbClr val="0E2140"/>
+                      <a:srgbClr val="F8FAFC"/>
                     </a:solidFill>
                   </a:tcPr>
                 </a:tc>
@@ -14342,7 +14266,7 @@
                       <a:r>
                         <a:rPr lang="en-US" sz="1050" dirty="0">
                           <a:solidFill>
-                            <a:srgbClr val="CBD5E1"/>
+                            <a:srgbClr val="334155"/>
                           </a:solidFill>
                           <a:latin typeface="Calibri" pitchFamily="34" charset="0"/>
                           <a:ea typeface="Calibri" pitchFamily="34" charset="-122"/>
@@ -14360,7 +14284,7 @@
                   <a:tcPr marL="91440" marR="91440" marT="45720" marB="45720" anchor="ctr">
                     <a:lnL w="9525" cap="flat" cmpd="sng" algn="ctr">
                       <a:solidFill>
-                        <a:srgbClr val="1E3A5F"/>
+                        <a:srgbClr val="D6DEE8"/>
                       </a:solidFill>
                       <a:prstDash val="solid"/>
                       <a:round/>
@@ -14369,7 +14293,7 @@
                     </a:lnL>
                     <a:lnR w="9525" cap="flat" cmpd="sng" algn="ctr">
                       <a:solidFill>
-                        <a:srgbClr val="1E3A5F"/>
+                        <a:srgbClr val="D6DEE8"/>
                       </a:solidFill>
                       <a:prstDash val="solid"/>
                       <a:round/>
@@ -14378,7 +14302,7 @@
                     </a:lnR>
                     <a:lnT w="9525" cap="flat" cmpd="sng" algn="ctr">
                       <a:solidFill>
-                        <a:srgbClr val="1E3A5F"/>
+                        <a:srgbClr val="D6DEE8"/>
                       </a:solidFill>
                       <a:prstDash val="solid"/>
                       <a:round/>
@@ -14387,7 +14311,7 @@
                     </a:lnT>
                     <a:lnB w="9525" cap="flat" cmpd="sng" algn="ctr">
                       <a:solidFill>
-                        <a:srgbClr val="1E3A5F"/>
+                        <a:srgbClr val="D6DEE8"/>
                       </a:solidFill>
                       <a:prstDash val="solid"/>
                       <a:round/>
@@ -14395,7 +14319,7 @@
                       <a:tailEnd type="none" w="med" len="med"/>
                     </a:lnB>
                     <a:solidFill>
-                      <a:srgbClr val="0E2140"/>
+                      <a:srgbClr val="F8FAFC"/>
                     </a:solidFill>
                   </a:tcPr>
                 </a:tc>
@@ -14434,7 +14358,7 @@
             <a:lvl1pPr>
               <a:defRPr sz="900">
                 <a:solidFill>
-                  <a:srgbClr val="94A3B8"/>
+                  <a:srgbClr val="64748B"/>
                 </a:solidFill>
               </a:defRPr>
             </a:lvl1pPr>
@@ -14501,7 +14425,7 @@
             <a:r>
               <a:rPr lang="en-US" sz="1100" b="1" spc="200" kern="0" dirty="0">
                 <a:solidFill>
-                  <a:srgbClr val="38BDF8"/>
+                  <a:srgbClr val="0E7490"/>
                 </a:solidFill>
                 <a:latin typeface="Calibri" pitchFamily="34" charset="0"/>
                 <a:ea typeface="Calibri" pitchFamily="34" charset="-122"/>
@@ -14542,7 +14466,7 @@
             <a:r>
               <a:rPr lang="en-US" sz="3400" b="1" dirty="0">
                 <a:solidFill>
-                  <a:schemeClr val="bg1"/>
+                  <a:schemeClr val="tx1"/>
                 </a:solidFill>
               </a:rPr>
               <a:t>What Makes Medreach </a:t>
@@ -14553,7 +14477,7 @@
             <a:r>
               <a:rPr lang="en-US" sz="3400" b="1" dirty="0">
                 <a:solidFill>
-                  <a:srgbClr val="38BDF8"/>
+                  <a:srgbClr val="0E7490"/>
                 </a:solidFill>
               </a:rPr>
               <a:t>Different</a:t>
@@ -14610,7 +14534,7 @@
                   <a:tcPr marL="91440" marR="91440" marT="45720" marB="45720" anchor="ctr">
                     <a:lnL w="9525" cap="flat" cmpd="sng" algn="ctr">
                       <a:solidFill>
-                        <a:srgbClr val="1E3A5F"/>
+                        <a:srgbClr val="D6DEE8"/>
                       </a:solidFill>
                       <a:prstDash val="solid"/>
                       <a:round/>
@@ -14619,7 +14543,7 @@
                     </a:lnL>
                     <a:lnR w="9525" cap="flat" cmpd="sng" algn="ctr">
                       <a:solidFill>
-                        <a:srgbClr val="1E3A5F"/>
+                        <a:srgbClr val="D6DEE8"/>
                       </a:solidFill>
                       <a:prstDash val="solid"/>
                       <a:round/>
@@ -14628,7 +14552,7 @@
                     </a:lnR>
                     <a:lnT w="9525" cap="flat" cmpd="sng" algn="ctr">
                       <a:solidFill>
-                        <a:srgbClr val="1E3A5F"/>
+                        <a:srgbClr val="D6DEE8"/>
                       </a:solidFill>
                       <a:prstDash val="solid"/>
                       <a:round/>
@@ -14637,7 +14561,7 @@
                     </a:lnT>
                     <a:lnB w="9525" cap="flat" cmpd="sng" algn="ctr">
                       <a:solidFill>
-                        <a:srgbClr val="1E3A5F"/>
+                        <a:srgbClr val="D6DEE8"/>
                       </a:solidFill>
                       <a:prstDash val="solid"/>
                       <a:round/>
@@ -14645,7 +14569,7 @@
                       <a:tailEnd type="none" w="med" len="med"/>
                     </a:lnB>
                     <a:solidFill>
-                      <a:srgbClr val="12304A"/>
+                      <a:srgbClr val="E0F2FE"/>
                     </a:solidFill>
                   </a:tcPr>
                 </a:tc>
@@ -14660,7 +14584,7 @@
                       <a:r>
                         <a:rPr lang="en-US" sz="1100" b="1" dirty="0">
                           <a:solidFill>
-                            <a:srgbClr val="38BDF8"/>
+                            <a:srgbClr val="0E7490"/>
                           </a:solidFill>
                           <a:latin typeface="Calibri" pitchFamily="34" charset="0"/>
                           <a:ea typeface="Calibri" pitchFamily="34" charset="-122"/>
@@ -14678,7 +14602,7 @@
                   <a:tcPr marL="91440" marR="91440" marT="45720" marB="45720" anchor="ctr">
                     <a:lnL w="9525" cap="flat" cmpd="sng" algn="ctr">
                       <a:solidFill>
-                        <a:srgbClr val="1E3A5F"/>
+                        <a:srgbClr val="D6DEE8"/>
                       </a:solidFill>
                       <a:prstDash val="solid"/>
                       <a:round/>
@@ -14687,7 +14611,7 @@
                     </a:lnL>
                     <a:lnR w="9525" cap="flat" cmpd="sng" algn="ctr">
                       <a:solidFill>
-                        <a:srgbClr val="1E3A5F"/>
+                        <a:srgbClr val="D6DEE8"/>
                       </a:solidFill>
                       <a:prstDash val="solid"/>
                       <a:round/>
@@ -14696,7 +14620,7 @@
                     </a:lnR>
                     <a:lnT w="9525" cap="flat" cmpd="sng" algn="ctr">
                       <a:solidFill>
-                        <a:srgbClr val="1E3A5F"/>
+                        <a:srgbClr val="D6DEE8"/>
                       </a:solidFill>
                       <a:prstDash val="solid"/>
                       <a:round/>
@@ -14705,7 +14629,7 @@
                     </a:lnT>
                     <a:lnB w="9525" cap="flat" cmpd="sng" algn="ctr">
                       <a:solidFill>
-                        <a:srgbClr val="1E3A5F"/>
+                        <a:srgbClr val="D6DEE8"/>
                       </a:solidFill>
                       <a:prstDash val="solid"/>
                       <a:round/>
@@ -14713,7 +14637,7 @@
                       <a:tailEnd type="none" w="med" len="med"/>
                     </a:lnB>
                     <a:solidFill>
-                      <a:srgbClr val="12304A"/>
+                      <a:srgbClr val="E0F2FE"/>
                     </a:solidFill>
                   </a:tcPr>
                 </a:tc>
@@ -14728,7 +14652,7 @@
                       <a:r>
                         <a:rPr lang="en-US" sz="1100" b="1" dirty="0">
                           <a:solidFill>
-                            <a:srgbClr val="38BDF8"/>
+                            <a:srgbClr val="0E7490"/>
                           </a:solidFill>
                           <a:latin typeface="Calibri" pitchFamily="34" charset="0"/>
                           <a:ea typeface="Calibri" pitchFamily="34" charset="-122"/>
@@ -14746,7 +14670,7 @@
                   <a:tcPr marL="91440" marR="91440" marT="45720" marB="45720" anchor="ctr">
                     <a:lnL w="9525" cap="flat" cmpd="sng" algn="ctr">
                       <a:solidFill>
-                        <a:srgbClr val="1E3A5F"/>
+                        <a:srgbClr val="D6DEE8"/>
                       </a:solidFill>
                       <a:prstDash val="solid"/>
                       <a:round/>
@@ -14755,7 +14679,7 @@
                     </a:lnL>
                     <a:lnR w="9525" cap="flat" cmpd="sng" algn="ctr">
                       <a:solidFill>
-                        <a:srgbClr val="1E3A5F"/>
+                        <a:srgbClr val="D6DEE8"/>
                       </a:solidFill>
                       <a:prstDash val="solid"/>
                       <a:round/>
@@ -14764,7 +14688,7 @@
                     </a:lnR>
                     <a:lnT w="9525" cap="flat" cmpd="sng" algn="ctr">
                       <a:solidFill>
-                        <a:srgbClr val="1E3A5F"/>
+                        <a:srgbClr val="D6DEE8"/>
                       </a:solidFill>
                       <a:prstDash val="solid"/>
                       <a:round/>
@@ -14773,7 +14697,7 @@
                     </a:lnT>
                     <a:lnB w="9525" cap="flat" cmpd="sng" algn="ctr">
                       <a:solidFill>
-                        <a:srgbClr val="1E3A5F"/>
+                        <a:srgbClr val="D6DEE8"/>
                       </a:solidFill>
                       <a:prstDash val="solid"/>
                       <a:round/>
@@ -14781,7 +14705,7 @@
                       <a:tailEnd type="none" w="med" len="med"/>
                     </a:lnB>
                     <a:solidFill>
-                      <a:srgbClr val="12304A"/>
+                      <a:srgbClr val="E0F2FE"/>
                     </a:solidFill>
                   </a:tcPr>
                 </a:tc>
@@ -14796,7 +14720,7 @@
                       <a:r>
                         <a:rPr lang="en-US" sz="1100" b="1" dirty="0">
                           <a:solidFill>
-                            <a:srgbClr val="38BDF8"/>
+                            <a:srgbClr val="0E7490"/>
                           </a:solidFill>
                           <a:latin typeface="Calibri" pitchFamily="34" charset="0"/>
                           <a:ea typeface="Calibri" pitchFamily="34" charset="-122"/>
@@ -14814,7 +14738,7 @@
                   <a:tcPr marL="91440" marR="91440" marT="45720" marB="45720" anchor="ctr">
                     <a:lnL w="9525" cap="flat" cmpd="sng" algn="ctr">
                       <a:solidFill>
-                        <a:srgbClr val="1E3A5F"/>
+                        <a:srgbClr val="D6DEE8"/>
                       </a:solidFill>
                       <a:prstDash val="solid"/>
                       <a:round/>
@@ -14823,7 +14747,7 @@
                     </a:lnL>
                     <a:lnR w="9525" cap="flat" cmpd="sng" algn="ctr">
                       <a:solidFill>
-                        <a:srgbClr val="1E3A5F"/>
+                        <a:srgbClr val="D6DEE8"/>
                       </a:solidFill>
                       <a:prstDash val="solid"/>
                       <a:round/>
@@ -14832,7 +14756,7 @@
                     </a:lnR>
                     <a:lnT w="9525" cap="flat" cmpd="sng" algn="ctr">
                       <a:solidFill>
-                        <a:srgbClr val="1E3A5F"/>
+                        <a:srgbClr val="D6DEE8"/>
                       </a:solidFill>
                       <a:prstDash val="solid"/>
                       <a:round/>
@@ -14841,7 +14765,7 @@
                     </a:lnT>
                     <a:lnB w="9525" cap="flat" cmpd="sng" algn="ctr">
                       <a:solidFill>
-                        <a:srgbClr val="1E3A5F"/>
+                        <a:srgbClr val="D6DEE8"/>
                       </a:solidFill>
                       <a:prstDash val="solid"/>
                       <a:round/>
@@ -14849,7 +14773,7 @@
                       <a:tailEnd type="none" w="med" len="med"/>
                     </a:lnB>
                     <a:solidFill>
-                      <a:srgbClr val="12304A"/>
+                      <a:srgbClr val="E0F2FE"/>
                     </a:solidFill>
                   </a:tcPr>
                 </a:tc>
@@ -14864,7 +14788,7 @@
                       <a:r>
                         <a:rPr lang="en-US" sz="1100" b="1" dirty="0">
                           <a:solidFill>
-                            <a:srgbClr val="38BDF8"/>
+                            <a:srgbClr val="0E7490"/>
                           </a:solidFill>
                           <a:latin typeface="Calibri" pitchFamily="34" charset="0"/>
                           <a:ea typeface="Calibri" pitchFamily="34" charset="-122"/>
@@ -14882,7 +14806,7 @@
                   <a:tcPr marL="91440" marR="91440" marT="45720" marB="45720" anchor="ctr">
                     <a:lnL w="9525" cap="flat" cmpd="sng" algn="ctr">
                       <a:solidFill>
-                        <a:srgbClr val="1E3A5F"/>
+                        <a:srgbClr val="D6DEE8"/>
                       </a:solidFill>
                       <a:prstDash val="solid"/>
                       <a:round/>
@@ -14891,7 +14815,7 @@
                     </a:lnL>
                     <a:lnR w="9525" cap="flat" cmpd="sng" algn="ctr">
                       <a:solidFill>
-                        <a:srgbClr val="1E3A5F"/>
+                        <a:srgbClr val="D6DEE8"/>
                       </a:solidFill>
                       <a:prstDash val="solid"/>
                       <a:round/>
@@ -14900,7 +14824,7 @@
                     </a:lnR>
                     <a:lnT w="9525" cap="flat" cmpd="sng" algn="ctr">
                       <a:solidFill>
-                        <a:srgbClr val="1E3A5F"/>
+                        <a:srgbClr val="D6DEE8"/>
                       </a:solidFill>
                       <a:prstDash val="solid"/>
                       <a:round/>
@@ -14909,7 +14833,7 @@
                     </a:lnT>
                     <a:lnB w="9525" cap="flat" cmpd="sng" algn="ctr">
                       <a:solidFill>
-                        <a:srgbClr val="1E3A5F"/>
+                        <a:srgbClr val="D6DEE8"/>
                       </a:solidFill>
                       <a:prstDash val="solid"/>
                       <a:round/>
@@ -14917,7 +14841,7 @@
                       <a:tailEnd type="none" w="med" len="med"/>
                     </a:lnB>
                     <a:solidFill>
-                      <a:srgbClr val="12304A"/>
+                      <a:srgbClr val="E0F2FE"/>
                     </a:solidFill>
                   </a:tcPr>
                 </a:tc>
@@ -14934,7 +14858,7 @@
                       <a:r>
                         <a:rPr lang="en-US" sz="1100" dirty="0">
                           <a:solidFill>
-                            <a:srgbClr val="CBD5E1"/>
+                            <a:srgbClr val="334155"/>
                           </a:solidFill>
                           <a:latin typeface="Calibri" pitchFamily="34" charset="0"/>
                           <a:ea typeface="Calibri" pitchFamily="34" charset="-122"/>
@@ -14952,7 +14876,7 @@
                   <a:tcPr marL="91440" marR="91440" marT="45720" marB="45720" anchor="ctr">
                     <a:lnL w="9525" cap="flat" cmpd="sng" algn="ctr">
                       <a:solidFill>
-                        <a:srgbClr val="1E3A5F"/>
+                        <a:srgbClr val="D6DEE8"/>
                       </a:solidFill>
                       <a:prstDash val="solid"/>
                       <a:round/>
@@ -14961,7 +14885,7 @@
                     </a:lnL>
                     <a:lnR w="9525" cap="flat" cmpd="sng" algn="ctr">
                       <a:solidFill>
-                        <a:srgbClr val="1E3A5F"/>
+                        <a:srgbClr val="D6DEE8"/>
                       </a:solidFill>
                       <a:prstDash val="solid"/>
                       <a:round/>
@@ -14970,7 +14894,7 @@
                     </a:lnR>
                     <a:lnT w="9525" cap="flat" cmpd="sng" algn="ctr">
                       <a:solidFill>
-                        <a:srgbClr val="1E3A5F"/>
+                        <a:srgbClr val="D6DEE8"/>
                       </a:solidFill>
                       <a:prstDash val="solid"/>
                       <a:round/>
@@ -14979,7 +14903,7 @@
                     </a:lnT>
                     <a:lnB w="9525" cap="flat" cmpd="sng" algn="ctr">
                       <a:solidFill>
-                        <a:srgbClr val="1E3A5F"/>
+                        <a:srgbClr val="D6DEE8"/>
                       </a:solidFill>
                       <a:prstDash val="solid"/>
                       <a:round/>
@@ -14987,7 +14911,7 @@
                       <a:tailEnd type="none" w="med" len="med"/>
                     </a:lnB>
                     <a:solidFill>
-                      <a:srgbClr val="0B1A33"/>
+                      <a:srgbClr val="FFFFFF"/>
                     </a:solidFill>
                   </a:tcPr>
                 </a:tc>
@@ -15002,7 +14926,7 @@
                       <a:r>
                         <a:rPr lang="en-US" sz="1100" dirty="0">
                           <a:solidFill>
-                            <a:srgbClr val="F87171"/>
+                            <a:srgbClr val="DC2626"/>
                           </a:solidFill>
                           <a:latin typeface="Calibri" pitchFamily="34" charset="0"/>
                           <a:ea typeface="Calibri" pitchFamily="34" charset="-122"/>
@@ -15020,7 +14944,7 @@
                   <a:tcPr marL="91440" marR="91440" marT="45720" marB="45720" anchor="ctr">
                     <a:lnL w="9525" cap="flat" cmpd="sng" algn="ctr">
                       <a:solidFill>
-                        <a:srgbClr val="1E3A5F"/>
+                        <a:srgbClr val="D6DEE8"/>
                       </a:solidFill>
                       <a:prstDash val="solid"/>
                       <a:round/>
@@ -15029,7 +14953,7 @@
                     </a:lnL>
                     <a:lnR w="9525" cap="flat" cmpd="sng" algn="ctr">
                       <a:solidFill>
-                        <a:srgbClr val="1E3A5F"/>
+                        <a:srgbClr val="D6DEE8"/>
                       </a:solidFill>
                       <a:prstDash val="solid"/>
                       <a:round/>
@@ -15038,7 +14962,7 @@
                     </a:lnR>
                     <a:lnT w="9525" cap="flat" cmpd="sng" algn="ctr">
                       <a:solidFill>
-                        <a:srgbClr val="1E3A5F"/>
+                        <a:srgbClr val="D6DEE8"/>
                       </a:solidFill>
                       <a:prstDash val="solid"/>
                       <a:round/>
@@ -15047,7 +14971,7 @@
                     </a:lnT>
                     <a:lnB w="9525" cap="flat" cmpd="sng" algn="ctr">
                       <a:solidFill>
-                        <a:srgbClr val="1E3A5F"/>
+                        <a:srgbClr val="D6DEE8"/>
                       </a:solidFill>
                       <a:prstDash val="solid"/>
                       <a:round/>
@@ -15055,7 +14979,7 @@
                       <a:tailEnd type="none" w="med" len="med"/>
                     </a:lnB>
                     <a:solidFill>
-                      <a:srgbClr val="0B1A33"/>
+                      <a:srgbClr val="FFFFFF"/>
                     </a:solidFill>
                   </a:tcPr>
                 </a:tc>
@@ -15070,7 +14994,7 @@
                       <a:r>
                         <a:rPr lang="en-US" sz="1100" dirty="0">
                           <a:solidFill>
-                            <a:srgbClr val="F87171"/>
+                            <a:srgbClr val="DC2626"/>
                           </a:solidFill>
                           <a:latin typeface="Calibri" pitchFamily="34" charset="0"/>
                           <a:ea typeface="Calibri" pitchFamily="34" charset="-122"/>
@@ -15088,7 +15012,7 @@
                   <a:tcPr marL="91440" marR="91440" marT="45720" marB="45720" anchor="ctr">
                     <a:lnL w="9525" cap="flat" cmpd="sng" algn="ctr">
                       <a:solidFill>
-                        <a:srgbClr val="1E3A5F"/>
+                        <a:srgbClr val="D6DEE8"/>
                       </a:solidFill>
                       <a:prstDash val="solid"/>
                       <a:round/>
@@ -15097,7 +15021,7 @@
                     </a:lnL>
                     <a:lnR w="9525" cap="flat" cmpd="sng" algn="ctr">
                       <a:solidFill>
-                        <a:srgbClr val="1E3A5F"/>
+                        <a:srgbClr val="D6DEE8"/>
                       </a:solidFill>
                       <a:prstDash val="solid"/>
                       <a:round/>
@@ -15106,7 +15030,7 @@
                     </a:lnR>
                     <a:lnT w="9525" cap="flat" cmpd="sng" algn="ctr">
                       <a:solidFill>
-                        <a:srgbClr val="1E3A5F"/>
+                        <a:srgbClr val="D6DEE8"/>
                       </a:solidFill>
                       <a:prstDash val="solid"/>
                       <a:round/>
@@ -15115,7 +15039,7 @@
                     </a:lnT>
                     <a:lnB w="9525" cap="flat" cmpd="sng" algn="ctr">
                       <a:solidFill>
-                        <a:srgbClr val="1E3A5F"/>
+                        <a:srgbClr val="D6DEE8"/>
                       </a:solidFill>
                       <a:prstDash val="solid"/>
                       <a:round/>
@@ -15123,7 +15047,7 @@
                       <a:tailEnd type="none" w="med" len="med"/>
                     </a:lnB>
                     <a:solidFill>
-                      <a:srgbClr val="0B1A33"/>
+                      <a:srgbClr val="FFFFFF"/>
                     </a:solidFill>
                   </a:tcPr>
                 </a:tc>
@@ -15138,7 +15062,7 @@
                       <a:r>
                         <a:rPr lang="en-US" sz="1100" dirty="0">
                           <a:solidFill>
-                            <a:srgbClr val="CBD5E1"/>
+                            <a:srgbClr val="334155"/>
                           </a:solidFill>
                           <a:latin typeface="Calibri" pitchFamily="34" charset="0"/>
                           <a:ea typeface="Calibri" pitchFamily="34" charset="-122"/>
@@ -15156,7 +15080,7 @@
                   <a:tcPr marL="91440" marR="91440" marT="45720" marB="45720" anchor="ctr">
                     <a:lnL w="9525" cap="flat" cmpd="sng" algn="ctr">
                       <a:solidFill>
-                        <a:srgbClr val="1E3A5F"/>
+                        <a:srgbClr val="D6DEE8"/>
                       </a:solidFill>
                       <a:prstDash val="solid"/>
                       <a:round/>
@@ -15165,7 +15089,7 @@
                     </a:lnL>
                     <a:lnR w="9525" cap="flat" cmpd="sng" algn="ctr">
                       <a:solidFill>
-                        <a:srgbClr val="1E3A5F"/>
+                        <a:srgbClr val="D6DEE8"/>
                       </a:solidFill>
                       <a:prstDash val="solid"/>
                       <a:round/>
@@ -15174,7 +15098,7 @@
                     </a:lnR>
                     <a:lnT w="9525" cap="flat" cmpd="sng" algn="ctr">
                       <a:solidFill>
-                        <a:srgbClr val="1E3A5F"/>
+                        <a:srgbClr val="D6DEE8"/>
                       </a:solidFill>
                       <a:prstDash val="solid"/>
                       <a:round/>
@@ -15183,7 +15107,7 @@
                     </a:lnT>
                     <a:lnB w="9525" cap="flat" cmpd="sng" algn="ctr">
                       <a:solidFill>
-                        <a:srgbClr val="1E3A5F"/>
+                        <a:srgbClr val="D6DEE8"/>
                       </a:solidFill>
                       <a:prstDash val="solid"/>
                       <a:round/>
@@ -15191,7 +15115,7 @@
                       <a:tailEnd type="none" w="med" len="med"/>
                     </a:lnB>
                     <a:solidFill>
-                      <a:srgbClr val="0B1A33"/>
+                      <a:srgbClr val="FFFFFF"/>
                     </a:solidFill>
                   </a:tcPr>
                 </a:tc>
@@ -15206,7 +15130,7 @@
                       <a:r>
                         <a:rPr lang="en-US" sz="1100" b="1" dirty="0">
                           <a:solidFill>
-                            <a:srgbClr val="34D399"/>
+                            <a:srgbClr val="059669"/>
                           </a:solidFill>
                           <a:latin typeface="Calibri" pitchFamily="34" charset="0"/>
                           <a:ea typeface="Calibri" pitchFamily="34" charset="-122"/>
@@ -15224,7 +15148,7 @@
                   <a:tcPr marL="91440" marR="91440" marT="45720" marB="45720" anchor="ctr">
                     <a:lnL w="9525" cap="flat" cmpd="sng" algn="ctr">
                       <a:solidFill>
-                        <a:srgbClr val="1E3A5F"/>
+                        <a:srgbClr val="D6DEE8"/>
                       </a:solidFill>
                       <a:prstDash val="solid"/>
                       <a:round/>
@@ -15233,7 +15157,7 @@
                     </a:lnL>
                     <a:lnR w="9525" cap="flat" cmpd="sng" algn="ctr">
                       <a:solidFill>
-                        <a:srgbClr val="1E3A5F"/>
+                        <a:srgbClr val="D6DEE8"/>
                       </a:solidFill>
                       <a:prstDash val="solid"/>
                       <a:round/>
@@ -15242,7 +15166,7 @@
                     </a:lnR>
                     <a:lnT w="9525" cap="flat" cmpd="sng" algn="ctr">
                       <a:solidFill>
-                        <a:srgbClr val="1E3A5F"/>
+                        <a:srgbClr val="D6DEE8"/>
                       </a:solidFill>
                       <a:prstDash val="solid"/>
                       <a:round/>
@@ -15251,7 +15175,7 @@
                     </a:lnT>
                     <a:lnB w="9525" cap="flat" cmpd="sng" algn="ctr">
                       <a:solidFill>
-                        <a:srgbClr val="1E3A5F"/>
+                        <a:srgbClr val="D6DEE8"/>
                       </a:solidFill>
                       <a:prstDash val="solid"/>
                       <a:round/>
@@ -15259,7 +15183,7 @@
                       <a:tailEnd type="none" w="med" len="med"/>
                     </a:lnB>
                     <a:solidFill>
-                      <a:srgbClr val="0B1A33"/>
+                      <a:srgbClr val="FFFFFF"/>
                     </a:solidFill>
                   </a:tcPr>
                 </a:tc>
@@ -15276,7 +15200,7 @@
                       <a:r>
                         <a:rPr lang="en-US" sz="1100" dirty="0">
                           <a:solidFill>
-                            <a:srgbClr val="CBD5E1"/>
+                            <a:srgbClr val="334155"/>
                           </a:solidFill>
                           <a:latin typeface="Calibri" pitchFamily="34" charset="0"/>
                           <a:ea typeface="Calibri" pitchFamily="34" charset="-122"/>
@@ -15294,7 +15218,7 @@
                   <a:tcPr marL="91440" marR="91440" marT="45720" marB="45720" anchor="ctr">
                     <a:lnL w="9525" cap="flat" cmpd="sng" algn="ctr">
                       <a:solidFill>
-                        <a:srgbClr val="1E3A5F"/>
+                        <a:srgbClr val="D6DEE8"/>
                       </a:solidFill>
                       <a:prstDash val="solid"/>
                       <a:round/>
@@ -15303,7 +15227,7 @@
                     </a:lnL>
                     <a:lnR w="9525" cap="flat" cmpd="sng" algn="ctr">
                       <a:solidFill>
-                        <a:srgbClr val="1E3A5F"/>
+                        <a:srgbClr val="D6DEE8"/>
                       </a:solidFill>
                       <a:prstDash val="solid"/>
                       <a:round/>
@@ -15312,7 +15236,7 @@
                     </a:lnR>
                     <a:lnT w="9525" cap="flat" cmpd="sng" algn="ctr">
                       <a:solidFill>
-                        <a:srgbClr val="1E3A5F"/>
+                        <a:srgbClr val="D6DEE8"/>
                       </a:solidFill>
                       <a:prstDash val="solid"/>
                       <a:round/>
@@ -15321,7 +15245,7 @@
                     </a:lnT>
                     <a:lnB w="9525" cap="flat" cmpd="sng" algn="ctr">
                       <a:solidFill>
-                        <a:srgbClr val="1E3A5F"/>
+                        <a:srgbClr val="D6DEE8"/>
                       </a:solidFill>
                       <a:prstDash val="solid"/>
                       <a:round/>
@@ -15329,7 +15253,7 @@
                       <a:tailEnd type="none" w="med" len="med"/>
                     </a:lnB>
                     <a:solidFill>
-                      <a:srgbClr val="0E2140"/>
+                      <a:srgbClr val="F8FAFC"/>
                     </a:solidFill>
                   </a:tcPr>
                 </a:tc>
@@ -15344,7 +15268,7 @@
                       <a:r>
                         <a:rPr lang="en-US" sz="1100" dirty="0">
                           <a:solidFill>
-                            <a:srgbClr val="F87171"/>
+                            <a:srgbClr val="DC2626"/>
                           </a:solidFill>
                           <a:latin typeface="Calibri" pitchFamily="34" charset="0"/>
                           <a:ea typeface="Calibri" pitchFamily="34" charset="-122"/>
@@ -15362,7 +15286,7 @@
                   <a:tcPr marL="91440" marR="91440" marT="45720" marB="45720" anchor="ctr">
                     <a:lnL w="9525" cap="flat" cmpd="sng" algn="ctr">
                       <a:solidFill>
-                        <a:srgbClr val="1E3A5F"/>
+                        <a:srgbClr val="D6DEE8"/>
                       </a:solidFill>
                       <a:prstDash val="solid"/>
                       <a:round/>
@@ -15371,7 +15295,7 @@
                     </a:lnL>
                     <a:lnR w="9525" cap="flat" cmpd="sng" algn="ctr">
                       <a:solidFill>
-                        <a:srgbClr val="1E3A5F"/>
+                        <a:srgbClr val="D6DEE8"/>
                       </a:solidFill>
                       <a:prstDash val="solid"/>
                       <a:round/>
@@ -15380,7 +15304,7 @@
                     </a:lnR>
                     <a:lnT w="9525" cap="flat" cmpd="sng" algn="ctr">
                       <a:solidFill>
-                        <a:srgbClr val="1E3A5F"/>
+                        <a:srgbClr val="D6DEE8"/>
                       </a:solidFill>
                       <a:prstDash val="solid"/>
                       <a:round/>
@@ -15389,7 +15313,7 @@
                     </a:lnT>
                     <a:lnB w="9525" cap="flat" cmpd="sng" algn="ctr">
                       <a:solidFill>
-                        <a:srgbClr val="1E3A5F"/>
+                        <a:srgbClr val="D6DEE8"/>
                       </a:solidFill>
                       <a:prstDash val="solid"/>
                       <a:round/>
@@ -15397,7 +15321,7 @@
                       <a:tailEnd type="none" w="med" len="med"/>
                     </a:lnB>
                     <a:solidFill>
-                      <a:srgbClr val="0E2140"/>
+                      <a:srgbClr val="F8FAFC"/>
                     </a:solidFill>
                   </a:tcPr>
                 </a:tc>
@@ -15412,7 +15336,7 @@
                       <a:r>
                         <a:rPr lang="en-US" sz="1100" dirty="0">
                           <a:solidFill>
-                            <a:srgbClr val="CBD5E1"/>
+                            <a:srgbClr val="334155"/>
                           </a:solidFill>
                           <a:latin typeface="Calibri" pitchFamily="34" charset="0"/>
                           <a:ea typeface="Calibri" pitchFamily="34" charset="-122"/>
@@ -15430,7 +15354,7 @@
                   <a:tcPr marL="91440" marR="91440" marT="45720" marB="45720" anchor="ctr">
                     <a:lnL w="9525" cap="flat" cmpd="sng" algn="ctr">
                       <a:solidFill>
-                        <a:srgbClr val="1E3A5F"/>
+                        <a:srgbClr val="D6DEE8"/>
                       </a:solidFill>
                       <a:prstDash val="solid"/>
                       <a:round/>
@@ -15439,7 +15363,7 @@
                     </a:lnL>
                     <a:lnR w="9525" cap="flat" cmpd="sng" algn="ctr">
                       <a:solidFill>
-                        <a:srgbClr val="1E3A5F"/>
+                        <a:srgbClr val="D6DEE8"/>
                       </a:solidFill>
                       <a:prstDash val="solid"/>
                       <a:round/>
@@ -15448,7 +15372,7 @@
                     </a:lnR>
                     <a:lnT w="9525" cap="flat" cmpd="sng" algn="ctr">
                       <a:solidFill>
-                        <a:srgbClr val="1E3A5F"/>
+                        <a:srgbClr val="D6DEE8"/>
                       </a:solidFill>
                       <a:prstDash val="solid"/>
                       <a:round/>
@@ -15457,7 +15381,7 @@
                     </a:lnT>
                     <a:lnB w="9525" cap="flat" cmpd="sng" algn="ctr">
                       <a:solidFill>
-                        <a:srgbClr val="1E3A5F"/>
+                        <a:srgbClr val="D6DEE8"/>
                       </a:solidFill>
                       <a:prstDash val="solid"/>
                       <a:round/>
@@ -15465,7 +15389,7 @@
                       <a:tailEnd type="none" w="med" len="med"/>
                     </a:lnB>
                     <a:solidFill>
-                      <a:srgbClr val="0E2140"/>
+                      <a:srgbClr val="F8FAFC"/>
                     </a:solidFill>
                   </a:tcPr>
                 </a:tc>
@@ -15480,7 +15404,7 @@
                       <a:r>
                         <a:rPr lang="en-US" sz="1100" dirty="0">
                           <a:solidFill>
-                            <a:srgbClr val="CBD5E1"/>
+                            <a:srgbClr val="334155"/>
                           </a:solidFill>
                           <a:latin typeface="Calibri" pitchFamily="34" charset="0"/>
                           <a:ea typeface="Calibri" pitchFamily="34" charset="-122"/>
@@ -15498,7 +15422,7 @@
                   <a:tcPr marL="91440" marR="91440" marT="45720" marB="45720" anchor="ctr">
                     <a:lnL w="9525" cap="flat" cmpd="sng" algn="ctr">
                       <a:solidFill>
-                        <a:srgbClr val="1E3A5F"/>
+                        <a:srgbClr val="D6DEE8"/>
                       </a:solidFill>
                       <a:prstDash val="solid"/>
                       <a:round/>
@@ -15507,7 +15431,7 @@
                     </a:lnL>
                     <a:lnR w="9525" cap="flat" cmpd="sng" algn="ctr">
                       <a:solidFill>
-                        <a:srgbClr val="1E3A5F"/>
+                        <a:srgbClr val="D6DEE8"/>
                       </a:solidFill>
                       <a:prstDash val="solid"/>
                       <a:round/>
@@ -15516,7 +15440,7 @@
                     </a:lnR>
                     <a:lnT w="9525" cap="flat" cmpd="sng" algn="ctr">
                       <a:solidFill>
-                        <a:srgbClr val="1E3A5F"/>
+                        <a:srgbClr val="D6DEE8"/>
                       </a:solidFill>
                       <a:prstDash val="solid"/>
                       <a:round/>
@@ -15525,7 +15449,7 @@
                     </a:lnT>
                     <a:lnB w="9525" cap="flat" cmpd="sng" algn="ctr">
                       <a:solidFill>
-                        <a:srgbClr val="1E3A5F"/>
+                        <a:srgbClr val="D6DEE8"/>
                       </a:solidFill>
                       <a:prstDash val="solid"/>
                       <a:round/>
@@ -15533,7 +15457,7 @@
                       <a:tailEnd type="none" w="med" len="med"/>
                     </a:lnB>
                     <a:solidFill>
-                      <a:srgbClr val="0E2140"/>
+                      <a:srgbClr val="F8FAFC"/>
                     </a:solidFill>
                   </a:tcPr>
                 </a:tc>
@@ -15548,7 +15472,7 @@
                       <a:r>
                         <a:rPr lang="en-US" sz="1100" b="1" dirty="0">
                           <a:solidFill>
-                            <a:srgbClr val="34D399"/>
+                            <a:srgbClr val="059669"/>
                           </a:solidFill>
                           <a:latin typeface="Calibri" pitchFamily="34" charset="0"/>
                           <a:ea typeface="Calibri" pitchFamily="34" charset="-122"/>
@@ -15566,7 +15490,7 @@
                   <a:tcPr marL="91440" marR="91440" marT="45720" marB="45720" anchor="ctr">
                     <a:lnL w="9525" cap="flat" cmpd="sng" algn="ctr">
                       <a:solidFill>
-                        <a:srgbClr val="1E3A5F"/>
+                        <a:srgbClr val="D6DEE8"/>
                       </a:solidFill>
                       <a:prstDash val="solid"/>
                       <a:round/>
@@ -15575,7 +15499,7 @@
                     </a:lnL>
                     <a:lnR w="9525" cap="flat" cmpd="sng" algn="ctr">
                       <a:solidFill>
-                        <a:srgbClr val="1E3A5F"/>
+                        <a:srgbClr val="D6DEE8"/>
                       </a:solidFill>
                       <a:prstDash val="solid"/>
                       <a:round/>
@@ -15584,7 +15508,7 @@
                     </a:lnR>
                     <a:lnT w="9525" cap="flat" cmpd="sng" algn="ctr">
                       <a:solidFill>
-                        <a:srgbClr val="1E3A5F"/>
+                        <a:srgbClr val="D6DEE8"/>
                       </a:solidFill>
                       <a:prstDash val="solid"/>
                       <a:round/>
@@ -15593,7 +15517,7 @@
                     </a:lnT>
                     <a:lnB w="9525" cap="flat" cmpd="sng" algn="ctr">
                       <a:solidFill>
-                        <a:srgbClr val="1E3A5F"/>
+                        <a:srgbClr val="D6DEE8"/>
                       </a:solidFill>
                       <a:prstDash val="solid"/>
                       <a:round/>
@@ -15601,7 +15525,7 @@
                       <a:tailEnd type="none" w="med" len="med"/>
                     </a:lnB>
                     <a:solidFill>
-                      <a:srgbClr val="0E2140"/>
+                      <a:srgbClr val="F8FAFC"/>
                     </a:solidFill>
                   </a:tcPr>
                 </a:tc>
@@ -15618,7 +15542,7 @@
                       <a:r>
                         <a:rPr lang="en-US" sz="1100" dirty="0">
                           <a:solidFill>
-                            <a:srgbClr val="CBD5E1"/>
+                            <a:srgbClr val="334155"/>
                           </a:solidFill>
                           <a:latin typeface="Calibri" pitchFamily="34" charset="0"/>
                           <a:ea typeface="Calibri" pitchFamily="34" charset="-122"/>
@@ -15636,7 +15560,7 @@
                   <a:tcPr marL="91440" marR="91440" marT="45720" marB="45720" anchor="ctr">
                     <a:lnL w="9525" cap="flat" cmpd="sng" algn="ctr">
                       <a:solidFill>
-                        <a:srgbClr val="1E3A5F"/>
+                        <a:srgbClr val="D6DEE8"/>
                       </a:solidFill>
                       <a:prstDash val="solid"/>
                       <a:round/>
@@ -15645,7 +15569,7 @@
                     </a:lnL>
                     <a:lnR w="9525" cap="flat" cmpd="sng" algn="ctr">
                       <a:solidFill>
-                        <a:srgbClr val="1E3A5F"/>
+                        <a:srgbClr val="D6DEE8"/>
                       </a:solidFill>
                       <a:prstDash val="solid"/>
                       <a:round/>
@@ -15654,7 +15578,7 @@
                     </a:lnR>
                     <a:lnT w="9525" cap="flat" cmpd="sng" algn="ctr">
                       <a:solidFill>
-                        <a:srgbClr val="1E3A5F"/>
+                        <a:srgbClr val="D6DEE8"/>
                       </a:solidFill>
                       <a:prstDash val="solid"/>
                       <a:round/>
@@ -15663,7 +15587,7 @@
                     </a:lnT>
                     <a:lnB w="9525" cap="flat" cmpd="sng" algn="ctr">
                       <a:solidFill>
-                        <a:srgbClr val="1E3A5F"/>
+                        <a:srgbClr val="D6DEE8"/>
                       </a:solidFill>
                       <a:prstDash val="solid"/>
                       <a:round/>
@@ -15671,7 +15595,7 @@
                       <a:tailEnd type="none" w="med" len="med"/>
                     </a:lnB>
                     <a:solidFill>
-                      <a:srgbClr val="0B1A33"/>
+                      <a:srgbClr val="FFFFFF"/>
                     </a:solidFill>
                   </a:tcPr>
                 </a:tc>
@@ -15686,7 +15610,7 @@
                       <a:r>
                         <a:rPr lang="en-US" sz="1100" dirty="0">
                           <a:solidFill>
-                            <a:srgbClr val="F87171"/>
+                            <a:srgbClr val="DC2626"/>
                           </a:solidFill>
                           <a:latin typeface="Calibri" pitchFamily="34" charset="0"/>
                           <a:ea typeface="Calibri" pitchFamily="34" charset="-122"/>
@@ -15704,7 +15628,7 @@
                   <a:tcPr marL="91440" marR="91440" marT="45720" marB="45720" anchor="ctr">
                     <a:lnL w="9525" cap="flat" cmpd="sng" algn="ctr">
                       <a:solidFill>
-                        <a:srgbClr val="1E3A5F"/>
+                        <a:srgbClr val="D6DEE8"/>
                       </a:solidFill>
                       <a:prstDash val="solid"/>
                       <a:round/>
@@ -15713,7 +15637,7 @@
                     </a:lnL>
                     <a:lnR w="9525" cap="flat" cmpd="sng" algn="ctr">
                       <a:solidFill>
-                        <a:srgbClr val="1E3A5F"/>
+                        <a:srgbClr val="D6DEE8"/>
                       </a:solidFill>
                       <a:prstDash val="solid"/>
                       <a:round/>
@@ -15722,7 +15646,7 @@
                     </a:lnR>
                     <a:lnT w="9525" cap="flat" cmpd="sng" algn="ctr">
                       <a:solidFill>
-                        <a:srgbClr val="1E3A5F"/>
+                        <a:srgbClr val="D6DEE8"/>
                       </a:solidFill>
                       <a:prstDash val="solid"/>
                       <a:round/>
@@ -15731,7 +15655,7 @@
                     </a:lnT>
                     <a:lnB w="9525" cap="flat" cmpd="sng" algn="ctr">
                       <a:solidFill>
-                        <a:srgbClr val="1E3A5F"/>
+                        <a:srgbClr val="D6DEE8"/>
                       </a:solidFill>
                       <a:prstDash val="solid"/>
                       <a:round/>
@@ -15739,7 +15663,7 @@
                       <a:tailEnd type="none" w="med" len="med"/>
                     </a:lnB>
                     <a:solidFill>
-                      <a:srgbClr val="0B1A33"/>
+                      <a:srgbClr val="FFFFFF"/>
                     </a:solidFill>
                   </a:tcPr>
                 </a:tc>
@@ -15754,7 +15678,7 @@
                       <a:r>
                         <a:rPr lang="en-US" sz="1100" dirty="0">
                           <a:solidFill>
-                            <a:srgbClr val="CBD5E1"/>
+                            <a:srgbClr val="334155"/>
                           </a:solidFill>
                           <a:latin typeface="Calibri" pitchFamily="34" charset="0"/>
                           <a:ea typeface="Calibri" pitchFamily="34" charset="-122"/>
@@ -15772,7 +15696,7 @@
                   <a:tcPr marL="91440" marR="91440" marT="45720" marB="45720" anchor="ctr">
                     <a:lnL w="9525" cap="flat" cmpd="sng" algn="ctr">
                       <a:solidFill>
-                        <a:srgbClr val="1E3A5F"/>
+                        <a:srgbClr val="D6DEE8"/>
                       </a:solidFill>
                       <a:prstDash val="solid"/>
                       <a:round/>
@@ -15781,7 +15705,7 @@
                     </a:lnL>
                     <a:lnR w="9525" cap="flat" cmpd="sng" algn="ctr">
                       <a:solidFill>
-                        <a:srgbClr val="1E3A5F"/>
+                        <a:srgbClr val="D6DEE8"/>
                       </a:solidFill>
                       <a:prstDash val="solid"/>
                       <a:round/>
@@ -15790,7 +15714,7 @@
                     </a:lnR>
                     <a:lnT w="9525" cap="flat" cmpd="sng" algn="ctr">
                       <a:solidFill>
-                        <a:srgbClr val="1E3A5F"/>
+                        <a:srgbClr val="D6DEE8"/>
                       </a:solidFill>
                       <a:prstDash val="solid"/>
                       <a:round/>
@@ -15799,7 +15723,7 @@
                     </a:lnT>
                     <a:lnB w="9525" cap="flat" cmpd="sng" algn="ctr">
                       <a:solidFill>
-                        <a:srgbClr val="1E3A5F"/>
+                        <a:srgbClr val="D6DEE8"/>
                       </a:solidFill>
                       <a:prstDash val="solid"/>
                       <a:round/>
@@ -15807,7 +15731,7 @@
                       <a:tailEnd type="none" w="med" len="med"/>
                     </a:lnB>
                     <a:solidFill>
-                      <a:srgbClr val="0B1A33"/>
+                      <a:srgbClr val="FFFFFF"/>
                     </a:solidFill>
                   </a:tcPr>
                 </a:tc>
@@ -15822,7 +15746,7 @@
                       <a:r>
                         <a:rPr lang="en-US" sz="1100" dirty="0">
                           <a:solidFill>
-                            <a:srgbClr val="F87171"/>
+                            <a:srgbClr val="DC2626"/>
                           </a:solidFill>
                           <a:latin typeface="Calibri" pitchFamily="34" charset="0"/>
                           <a:ea typeface="Calibri" pitchFamily="34" charset="-122"/>
@@ -15840,7 +15764,7 @@
                   <a:tcPr marL="91440" marR="91440" marT="45720" marB="45720" anchor="ctr">
                     <a:lnL w="9525" cap="flat" cmpd="sng" algn="ctr">
                       <a:solidFill>
-                        <a:srgbClr val="1E3A5F"/>
+                        <a:srgbClr val="D6DEE8"/>
                       </a:solidFill>
                       <a:prstDash val="solid"/>
                       <a:round/>
@@ -15849,7 +15773,7 @@
                     </a:lnL>
                     <a:lnR w="9525" cap="flat" cmpd="sng" algn="ctr">
                       <a:solidFill>
-                        <a:srgbClr val="1E3A5F"/>
+                        <a:srgbClr val="D6DEE8"/>
                       </a:solidFill>
                       <a:prstDash val="solid"/>
                       <a:round/>
@@ -15858,7 +15782,7 @@
                     </a:lnR>
                     <a:lnT w="9525" cap="flat" cmpd="sng" algn="ctr">
                       <a:solidFill>
-                        <a:srgbClr val="1E3A5F"/>
+                        <a:srgbClr val="D6DEE8"/>
                       </a:solidFill>
                       <a:prstDash val="solid"/>
                       <a:round/>
@@ -15867,7 +15791,7 @@
                     </a:lnT>
                     <a:lnB w="9525" cap="flat" cmpd="sng" algn="ctr">
                       <a:solidFill>
-                        <a:srgbClr val="1E3A5F"/>
+                        <a:srgbClr val="D6DEE8"/>
                       </a:solidFill>
                       <a:prstDash val="solid"/>
                       <a:round/>
@@ -15875,7 +15799,7 @@
                       <a:tailEnd type="none" w="med" len="med"/>
                     </a:lnB>
                     <a:solidFill>
-                      <a:srgbClr val="0B1A33"/>
+                      <a:srgbClr val="FFFFFF"/>
                     </a:solidFill>
                   </a:tcPr>
                 </a:tc>
@@ -15890,7 +15814,7 @@
                       <a:r>
                         <a:rPr lang="en-US" sz="1100" b="1" dirty="0">
                           <a:solidFill>
-                            <a:srgbClr val="34D399"/>
+                            <a:srgbClr val="059669"/>
                           </a:solidFill>
                           <a:latin typeface="Calibri" pitchFamily="34" charset="0"/>
                           <a:ea typeface="Calibri" pitchFamily="34" charset="-122"/>
@@ -15908,7 +15832,7 @@
                   <a:tcPr marL="91440" marR="91440" marT="45720" marB="45720" anchor="ctr">
                     <a:lnL w="9525" cap="flat" cmpd="sng" algn="ctr">
                       <a:solidFill>
-                        <a:srgbClr val="1E3A5F"/>
+                        <a:srgbClr val="D6DEE8"/>
                       </a:solidFill>
                       <a:prstDash val="solid"/>
                       <a:round/>
@@ -15917,7 +15841,7 @@
                     </a:lnL>
                     <a:lnR w="9525" cap="flat" cmpd="sng" algn="ctr">
                       <a:solidFill>
-                        <a:srgbClr val="1E3A5F"/>
+                        <a:srgbClr val="D6DEE8"/>
                       </a:solidFill>
                       <a:prstDash val="solid"/>
                       <a:round/>
@@ -15926,7 +15850,7 @@
                     </a:lnR>
                     <a:lnT w="9525" cap="flat" cmpd="sng" algn="ctr">
                       <a:solidFill>
-                        <a:srgbClr val="1E3A5F"/>
+                        <a:srgbClr val="D6DEE8"/>
                       </a:solidFill>
                       <a:prstDash val="solid"/>
                       <a:round/>
@@ -15935,7 +15859,7 @@
                     </a:lnT>
                     <a:lnB w="9525" cap="flat" cmpd="sng" algn="ctr">
                       <a:solidFill>
-                        <a:srgbClr val="1E3A5F"/>
+                        <a:srgbClr val="D6DEE8"/>
                       </a:solidFill>
                       <a:prstDash val="solid"/>
                       <a:round/>
@@ -15943,7 +15867,7 @@
                       <a:tailEnd type="none" w="med" len="med"/>
                     </a:lnB>
                     <a:solidFill>
-                      <a:srgbClr val="0B1A33"/>
+                      <a:srgbClr val="FFFFFF"/>
                     </a:solidFill>
                   </a:tcPr>
                 </a:tc>
@@ -15960,7 +15884,7 @@
                       <a:r>
                         <a:rPr lang="en-US" sz="1100" dirty="0">
                           <a:solidFill>
-                            <a:srgbClr val="CBD5E1"/>
+                            <a:srgbClr val="334155"/>
                           </a:solidFill>
                           <a:latin typeface="Calibri" pitchFamily="34" charset="0"/>
                           <a:ea typeface="Calibri" pitchFamily="34" charset="-122"/>
@@ -15978,7 +15902,7 @@
                   <a:tcPr marL="91440" marR="91440" marT="45720" marB="45720" anchor="ctr">
                     <a:lnL w="9525" cap="flat" cmpd="sng" algn="ctr">
                       <a:solidFill>
-                        <a:srgbClr val="1E3A5F"/>
+                        <a:srgbClr val="D6DEE8"/>
                       </a:solidFill>
                       <a:prstDash val="solid"/>
                       <a:round/>
@@ -15987,7 +15911,7 @@
                     </a:lnL>
                     <a:lnR w="9525" cap="flat" cmpd="sng" algn="ctr">
                       <a:solidFill>
-                        <a:srgbClr val="1E3A5F"/>
+                        <a:srgbClr val="D6DEE8"/>
                       </a:solidFill>
                       <a:prstDash val="solid"/>
                       <a:round/>
@@ -15996,7 +15920,7 @@
                     </a:lnR>
                     <a:lnT w="9525" cap="flat" cmpd="sng" algn="ctr">
                       <a:solidFill>
-                        <a:srgbClr val="1E3A5F"/>
+                        <a:srgbClr val="D6DEE8"/>
                       </a:solidFill>
                       <a:prstDash val="solid"/>
                       <a:round/>
@@ -16005,7 +15929,7 @@
                     </a:lnT>
                     <a:lnB w="9525" cap="flat" cmpd="sng" algn="ctr">
                       <a:solidFill>
-                        <a:srgbClr val="1E3A5F"/>
+                        <a:srgbClr val="D6DEE8"/>
                       </a:solidFill>
                       <a:prstDash val="solid"/>
                       <a:round/>
@@ -16013,7 +15937,7 @@
                       <a:tailEnd type="none" w="med" len="med"/>
                     </a:lnB>
                     <a:solidFill>
-                      <a:srgbClr val="0E2140"/>
+                      <a:srgbClr val="F8FAFC"/>
                     </a:solidFill>
                   </a:tcPr>
                 </a:tc>
@@ -16028,7 +15952,7 @@
                       <a:r>
                         <a:rPr lang="en-US" sz="1100" dirty="0">
                           <a:solidFill>
-                            <a:srgbClr val="F87171"/>
+                            <a:srgbClr val="DC2626"/>
                           </a:solidFill>
                           <a:latin typeface="Calibri" pitchFamily="34" charset="0"/>
                           <a:ea typeface="Calibri" pitchFamily="34" charset="-122"/>
@@ -16046,7 +15970,7 @@
                   <a:tcPr marL="91440" marR="91440" marT="45720" marB="45720" anchor="ctr">
                     <a:lnL w="9525" cap="flat" cmpd="sng" algn="ctr">
                       <a:solidFill>
-                        <a:srgbClr val="1E3A5F"/>
+                        <a:srgbClr val="D6DEE8"/>
                       </a:solidFill>
                       <a:prstDash val="solid"/>
                       <a:round/>
@@ -16055,7 +15979,7 @@
                     </a:lnL>
                     <a:lnR w="9525" cap="flat" cmpd="sng" algn="ctr">
                       <a:solidFill>
-                        <a:srgbClr val="1E3A5F"/>
+                        <a:srgbClr val="D6DEE8"/>
                       </a:solidFill>
                       <a:prstDash val="solid"/>
                       <a:round/>
@@ -16064,7 +15988,7 @@
                     </a:lnR>
                     <a:lnT w="9525" cap="flat" cmpd="sng" algn="ctr">
                       <a:solidFill>
-                        <a:srgbClr val="1E3A5F"/>
+                        <a:srgbClr val="D6DEE8"/>
                       </a:solidFill>
                       <a:prstDash val="solid"/>
                       <a:round/>
@@ -16073,7 +15997,7 @@
                     </a:lnT>
                     <a:lnB w="9525" cap="flat" cmpd="sng" algn="ctr">
                       <a:solidFill>
-                        <a:srgbClr val="1E3A5F"/>
+                        <a:srgbClr val="D6DEE8"/>
                       </a:solidFill>
                       <a:prstDash val="solid"/>
                       <a:round/>
@@ -16081,7 +16005,7 @@
                       <a:tailEnd type="none" w="med" len="med"/>
                     </a:lnB>
                     <a:solidFill>
-                      <a:srgbClr val="0E2140"/>
+                      <a:srgbClr val="F8FAFC"/>
                     </a:solidFill>
                   </a:tcPr>
                 </a:tc>
@@ -16096,7 +16020,7 @@
                       <a:r>
                         <a:rPr lang="en-US" sz="1100" dirty="0">
                           <a:solidFill>
-                            <a:srgbClr val="F87171"/>
+                            <a:srgbClr val="DC2626"/>
                           </a:solidFill>
                           <a:latin typeface="Calibri" pitchFamily="34" charset="0"/>
                           <a:ea typeface="Calibri" pitchFamily="34" charset="-122"/>
@@ -16114,7 +16038,7 @@
                   <a:tcPr marL="91440" marR="91440" marT="45720" marB="45720" anchor="ctr">
                     <a:lnL w="9525" cap="flat" cmpd="sng" algn="ctr">
                       <a:solidFill>
-                        <a:srgbClr val="1E3A5F"/>
+                        <a:srgbClr val="D6DEE8"/>
                       </a:solidFill>
                       <a:prstDash val="solid"/>
                       <a:round/>
@@ -16123,7 +16047,7 @@
                     </a:lnL>
                     <a:lnR w="9525" cap="flat" cmpd="sng" algn="ctr">
                       <a:solidFill>
-                        <a:srgbClr val="1E3A5F"/>
+                        <a:srgbClr val="D6DEE8"/>
                       </a:solidFill>
                       <a:prstDash val="solid"/>
                       <a:round/>
@@ -16132,7 +16056,7 @@
                     </a:lnR>
                     <a:lnT w="9525" cap="flat" cmpd="sng" algn="ctr">
                       <a:solidFill>
-                        <a:srgbClr val="1E3A5F"/>
+                        <a:srgbClr val="D6DEE8"/>
                       </a:solidFill>
                       <a:prstDash val="solid"/>
                       <a:round/>
@@ -16141,7 +16065,7 @@
                     </a:lnT>
                     <a:lnB w="9525" cap="flat" cmpd="sng" algn="ctr">
                       <a:solidFill>
-                        <a:srgbClr val="1E3A5F"/>
+                        <a:srgbClr val="D6DEE8"/>
                       </a:solidFill>
                       <a:prstDash val="solid"/>
                       <a:round/>
@@ -16149,7 +16073,7 @@
                       <a:tailEnd type="none" w="med" len="med"/>
                     </a:lnB>
                     <a:solidFill>
-                      <a:srgbClr val="0E2140"/>
+                      <a:srgbClr val="F8FAFC"/>
                     </a:solidFill>
                   </a:tcPr>
                 </a:tc>
@@ -16164,7 +16088,7 @@
                       <a:r>
                         <a:rPr lang="en-US" sz="1100" dirty="0">
                           <a:solidFill>
-                            <a:srgbClr val="CBD5E1"/>
+                            <a:srgbClr val="334155"/>
                           </a:solidFill>
                           <a:latin typeface="Calibri" pitchFamily="34" charset="0"/>
                           <a:ea typeface="Calibri" pitchFamily="34" charset="-122"/>
@@ -16182,7 +16106,7 @@
                   <a:tcPr marL="91440" marR="91440" marT="45720" marB="45720" anchor="ctr">
                     <a:lnL w="9525" cap="flat" cmpd="sng" algn="ctr">
                       <a:solidFill>
-                        <a:srgbClr val="1E3A5F"/>
+                        <a:srgbClr val="D6DEE8"/>
                       </a:solidFill>
                       <a:prstDash val="solid"/>
                       <a:round/>
@@ -16191,7 +16115,7 @@
                     </a:lnL>
                     <a:lnR w="9525" cap="flat" cmpd="sng" algn="ctr">
                       <a:solidFill>
-                        <a:srgbClr val="1E3A5F"/>
+                        <a:srgbClr val="D6DEE8"/>
                       </a:solidFill>
                       <a:prstDash val="solid"/>
                       <a:round/>
@@ -16200,7 +16124,7 @@
                     </a:lnR>
                     <a:lnT w="9525" cap="flat" cmpd="sng" algn="ctr">
                       <a:solidFill>
-                        <a:srgbClr val="1E3A5F"/>
+                        <a:srgbClr val="D6DEE8"/>
                       </a:solidFill>
                       <a:prstDash val="solid"/>
                       <a:round/>
@@ -16209,7 +16133,7 @@
                     </a:lnT>
                     <a:lnB w="9525" cap="flat" cmpd="sng" algn="ctr">
                       <a:solidFill>
-                        <a:srgbClr val="1E3A5F"/>
+                        <a:srgbClr val="D6DEE8"/>
                       </a:solidFill>
                       <a:prstDash val="solid"/>
                       <a:round/>
@@ -16217,7 +16141,7 @@
                       <a:tailEnd type="none" w="med" len="med"/>
                     </a:lnB>
                     <a:solidFill>
-                      <a:srgbClr val="0E2140"/>
+                      <a:srgbClr val="F8FAFC"/>
                     </a:solidFill>
                   </a:tcPr>
                 </a:tc>
@@ -16232,7 +16156,7 @@
                       <a:r>
                         <a:rPr lang="en-US" sz="1100" b="1" dirty="0">
                           <a:solidFill>
-                            <a:srgbClr val="34D399"/>
+                            <a:srgbClr val="059669"/>
                           </a:solidFill>
                           <a:latin typeface="Calibri" pitchFamily="34" charset="0"/>
                           <a:ea typeface="Calibri" pitchFamily="34" charset="-122"/>
@@ -16250,7 +16174,7 @@
                   <a:tcPr marL="91440" marR="91440" marT="45720" marB="45720" anchor="ctr">
                     <a:lnL w="9525" cap="flat" cmpd="sng" algn="ctr">
                       <a:solidFill>
-                        <a:srgbClr val="1E3A5F"/>
+                        <a:srgbClr val="D6DEE8"/>
                       </a:solidFill>
                       <a:prstDash val="solid"/>
                       <a:round/>
@@ -16259,7 +16183,7 @@
                     </a:lnL>
                     <a:lnR w="9525" cap="flat" cmpd="sng" algn="ctr">
                       <a:solidFill>
-                        <a:srgbClr val="1E3A5F"/>
+                        <a:srgbClr val="D6DEE8"/>
                       </a:solidFill>
                       <a:prstDash val="solid"/>
                       <a:round/>
@@ -16268,7 +16192,7 @@
                     </a:lnR>
                     <a:lnT w="9525" cap="flat" cmpd="sng" algn="ctr">
                       <a:solidFill>
-                        <a:srgbClr val="1E3A5F"/>
+                        <a:srgbClr val="D6DEE8"/>
                       </a:solidFill>
                       <a:prstDash val="solid"/>
                       <a:round/>
@@ -16277,7 +16201,7 @@
                     </a:lnT>
                     <a:lnB w="9525" cap="flat" cmpd="sng" algn="ctr">
                       <a:solidFill>
-                        <a:srgbClr val="1E3A5F"/>
+                        <a:srgbClr val="D6DEE8"/>
                       </a:solidFill>
                       <a:prstDash val="solid"/>
                       <a:round/>
@@ -16285,7 +16209,7 @@
                       <a:tailEnd type="none" w="med" len="med"/>
                     </a:lnB>
                     <a:solidFill>
-                      <a:srgbClr val="0E2140"/>
+                      <a:srgbClr val="F8FAFC"/>
                     </a:solidFill>
                   </a:tcPr>
                 </a:tc>
@@ -16302,7 +16226,7 @@
                       <a:r>
                         <a:rPr lang="en-US" sz="1100" dirty="0">
                           <a:solidFill>
-                            <a:srgbClr val="CBD5E1"/>
+                            <a:srgbClr val="334155"/>
                           </a:solidFill>
                           <a:latin typeface="Calibri" pitchFamily="34" charset="0"/>
                           <a:ea typeface="Calibri" pitchFamily="34" charset="-122"/>
@@ -16320,7 +16244,7 @@
                   <a:tcPr marL="91440" marR="91440" marT="45720" marB="45720" anchor="ctr">
                     <a:lnL w="9525" cap="flat" cmpd="sng" algn="ctr">
                       <a:solidFill>
-                        <a:srgbClr val="1E3A5F"/>
+                        <a:srgbClr val="D6DEE8"/>
                       </a:solidFill>
                       <a:prstDash val="solid"/>
                       <a:round/>
@@ -16329,7 +16253,7 @@
                     </a:lnL>
                     <a:lnR w="9525" cap="flat" cmpd="sng" algn="ctr">
                       <a:solidFill>
-                        <a:srgbClr val="1E3A5F"/>
+                        <a:srgbClr val="D6DEE8"/>
                       </a:solidFill>
                       <a:prstDash val="solid"/>
                       <a:round/>
@@ -16338,7 +16262,7 @@
                     </a:lnR>
                     <a:lnT w="9525" cap="flat" cmpd="sng" algn="ctr">
                       <a:solidFill>
-                        <a:srgbClr val="1E3A5F"/>
+                        <a:srgbClr val="D6DEE8"/>
                       </a:solidFill>
                       <a:prstDash val="solid"/>
                       <a:round/>
@@ -16347,7 +16271,7 @@
                     </a:lnT>
                     <a:lnB w="9525" cap="flat" cmpd="sng" algn="ctr">
                       <a:solidFill>
-                        <a:srgbClr val="1E3A5F"/>
+                        <a:srgbClr val="D6DEE8"/>
                       </a:solidFill>
                       <a:prstDash val="solid"/>
                       <a:round/>
@@ -16355,7 +16279,7 @@
                       <a:tailEnd type="none" w="med" len="med"/>
                     </a:lnB>
                     <a:solidFill>
-                      <a:srgbClr val="0B1A33"/>
+                      <a:srgbClr val="FFFFFF"/>
                     </a:solidFill>
                   </a:tcPr>
                 </a:tc>
@@ -16370,7 +16294,7 @@
                       <a:r>
                         <a:rPr lang="en-US" sz="1100" dirty="0">
                           <a:solidFill>
-                            <a:srgbClr val="F87171"/>
+                            <a:srgbClr val="DC2626"/>
                           </a:solidFill>
                           <a:latin typeface="Calibri" pitchFamily="34" charset="0"/>
                           <a:ea typeface="Calibri" pitchFamily="34" charset="-122"/>
@@ -16388,7 +16312,7 @@
                   <a:tcPr marL="91440" marR="91440" marT="45720" marB="45720" anchor="ctr">
                     <a:lnL w="9525" cap="flat" cmpd="sng" algn="ctr">
                       <a:solidFill>
-                        <a:srgbClr val="1E3A5F"/>
+                        <a:srgbClr val="D6DEE8"/>
                       </a:solidFill>
                       <a:prstDash val="solid"/>
                       <a:round/>
@@ -16397,7 +16321,7 @@
                     </a:lnL>
                     <a:lnR w="9525" cap="flat" cmpd="sng" algn="ctr">
                       <a:solidFill>
-                        <a:srgbClr val="1E3A5F"/>
+                        <a:srgbClr val="D6DEE8"/>
                       </a:solidFill>
                       <a:prstDash val="solid"/>
                       <a:round/>
@@ -16406,7 +16330,7 @@
                     </a:lnR>
                     <a:lnT w="9525" cap="flat" cmpd="sng" algn="ctr">
                       <a:solidFill>
-                        <a:srgbClr val="1E3A5F"/>
+                        <a:srgbClr val="D6DEE8"/>
                       </a:solidFill>
                       <a:prstDash val="solid"/>
                       <a:round/>
@@ -16415,7 +16339,7 @@
                     </a:lnT>
                     <a:lnB w="9525" cap="flat" cmpd="sng" algn="ctr">
                       <a:solidFill>
-                        <a:srgbClr val="1E3A5F"/>
+                        <a:srgbClr val="D6DEE8"/>
                       </a:solidFill>
                       <a:prstDash val="solid"/>
                       <a:round/>
@@ -16423,7 +16347,7 @@
                       <a:tailEnd type="none" w="med" len="med"/>
                     </a:lnB>
                     <a:solidFill>
-                      <a:srgbClr val="0B1A33"/>
+                      <a:srgbClr val="FFFFFF"/>
                     </a:solidFill>
                   </a:tcPr>
                 </a:tc>
@@ -16438,7 +16362,7 @@
                       <a:r>
                         <a:rPr lang="en-US" sz="1100" dirty="0">
                           <a:solidFill>
-                            <a:srgbClr val="F87171"/>
+                            <a:srgbClr val="DC2626"/>
                           </a:solidFill>
                           <a:latin typeface="Calibri" pitchFamily="34" charset="0"/>
                           <a:ea typeface="Calibri" pitchFamily="34" charset="-122"/>
@@ -16456,7 +16380,7 @@
                   <a:tcPr marL="91440" marR="91440" marT="45720" marB="45720" anchor="ctr">
                     <a:lnL w="9525" cap="flat" cmpd="sng" algn="ctr">
                       <a:solidFill>
-                        <a:srgbClr val="1E3A5F"/>
+                        <a:srgbClr val="D6DEE8"/>
                       </a:solidFill>
                       <a:prstDash val="solid"/>
                       <a:round/>
@@ -16465,7 +16389,7 @@
                     </a:lnL>
                     <a:lnR w="9525" cap="flat" cmpd="sng" algn="ctr">
                       <a:solidFill>
-                        <a:srgbClr val="1E3A5F"/>
+                        <a:srgbClr val="D6DEE8"/>
                       </a:solidFill>
                       <a:prstDash val="solid"/>
                       <a:round/>
@@ -16474,7 +16398,7 @@
                     </a:lnR>
                     <a:lnT w="9525" cap="flat" cmpd="sng" algn="ctr">
                       <a:solidFill>
-                        <a:srgbClr val="1E3A5F"/>
+                        <a:srgbClr val="D6DEE8"/>
                       </a:solidFill>
                       <a:prstDash val="solid"/>
                       <a:round/>
@@ -16483,7 +16407,7 @@
                     </a:lnT>
                     <a:lnB w="9525" cap="flat" cmpd="sng" algn="ctr">
                       <a:solidFill>
-                        <a:srgbClr val="1E3A5F"/>
+                        <a:srgbClr val="D6DEE8"/>
                       </a:solidFill>
                       <a:prstDash val="solid"/>
                       <a:round/>
@@ -16491,7 +16415,7 @@
                       <a:tailEnd type="none" w="med" len="med"/>
                     </a:lnB>
                     <a:solidFill>
-                      <a:srgbClr val="0B1A33"/>
+                      <a:srgbClr val="FFFFFF"/>
                     </a:solidFill>
                   </a:tcPr>
                 </a:tc>
@@ -16506,7 +16430,7 @@
                       <a:r>
                         <a:rPr lang="en-US" sz="1100" dirty="0">
                           <a:solidFill>
-                            <a:srgbClr val="CBD5E1"/>
+                            <a:srgbClr val="334155"/>
                           </a:solidFill>
                           <a:latin typeface="Calibri" pitchFamily="34" charset="0"/>
                           <a:ea typeface="Calibri" pitchFamily="34" charset="-122"/>
@@ -16524,7 +16448,7 @@
                   <a:tcPr marL="91440" marR="91440" marT="45720" marB="45720" anchor="ctr">
                     <a:lnL w="9525" cap="flat" cmpd="sng" algn="ctr">
                       <a:solidFill>
-                        <a:srgbClr val="1E3A5F"/>
+                        <a:srgbClr val="D6DEE8"/>
                       </a:solidFill>
                       <a:prstDash val="solid"/>
                       <a:round/>
@@ -16533,7 +16457,7 @@
                     </a:lnL>
                     <a:lnR w="9525" cap="flat" cmpd="sng" algn="ctr">
                       <a:solidFill>
-                        <a:srgbClr val="1E3A5F"/>
+                        <a:srgbClr val="D6DEE8"/>
                       </a:solidFill>
                       <a:prstDash val="solid"/>
                       <a:round/>
@@ -16542,7 +16466,7 @@
                     </a:lnR>
                     <a:lnT w="9525" cap="flat" cmpd="sng" algn="ctr">
                       <a:solidFill>
-                        <a:srgbClr val="1E3A5F"/>
+                        <a:srgbClr val="D6DEE8"/>
                       </a:solidFill>
                       <a:prstDash val="solid"/>
                       <a:round/>
@@ -16551,7 +16475,7 @@
                     </a:lnT>
                     <a:lnB w="9525" cap="flat" cmpd="sng" algn="ctr">
                       <a:solidFill>
-                        <a:srgbClr val="1E3A5F"/>
+                        <a:srgbClr val="D6DEE8"/>
                       </a:solidFill>
                       <a:prstDash val="solid"/>
                       <a:round/>
@@ -16559,7 +16483,7 @@
                       <a:tailEnd type="none" w="med" len="med"/>
                     </a:lnB>
                     <a:solidFill>
-                      <a:srgbClr val="0B1A33"/>
+                      <a:srgbClr val="FFFFFF"/>
                     </a:solidFill>
                   </a:tcPr>
                 </a:tc>
@@ -16574,7 +16498,7 @@
                       <a:r>
                         <a:rPr lang="en-US" sz="1100" b="1" dirty="0">
                           <a:solidFill>
-                            <a:srgbClr val="34D399"/>
+                            <a:srgbClr val="059669"/>
                           </a:solidFill>
                           <a:latin typeface="Calibri" pitchFamily="34" charset="0"/>
                           <a:ea typeface="Calibri" pitchFamily="34" charset="-122"/>
@@ -16592,7 +16516,7 @@
                   <a:tcPr marL="91440" marR="91440" marT="45720" marB="45720" anchor="ctr">
                     <a:lnL w="9525" cap="flat" cmpd="sng" algn="ctr">
                       <a:solidFill>
-                        <a:srgbClr val="1E3A5F"/>
+                        <a:srgbClr val="D6DEE8"/>
                       </a:solidFill>
                       <a:prstDash val="solid"/>
                       <a:round/>
@@ -16601,7 +16525,7 @@
                     </a:lnL>
                     <a:lnR w="9525" cap="flat" cmpd="sng" algn="ctr">
                       <a:solidFill>
-                        <a:srgbClr val="1E3A5F"/>
+                        <a:srgbClr val="D6DEE8"/>
                       </a:solidFill>
                       <a:prstDash val="solid"/>
                       <a:round/>
@@ -16610,7 +16534,7 @@
                     </a:lnR>
                     <a:lnT w="9525" cap="flat" cmpd="sng" algn="ctr">
                       <a:solidFill>
-                        <a:srgbClr val="1E3A5F"/>
+                        <a:srgbClr val="D6DEE8"/>
                       </a:solidFill>
                       <a:prstDash val="solid"/>
                       <a:round/>
@@ -16619,7 +16543,7 @@
                     </a:lnT>
                     <a:lnB w="9525" cap="flat" cmpd="sng" algn="ctr">
                       <a:solidFill>
-                        <a:srgbClr val="1E3A5F"/>
+                        <a:srgbClr val="D6DEE8"/>
                       </a:solidFill>
                       <a:prstDash val="solid"/>
                       <a:round/>
@@ -16627,7 +16551,7 @@
                       <a:tailEnd type="none" w="med" len="med"/>
                     </a:lnB>
                     <a:solidFill>
-                      <a:srgbClr val="0B1A33"/>
+                      <a:srgbClr val="FFFFFF"/>
                     </a:solidFill>
                   </a:tcPr>
                 </a:tc>
@@ -16644,7 +16568,7 @@
                       <a:r>
                         <a:rPr lang="en-US" sz="1100" dirty="0">
                           <a:solidFill>
-                            <a:srgbClr val="CBD5E1"/>
+                            <a:srgbClr val="334155"/>
                           </a:solidFill>
                           <a:latin typeface="Calibri" pitchFamily="34" charset="0"/>
                           <a:ea typeface="Calibri" pitchFamily="34" charset="-122"/>
@@ -16662,7 +16586,7 @@
                   <a:tcPr marL="91440" marR="91440" marT="45720" marB="45720" anchor="ctr">
                     <a:lnL w="9525" cap="flat" cmpd="sng" algn="ctr">
                       <a:solidFill>
-                        <a:srgbClr val="1E3A5F"/>
+                        <a:srgbClr val="D6DEE8"/>
                       </a:solidFill>
                       <a:prstDash val="solid"/>
                       <a:round/>
@@ -16671,7 +16595,7 @@
                     </a:lnL>
                     <a:lnR w="9525" cap="flat" cmpd="sng" algn="ctr">
                       <a:solidFill>
-                        <a:srgbClr val="1E3A5F"/>
+                        <a:srgbClr val="D6DEE8"/>
                       </a:solidFill>
                       <a:prstDash val="solid"/>
                       <a:round/>
@@ -16680,7 +16604,7 @@
                     </a:lnR>
                     <a:lnT w="9525" cap="flat" cmpd="sng" algn="ctr">
                       <a:solidFill>
-                        <a:srgbClr val="1E3A5F"/>
+                        <a:srgbClr val="D6DEE8"/>
                       </a:solidFill>
                       <a:prstDash val="solid"/>
                       <a:round/>
@@ -16689,7 +16613,7 @@
                     </a:lnT>
                     <a:lnB w="9525" cap="flat" cmpd="sng" algn="ctr">
                       <a:solidFill>
-                        <a:srgbClr val="1E3A5F"/>
+                        <a:srgbClr val="D6DEE8"/>
                       </a:solidFill>
                       <a:prstDash val="solid"/>
                       <a:round/>
@@ -16697,7 +16621,7 @@
                       <a:tailEnd type="none" w="med" len="med"/>
                     </a:lnB>
                     <a:solidFill>
-                      <a:srgbClr val="0E2140"/>
+                      <a:srgbClr val="F8FAFC"/>
                     </a:solidFill>
                   </a:tcPr>
                 </a:tc>
@@ -16712,7 +16636,7 @@
                       <a:r>
                         <a:rPr lang="en-US" sz="1100" dirty="0">
                           <a:solidFill>
-                            <a:srgbClr val="F87171"/>
+                            <a:srgbClr val="DC2626"/>
                           </a:solidFill>
                           <a:latin typeface="Calibri" pitchFamily="34" charset="0"/>
                           <a:ea typeface="Calibri" pitchFamily="34" charset="-122"/>
@@ -16730,7 +16654,7 @@
                   <a:tcPr marL="91440" marR="91440" marT="45720" marB="45720" anchor="ctr">
                     <a:lnL w="9525" cap="flat" cmpd="sng" algn="ctr">
                       <a:solidFill>
-                        <a:srgbClr val="1E3A5F"/>
+                        <a:srgbClr val="D6DEE8"/>
                       </a:solidFill>
                       <a:prstDash val="solid"/>
                       <a:round/>
@@ -16739,7 +16663,7 @@
                     </a:lnL>
                     <a:lnR w="9525" cap="flat" cmpd="sng" algn="ctr">
                       <a:solidFill>
-                        <a:srgbClr val="1E3A5F"/>
+                        <a:srgbClr val="D6DEE8"/>
                       </a:solidFill>
                       <a:prstDash val="solid"/>
                       <a:round/>
@@ -16748,7 +16672,7 @@
                     </a:lnR>
                     <a:lnT w="9525" cap="flat" cmpd="sng" algn="ctr">
                       <a:solidFill>
-                        <a:srgbClr val="1E3A5F"/>
+                        <a:srgbClr val="D6DEE8"/>
                       </a:solidFill>
                       <a:prstDash val="solid"/>
                       <a:round/>
@@ -16757,7 +16681,7 @@
                     </a:lnT>
                     <a:lnB w="9525" cap="flat" cmpd="sng" algn="ctr">
                       <a:solidFill>
-                        <a:srgbClr val="1E3A5F"/>
+                        <a:srgbClr val="D6DEE8"/>
                       </a:solidFill>
                       <a:prstDash val="solid"/>
                       <a:round/>
@@ -16765,7 +16689,7 @@
                       <a:tailEnd type="none" w="med" len="med"/>
                     </a:lnB>
                     <a:solidFill>
-                      <a:srgbClr val="0E2140"/>
+                      <a:srgbClr val="F8FAFC"/>
                     </a:solidFill>
                   </a:tcPr>
                 </a:tc>
@@ -16780,7 +16704,7 @@
                       <a:r>
                         <a:rPr lang="en-US" sz="1100" dirty="0">
                           <a:solidFill>
-                            <a:srgbClr val="F87171"/>
+                            <a:srgbClr val="DC2626"/>
                           </a:solidFill>
                           <a:latin typeface="Calibri" pitchFamily="34" charset="0"/>
                           <a:ea typeface="Calibri" pitchFamily="34" charset="-122"/>
@@ -16798,7 +16722,7 @@
                   <a:tcPr marL="91440" marR="91440" marT="45720" marB="45720" anchor="ctr">
                     <a:lnL w="9525" cap="flat" cmpd="sng" algn="ctr">
                       <a:solidFill>
-                        <a:srgbClr val="1E3A5F"/>
+                        <a:srgbClr val="D6DEE8"/>
                       </a:solidFill>
                       <a:prstDash val="solid"/>
                       <a:round/>
@@ -16807,7 +16731,7 @@
                     </a:lnL>
                     <a:lnR w="9525" cap="flat" cmpd="sng" algn="ctr">
                       <a:solidFill>
-                        <a:srgbClr val="1E3A5F"/>
+                        <a:srgbClr val="D6DEE8"/>
                       </a:solidFill>
                       <a:prstDash val="solid"/>
                       <a:round/>
@@ -16816,7 +16740,7 @@
                     </a:lnR>
                     <a:lnT w="9525" cap="flat" cmpd="sng" algn="ctr">
                       <a:solidFill>
-                        <a:srgbClr val="1E3A5F"/>
+                        <a:srgbClr val="D6DEE8"/>
                       </a:solidFill>
                       <a:prstDash val="solid"/>
                       <a:round/>
@@ -16825,7 +16749,7 @@
                     </a:lnT>
                     <a:lnB w="9525" cap="flat" cmpd="sng" algn="ctr">
                       <a:solidFill>
-                        <a:srgbClr val="1E3A5F"/>
+                        <a:srgbClr val="D6DEE8"/>
                       </a:solidFill>
                       <a:prstDash val="solid"/>
                       <a:round/>
@@ -16833,7 +16757,7 @@
                       <a:tailEnd type="none" w="med" len="med"/>
                     </a:lnB>
                     <a:solidFill>
-                      <a:srgbClr val="0E2140"/>
+                      <a:srgbClr val="F8FAFC"/>
                     </a:solidFill>
                   </a:tcPr>
                 </a:tc>
@@ -16848,7 +16772,7 @@
                       <a:r>
                         <a:rPr lang="en-US" sz="1100" dirty="0">
                           <a:solidFill>
-                            <a:srgbClr val="F87171"/>
+                            <a:srgbClr val="DC2626"/>
                           </a:solidFill>
                           <a:latin typeface="Calibri" pitchFamily="34" charset="0"/>
                           <a:ea typeface="Calibri" pitchFamily="34" charset="-122"/>
@@ -16866,7 +16790,7 @@
                   <a:tcPr marL="91440" marR="91440" marT="45720" marB="45720" anchor="ctr">
                     <a:lnL w="9525" cap="flat" cmpd="sng" algn="ctr">
                       <a:solidFill>
-                        <a:srgbClr val="1E3A5F"/>
+                        <a:srgbClr val="D6DEE8"/>
                       </a:solidFill>
                       <a:prstDash val="solid"/>
                       <a:round/>
@@ -16875,7 +16799,7 @@
                     </a:lnL>
                     <a:lnR w="9525" cap="flat" cmpd="sng" algn="ctr">
                       <a:solidFill>
-                        <a:srgbClr val="1E3A5F"/>
+                        <a:srgbClr val="D6DEE8"/>
                       </a:solidFill>
                       <a:prstDash val="solid"/>
                       <a:round/>
@@ -16884,7 +16808,7 @@
                     </a:lnR>
                     <a:lnT w="9525" cap="flat" cmpd="sng" algn="ctr">
                       <a:solidFill>
-                        <a:srgbClr val="1E3A5F"/>
+                        <a:srgbClr val="D6DEE8"/>
                       </a:solidFill>
                       <a:prstDash val="solid"/>
                       <a:round/>
@@ -16893,7 +16817,7 @@
                     </a:lnT>
                     <a:lnB w="9525" cap="flat" cmpd="sng" algn="ctr">
                       <a:solidFill>
-                        <a:srgbClr val="1E3A5F"/>
+                        <a:srgbClr val="D6DEE8"/>
                       </a:solidFill>
                       <a:prstDash val="solid"/>
                       <a:round/>
@@ -16901,7 +16825,7 @@
                       <a:tailEnd type="none" w="med" len="med"/>
                     </a:lnB>
                     <a:solidFill>
-                      <a:srgbClr val="0E2140"/>
+                      <a:srgbClr val="F8FAFC"/>
                     </a:solidFill>
                   </a:tcPr>
                 </a:tc>
@@ -16916,7 +16840,7 @@
                       <a:r>
                         <a:rPr lang="en-US" sz="1100" b="1" dirty="0">
                           <a:solidFill>
-                            <a:srgbClr val="34D399"/>
+                            <a:srgbClr val="059669"/>
                           </a:solidFill>
                           <a:latin typeface="Calibri" pitchFamily="34" charset="0"/>
                           <a:ea typeface="Calibri" pitchFamily="34" charset="-122"/>
@@ -16934,7 +16858,7 @@
                   <a:tcPr marL="91440" marR="91440" marT="45720" marB="45720" anchor="ctr">
                     <a:lnL w="9525" cap="flat" cmpd="sng" algn="ctr">
                       <a:solidFill>
-                        <a:srgbClr val="1E3A5F"/>
+                        <a:srgbClr val="D6DEE8"/>
                       </a:solidFill>
                       <a:prstDash val="solid"/>
                       <a:round/>
@@ -16943,7 +16867,7 @@
                     </a:lnL>
                     <a:lnR w="9525" cap="flat" cmpd="sng" algn="ctr">
                       <a:solidFill>
-                        <a:srgbClr val="1E3A5F"/>
+                        <a:srgbClr val="D6DEE8"/>
                       </a:solidFill>
                       <a:prstDash val="solid"/>
                       <a:round/>
@@ -16952,7 +16876,7 @@
                     </a:lnR>
                     <a:lnT w="9525" cap="flat" cmpd="sng" algn="ctr">
                       <a:solidFill>
-                        <a:srgbClr val="1E3A5F"/>
+                        <a:srgbClr val="D6DEE8"/>
                       </a:solidFill>
                       <a:prstDash val="solid"/>
                       <a:round/>
@@ -16961,7 +16885,7 @@
                     </a:lnT>
                     <a:lnB w="9525" cap="flat" cmpd="sng" algn="ctr">
                       <a:solidFill>
-                        <a:srgbClr val="1E3A5F"/>
+                        <a:srgbClr val="D6DEE8"/>
                       </a:solidFill>
                       <a:prstDash val="solid"/>
                       <a:round/>
@@ -16969,7 +16893,7 @@
                       <a:tailEnd type="none" w="med" len="med"/>
                     </a:lnB>
                     <a:solidFill>
-                      <a:srgbClr val="0E2140"/>
+                      <a:srgbClr val="F8FAFC"/>
                     </a:solidFill>
                   </a:tcPr>
                 </a:tc>
@@ -16986,7 +16910,7 @@
                       <a:r>
                         <a:rPr lang="en-US" sz="1100" dirty="0">
                           <a:solidFill>
-                            <a:srgbClr val="CBD5E1"/>
+                            <a:srgbClr val="334155"/>
                           </a:solidFill>
                           <a:latin typeface="Calibri" pitchFamily="34" charset="0"/>
                           <a:ea typeface="Calibri" pitchFamily="34" charset="-122"/>
@@ -17004,7 +16928,7 @@
                   <a:tcPr marL="91440" marR="91440" marT="45720" marB="45720" anchor="ctr">
                     <a:lnL w="9525" cap="flat" cmpd="sng" algn="ctr">
                       <a:solidFill>
-                        <a:srgbClr val="1E3A5F"/>
+                        <a:srgbClr val="D6DEE8"/>
                       </a:solidFill>
                       <a:prstDash val="solid"/>
                       <a:round/>
@@ -17013,7 +16937,7 @@
                     </a:lnL>
                     <a:lnR w="9525" cap="flat" cmpd="sng" algn="ctr">
                       <a:solidFill>
-                        <a:srgbClr val="1E3A5F"/>
+                        <a:srgbClr val="D6DEE8"/>
                       </a:solidFill>
                       <a:prstDash val="solid"/>
                       <a:round/>
@@ -17022,7 +16946,7 @@
                     </a:lnR>
                     <a:lnT w="9525" cap="flat" cmpd="sng" algn="ctr">
                       <a:solidFill>
-                        <a:srgbClr val="1E3A5F"/>
+                        <a:srgbClr val="D6DEE8"/>
                       </a:solidFill>
                       <a:prstDash val="solid"/>
                       <a:round/>
@@ -17031,7 +16955,7 @@
                     </a:lnT>
                     <a:lnB w="9525" cap="flat" cmpd="sng" algn="ctr">
                       <a:solidFill>
-                        <a:srgbClr val="1E3A5F"/>
+                        <a:srgbClr val="D6DEE8"/>
                       </a:solidFill>
                       <a:prstDash val="solid"/>
                       <a:round/>
@@ -17039,7 +16963,7 @@
                       <a:tailEnd type="none" w="med" len="med"/>
                     </a:lnB>
                     <a:solidFill>
-                      <a:srgbClr val="0B1A33"/>
+                      <a:srgbClr val="FFFFFF"/>
                     </a:solidFill>
                   </a:tcPr>
                 </a:tc>
@@ -17054,7 +16978,7 @@
                       <a:r>
                         <a:rPr lang="en-US" sz="1100" dirty="0">
                           <a:solidFill>
-                            <a:srgbClr val="F87171"/>
+                            <a:srgbClr val="DC2626"/>
                           </a:solidFill>
                           <a:latin typeface="Calibri" pitchFamily="34" charset="0"/>
                           <a:ea typeface="Calibri" pitchFamily="34" charset="-122"/>
@@ -17072,7 +16996,7 @@
                   <a:tcPr marL="91440" marR="91440" marT="45720" marB="45720" anchor="ctr">
                     <a:lnL w="9525" cap="flat" cmpd="sng" algn="ctr">
                       <a:solidFill>
-                        <a:srgbClr val="1E3A5F"/>
+                        <a:srgbClr val="D6DEE8"/>
                       </a:solidFill>
                       <a:prstDash val="solid"/>
                       <a:round/>
@@ -17081,7 +17005,7 @@
                     </a:lnL>
                     <a:lnR w="9525" cap="flat" cmpd="sng" algn="ctr">
                       <a:solidFill>
-                        <a:srgbClr val="1E3A5F"/>
+                        <a:srgbClr val="D6DEE8"/>
                       </a:solidFill>
                       <a:prstDash val="solid"/>
                       <a:round/>
@@ -17090,7 +17014,7 @@
                     </a:lnR>
                     <a:lnT w="9525" cap="flat" cmpd="sng" algn="ctr">
                       <a:solidFill>
-                        <a:srgbClr val="1E3A5F"/>
+                        <a:srgbClr val="D6DEE8"/>
                       </a:solidFill>
                       <a:prstDash val="solid"/>
                       <a:round/>
@@ -17099,7 +17023,7 @@
                     </a:lnT>
                     <a:lnB w="9525" cap="flat" cmpd="sng" algn="ctr">
                       <a:solidFill>
-                        <a:srgbClr val="1E3A5F"/>
+                        <a:srgbClr val="D6DEE8"/>
                       </a:solidFill>
                       <a:prstDash val="solid"/>
                       <a:round/>
@@ -17107,7 +17031,7 @@
                       <a:tailEnd type="none" w="med" len="med"/>
                     </a:lnB>
                     <a:solidFill>
-                      <a:srgbClr val="0B1A33"/>
+                      <a:srgbClr val="FFFFFF"/>
                     </a:solidFill>
                   </a:tcPr>
                 </a:tc>
@@ -17122,7 +17046,7 @@
                       <a:r>
                         <a:rPr lang="en-US" sz="1100" dirty="0">
                           <a:solidFill>
-                            <a:srgbClr val="F87171"/>
+                            <a:srgbClr val="DC2626"/>
                           </a:solidFill>
                           <a:latin typeface="Calibri" pitchFamily="34" charset="0"/>
                           <a:ea typeface="Calibri" pitchFamily="34" charset="-122"/>
@@ -17140,7 +17064,7 @@
                   <a:tcPr marL="91440" marR="91440" marT="45720" marB="45720" anchor="ctr">
                     <a:lnL w="9525" cap="flat" cmpd="sng" algn="ctr">
                       <a:solidFill>
-                        <a:srgbClr val="1E3A5F"/>
+                        <a:srgbClr val="D6DEE8"/>
                       </a:solidFill>
                       <a:prstDash val="solid"/>
                       <a:round/>
@@ -17149,7 +17073,7 @@
                     </a:lnL>
                     <a:lnR w="9525" cap="flat" cmpd="sng" algn="ctr">
                       <a:solidFill>
-                        <a:srgbClr val="1E3A5F"/>
+                        <a:srgbClr val="D6DEE8"/>
                       </a:solidFill>
                       <a:prstDash val="solid"/>
                       <a:round/>
@@ -17158,7 +17082,7 @@
                     </a:lnR>
                     <a:lnT w="9525" cap="flat" cmpd="sng" algn="ctr">
                       <a:solidFill>
-                        <a:srgbClr val="1E3A5F"/>
+                        <a:srgbClr val="D6DEE8"/>
                       </a:solidFill>
                       <a:prstDash val="solid"/>
                       <a:round/>
@@ -17167,7 +17091,7 @@
                     </a:lnT>
                     <a:lnB w="9525" cap="flat" cmpd="sng" algn="ctr">
                       <a:solidFill>
-                        <a:srgbClr val="1E3A5F"/>
+                        <a:srgbClr val="D6DEE8"/>
                       </a:solidFill>
                       <a:prstDash val="solid"/>
                       <a:round/>
@@ -17175,7 +17099,7 @@
                       <a:tailEnd type="none" w="med" len="med"/>
                     </a:lnB>
                     <a:solidFill>
-                      <a:srgbClr val="0B1A33"/>
+                      <a:srgbClr val="FFFFFF"/>
                     </a:solidFill>
                   </a:tcPr>
                 </a:tc>
@@ -17190,7 +17114,7 @@
                       <a:r>
                         <a:rPr lang="en-US" sz="1100" dirty="0">
                           <a:solidFill>
-                            <a:srgbClr val="F87171"/>
+                            <a:srgbClr val="DC2626"/>
                           </a:solidFill>
                           <a:latin typeface="Calibri" pitchFamily="34" charset="0"/>
                           <a:ea typeface="Calibri" pitchFamily="34" charset="-122"/>
@@ -17208,7 +17132,7 @@
                   <a:tcPr marL="91440" marR="91440" marT="45720" marB="45720" anchor="ctr">
                     <a:lnL w="9525" cap="flat" cmpd="sng" algn="ctr">
                       <a:solidFill>
-                        <a:srgbClr val="1E3A5F"/>
+                        <a:srgbClr val="D6DEE8"/>
                       </a:solidFill>
                       <a:prstDash val="solid"/>
                       <a:round/>
@@ -17217,7 +17141,7 @@
                     </a:lnL>
                     <a:lnR w="9525" cap="flat" cmpd="sng" algn="ctr">
                       <a:solidFill>
-                        <a:srgbClr val="1E3A5F"/>
+                        <a:srgbClr val="D6DEE8"/>
                       </a:solidFill>
                       <a:prstDash val="solid"/>
                       <a:round/>
@@ -17226,7 +17150,7 @@
                     </a:lnR>
                     <a:lnT w="9525" cap="flat" cmpd="sng" algn="ctr">
                       <a:solidFill>
-                        <a:srgbClr val="1E3A5F"/>
+                        <a:srgbClr val="D6DEE8"/>
                       </a:solidFill>
                       <a:prstDash val="solid"/>
                       <a:round/>
@@ -17235,7 +17159,7 @@
                     </a:lnT>
                     <a:lnB w="9525" cap="flat" cmpd="sng" algn="ctr">
                       <a:solidFill>
-                        <a:srgbClr val="1E3A5F"/>
+                        <a:srgbClr val="D6DEE8"/>
                       </a:solidFill>
                       <a:prstDash val="solid"/>
                       <a:round/>
@@ -17243,7 +17167,7 @@
                       <a:tailEnd type="none" w="med" len="med"/>
                     </a:lnB>
                     <a:solidFill>
-                      <a:srgbClr val="0B1A33"/>
+                      <a:srgbClr val="FFFFFF"/>
                     </a:solidFill>
                   </a:tcPr>
                 </a:tc>
@@ -17258,7 +17182,7 @@
                       <a:r>
                         <a:rPr lang="en-US" sz="1100" b="1" dirty="0">
                           <a:solidFill>
-                            <a:srgbClr val="34D399"/>
+                            <a:srgbClr val="059669"/>
                           </a:solidFill>
                           <a:latin typeface="Calibri" pitchFamily="34" charset="0"/>
                           <a:ea typeface="Calibri" pitchFamily="34" charset="-122"/>
@@ -17276,7 +17200,7 @@
                   <a:tcPr marL="91440" marR="91440" marT="45720" marB="45720" anchor="ctr">
                     <a:lnL w="9525" cap="flat" cmpd="sng" algn="ctr">
                       <a:solidFill>
-                        <a:srgbClr val="1E3A5F"/>
+                        <a:srgbClr val="D6DEE8"/>
                       </a:solidFill>
                       <a:prstDash val="solid"/>
                       <a:round/>
@@ -17285,7 +17209,7 @@
                     </a:lnL>
                     <a:lnR w="9525" cap="flat" cmpd="sng" algn="ctr">
                       <a:solidFill>
-                        <a:srgbClr val="1E3A5F"/>
+                        <a:srgbClr val="D6DEE8"/>
                       </a:solidFill>
                       <a:prstDash val="solid"/>
                       <a:round/>
@@ -17294,7 +17218,7 @@
                     </a:lnR>
                     <a:lnT w="9525" cap="flat" cmpd="sng" algn="ctr">
                       <a:solidFill>
-                        <a:srgbClr val="1E3A5F"/>
+                        <a:srgbClr val="D6DEE8"/>
                       </a:solidFill>
                       <a:prstDash val="solid"/>
                       <a:round/>
@@ -17303,7 +17227,7 @@
                     </a:lnT>
                     <a:lnB w="9525" cap="flat" cmpd="sng" algn="ctr">
                       <a:solidFill>
-                        <a:srgbClr val="1E3A5F"/>
+                        <a:srgbClr val="D6DEE8"/>
                       </a:solidFill>
                       <a:prstDash val="solid"/>
                       <a:round/>
@@ -17311,7 +17235,7 @@
                       <a:tailEnd type="none" w="med" len="med"/>
                     </a:lnB>
                     <a:solidFill>
-                      <a:srgbClr val="0B1A33"/>
+                      <a:srgbClr val="FFFFFF"/>
                     </a:solidFill>
                   </a:tcPr>
                 </a:tc>
@@ -17347,7 +17271,7 @@
             <a:r>
               <a:rPr lang="en-US" sz="1200" dirty="0">
                 <a:solidFill>
-                  <a:srgbClr val="FFFFFF"/>
+                  <a:srgbClr val="0F172A"/>
                 </a:solidFill>
                 <a:latin typeface="Calibri" pitchFamily="34" charset="0"/>
                 <a:ea typeface="Calibri" pitchFamily="34" charset="-122"/>
@@ -17374,18 +17298,18 @@
             <a:avLst/>
           </a:prstGeom>
           <a:solidFill>
-            <a:srgbClr val="0E1F3D"/>
+            <a:srgbClr val="FFFFFF"/>
           </a:solidFill>
           <a:ln w="12700">
             <a:solidFill>
-              <a:srgbClr val="38BDF8"/>
+              <a:srgbClr val="D6DEE8"/>
             </a:solidFill>
             <a:prstDash val="solid"/>
           </a:ln>
           <a:effectLst>
-            <a:outerShdw sx="100000" sy="100000" kx="0" ky="0" algn="bl" rotWithShape="0" blurRad="177800" dist="50800" dir="5400000">
-              <a:srgbClr val="38BDF8">
-                <a:alpha val="35000"/>
+            <a:outerShdw sx="100000" sy="100000" kx="0" ky="0" algn="bl" rotWithShape="0" blurRad="127000" dist="25400" dir="5400000">
+              <a:srgbClr val="0F172A">
+                <a:alpha val="16000"/>
               </a:srgbClr>
             </a:outerShdw>
           </a:effectLst>
@@ -17430,7 +17354,7 @@
             <a:avLst/>
           </a:prstGeom>
           <a:solidFill>
-            <a:srgbClr val="38BDF8"/>
+            <a:srgbClr val="0E7490"/>
           </a:solidFill>
           <a:ln/>
         </p:spPr>
@@ -17444,7 +17368,7 @@
             <a:r>
               <a:rPr lang="en-US" sz="1050" b="1" dirty="0">
                 <a:solidFill>
-                  <a:srgbClr val="07122A"/>
+                  <a:srgbClr val="FFFFFF"/>
                 </a:solidFill>
                 <a:latin typeface="Calibri" pitchFamily="34" charset="0"/>
                 <a:ea typeface="Calibri" pitchFamily="34" charset="-122"/>
@@ -17471,7 +17395,7 @@
             <a:avLst/>
           </a:prstGeom>
           <a:solidFill>
-            <a:srgbClr val="38BDF8"/>
+            <a:srgbClr val="0E7490"/>
           </a:solidFill>
           <a:ln/>
         </p:spPr>
@@ -17485,7 +17409,7 @@
             <a:r>
               <a:rPr lang="en-US" sz="1050" b="1" dirty="0">
                 <a:solidFill>
-                  <a:srgbClr val="07122A"/>
+                  <a:srgbClr val="FFFFFF"/>
                 </a:solidFill>
                 <a:latin typeface="Calibri" pitchFamily="34" charset="0"/>
                 <a:ea typeface="Calibri" pitchFamily="34" charset="-122"/>
@@ -17527,7 +17451,7 @@
             <a:r>
               <a:rPr lang="en-US" sz="1100" b="1" dirty="0">
                 <a:solidFill>
-                  <a:srgbClr val="38BDF8"/>
+                  <a:srgbClr val="0E7490"/>
                 </a:solidFill>
                 <a:latin typeface="Calibri" pitchFamily="34" charset="0"/>
                 <a:ea typeface="Calibri" pitchFamily="34" charset="-122"/>
@@ -17544,7 +17468,7 @@
             <a:r>
               <a:rPr lang="en-US" sz="1100" dirty="0">
                 <a:solidFill>
-                  <a:srgbClr val="CBD5E1"/>
+                  <a:srgbClr val="334155"/>
                 </a:solidFill>
                 <a:latin typeface="Calibri" pitchFamily="34" charset="0"/>
                 <a:ea typeface="Calibri" pitchFamily="34" charset="-122"/>
@@ -17564,7 +17488,7 @@
             <a:r>
               <a:rPr lang="en-US" sz="1100" b="1" dirty="0">
                 <a:solidFill>
-                  <a:srgbClr val="38BDF8"/>
+                  <a:srgbClr val="0E7490"/>
                 </a:solidFill>
                 <a:latin typeface="Calibri" pitchFamily="34" charset="0"/>
                 <a:ea typeface="Calibri" pitchFamily="34" charset="-122"/>
@@ -17581,7 +17505,7 @@
             <a:r>
               <a:rPr lang="en-US" sz="1100" dirty="0">
                 <a:solidFill>
-                  <a:srgbClr val="CBD5E1"/>
+                  <a:srgbClr val="334155"/>
                 </a:solidFill>
                 <a:latin typeface="Calibri" pitchFamily="34" charset="0"/>
                 <a:ea typeface="Calibri" pitchFamily="34" charset="-122"/>
@@ -17610,13 +17534,11 @@
             </a:avLst>
           </a:prstGeom>
           <a:solidFill>
-            <a:srgbClr val="0E1F3D">
-              <a:alpha val="85000"/>
-            </a:srgbClr>
+            <a:srgbClr val="F1F5F9"/>
           </a:solidFill>
           <a:ln w="12700">
             <a:solidFill>
-              <a:srgbClr val="1E3A5F"/>
+              <a:srgbClr val="D6DEE8"/>
             </a:solidFill>
             <a:prstDash val="solid"/>
           </a:ln>
@@ -17649,7 +17571,7 @@
             <a:r>
               <a:rPr lang="en-US" sz="2600" b="1" dirty="0">
                 <a:solidFill>
-                  <a:srgbClr val="38BDF8"/>
+                  <a:srgbClr val="0E7490"/>
                 </a:solidFill>
                 <a:latin typeface="Arial" pitchFamily="34" charset="0"/>
                 <a:ea typeface="Arial" pitchFamily="34" charset="-122"/>
@@ -17688,7 +17610,7 @@
             <a:r>
               <a:rPr lang="en-US" sz="1200" dirty="0">
                 <a:solidFill>
-                  <a:srgbClr val="FFFFFF"/>
+                  <a:srgbClr val="0F172A"/>
                 </a:solidFill>
                 <a:latin typeface="Calibri" pitchFamily="34" charset="0"/>
                 <a:ea typeface="Calibri" pitchFamily="34" charset="-122"/>
@@ -17717,13 +17639,11 @@
             </a:avLst>
           </a:prstGeom>
           <a:solidFill>
-            <a:srgbClr val="0E1F3D">
-              <a:alpha val="85000"/>
-            </a:srgbClr>
+            <a:srgbClr val="F1F5F9"/>
           </a:solidFill>
           <a:ln w="12700">
             <a:solidFill>
-              <a:srgbClr val="1E3A5F"/>
+              <a:srgbClr val="D6DEE8"/>
             </a:solidFill>
             <a:prstDash val="solid"/>
           </a:ln>
@@ -17756,7 +17676,7 @@
             <a:r>
               <a:rPr lang="en-US" sz="2600" b="1" dirty="0">
                 <a:solidFill>
-                  <a:srgbClr val="38BDF8"/>
+                  <a:srgbClr val="0E7490"/>
                 </a:solidFill>
                 <a:latin typeface="Arial" pitchFamily="34" charset="0"/>
                 <a:ea typeface="Arial" pitchFamily="34" charset="-122"/>
@@ -17795,7 +17715,7 @@
             <a:r>
               <a:rPr lang="en-US" sz="1200" dirty="0">
                 <a:solidFill>
-                  <a:srgbClr val="FFFFFF"/>
+                  <a:srgbClr val="0F172A"/>
                 </a:solidFill>
                 <a:latin typeface="Calibri" pitchFamily="34" charset="0"/>
                 <a:ea typeface="Calibri" pitchFamily="34" charset="-122"/>
@@ -17824,13 +17744,11 @@
             </a:avLst>
           </a:prstGeom>
           <a:solidFill>
-            <a:srgbClr val="0E1F3D">
-              <a:alpha val="85000"/>
-            </a:srgbClr>
+            <a:srgbClr val="F1F5F9"/>
           </a:solidFill>
           <a:ln w="12700">
             <a:solidFill>
-              <a:srgbClr val="1E3A5F"/>
+              <a:srgbClr val="D6DEE8"/>
             </a:solidFill>
             <a:prstDash val="solid"/>
           </a:ln>
@@ -17863,7 +17781,7 @@
             <a:r>
               <a:rPr lang="en-US" sz="2600" b="1" dirty="0">
                 <a:solidFill>
-                  <a:srgbClr val="38BDF8"/>
+                  <a:srgbClr val="0E7490"/>
                 </a:solidFill>
                 <a:latin typeface="Arial" pitchFamily="34" charset="0"/>
                 <a:ea typeface="Arial" pitchFamily="34" charset="-122"/>
@@ -17902,7 +17820,7 @@
             <a:r>
               <a:rPr lang="en-US" sz="1200" dirty="0">
                 <a:solidFill>
-                  <a:srgbClr val="FFFFFF"/>
+                  <a:srgbClr val="0F172A"/>
                 </a:solidFill>
                 <a:latin typeface="Calibri" pitchFamily="34" charset="0"/>
                 <a:ea typeface="Calibri" pitchFamily="34" charset="-122"/>
@@ -17944,7 +17862,7 @@
             <a:lvl1pPr>
               <a:defRPr sz="900">
                 <a:solidFill>
-                  <a:srgbClr val="94A3B8"/>
+                  <a:srgbClr val="64748B"/>
                 </a:solidFill>
               </a:defRPr>
             </a:lvl1pPr>
@@ -18011,7 +17929,7 @@
             <a:r>
               <a:rPr lang="en-US" sz="1100" b="1" spc="200" kern="0" dirty="0">
                 <a:solidFill>
-                  <a:srgbClr val="38BDF8"/>
+                  <a:srgbClr val="0E7490"/>
                 </a:solidFill>
                 <a:latin typeface="Calibri" pitchFamily="34" charset="0"/>
                 <a:ea typeface="Calibri" pitchFamily="34" charset="-122"/>
@@ -18052,7 +17970,7 @@
             <a:r>
               <a:rPr lang="en-US" sz="3400" b="1" dirty="0">
                 <a:solidFill>
-                  <a:schemeClr val="bg1"/>
+                  <a:schemeClr val="tx1"/>
                 </a:solidFill>
               </a:rPr>
               <a:t>Impact and </a:t>
@@ -18063,7 +17981,7 @@
             <a:r>
               <a:rPr lang="en-US" sz="3400" b="1" dirty="0">
                 <a:solidFill>
-                  <a:srgbClr val="38BDF8"/>
+                  <a:srgbClr val="0E7490"/>
                 </a:solidFill>
               </a:rPr>
               <a:t>Benefits</a:t>
@@ -18089,13 +18007,11 @@
             </a:avLst>
           </a:prstGeom>
           <a:solidFill>
-            <a:srgbClr val="0E1F3D">
-              <a:alpha val="85000"/>
-            </a:srgbClr>
+            <a:srgbClr val="F1F5F9"/>
           </a:solidFill>
           <a:ln w="12700">
             <a:solidFill>
-              <a:srgbClr val="1E3A5F"/>
+              <a:srgbClr val="D6DEE8"/>
             </a:solidFill>
             <a:prstDash val="solid"/>
           </a:ln>
@@ -18128,7 +18044,7 @@
             <a:r>
               <a:rPr lang="en-US" sz="2800" b="1" dirty="0">
                 <a:solidFill>
-                  <a:srgbClr val="38BDF8"/>
+                  <a:srgbClr val="0E7490"/>
                 </a:solidFill>
                 <a:latin typeface="Arial" pitchFamily="34" charset="0"/>
                 <a:ea typeface="Arial" pitchFamily="34" charset="-122"/>
@@ -18167,7 +18083,7 @@
             <a:r>
               <a:rPr lang="en-US" sz="1300" b="1" dirty="0">
                 <a:solidFill>
-                  <a:srgbClr val="FFFFFF"/>
+                  <a:srgbClr val="0F172A"/>
                 </a:solidFill>
                 <a:latin typeface="Calibri" pitchFamily="34" charset="0"/>
                 <a:ea typeface="Calibri" pitchFamily="34" charset="-122"/>
@@ -18206,7 +18122,7 @@
             <a:r>
               <a:rPr lang="en-US" sz="1050" dirty="0">
                 <a:solidFill>
-                  <a:srgbClr val="CBD5E1"/>
+                  <a:srgbClr val="334155"/>
                 </a:solidFill>
                 <a:latin typeface="Calibri" pitchFamily="34" charset="0"/>
                 <a:ea typeface="Calibri" pitchFamily="34" charset="-122"/>
@@ -18235,13 +18151,11 @@
             </a:avLst>
           </a:prstGeom>
           <a:solidFill>
-            <a:srgbClr val="0E1F3D">
-              <a:alpha val="85000"/>
-            </a:srgbClr>
+            <a:srgbClr val="F1F5F9"/>
           </a:solidFill>
           <a:ln w="12700">
             <a:solidFill>
-              <a:srgbClr val="1E3A5F"/>
+              <a:srgbClr val="D6DEE8"/>
             </a:solidFill>
             <a:prstDash val="solid"/>
           </a:ln>
@@ -18274,7 +18188,7 @@
             <a:r>
               <a:rPr lang="en-US" sz="2800" b="1" dirty="0">
                 <a:solidFill>
-                  <a:srgbClr val="38BDF8"/>
+                  <a:srgbClr val="0E7490"/>
                 </a:solidFill>
                 <a:latin typeface="Arial" pitchFamily="34" charset="0"/>
                 <a:ea typeface="Arial" pitchFamily="34" charset="-122"/>
@@ -18313,7 +18227,7 @@
             <a:r>
               <a:rPr lang="en-US" sz="1300" b="1" dirty="0">
                 <a:solidFill>
-                  <a:srgbClr val="FFFFFF"/>
+                  <a:srgbClr val="0F172A"/>
                 </a:solidFill>
                 <a:latin typeface="Calibri" pitchFamily="34" charset="0"/>
                 <a:ea typeface="Calibri" pitchFamily="34" charset="-122"/>
@@ -18352,7 +18266,7 @@
             <a:r>
               <a:rPr lang="en-US" sz="1050" dirty="0">
                 <a:solidFill>
-                  <a:srgbClr val="CBD5E1"/>
+                  <a:srgbClr val="334155"/>
                 </a:solidFill>
                 <a:latin typeface="Calibri" pitchFamily="34" charset="0"/>
                 <a:ea typeface="Calibri" pitchFamily="34" charset="-122"/>
@@ -18381,13 +18295,11 @@
             </a:avLst>
           </a:prstGeom>
           <a:solidFill>
-            <a:srgbClr val="0E1F3D">
-              <a:alpha val="85000"/>
-            </a:srgbClr>
+            <a:srgbClr val="F1F5F9"/>
           </a:solidFill>
           <a:ln w="12700">
             <a:solidFill>
-              <a:srgbClr val="1E3A5F"/>
+              <a:srgbClr val="D6DEE8"/>
             </a:solidFill>
             <a:prstDash val="solid"/>
           </a:ln>
@@ -18420,7 +18332,7 @@
             <a:r>
               <a:rPr lang="en-US" sz="2800" b="1" dirty="0">
                 <a:solidFill>
-                  <a:srgbClr val="38BDF8"/>
+                  <a:srgbClr val="0E7490"/>
                 </a:solidFill>
                 <a:latin typeface="Arial" pitchFamily="34" charset="0"/>
                 <a:ea typeface="Arial" pitchFamily="34" charset="-122"/>
@@ -18459,7 +18371,7 @@
             <a:r>
               <a:rPr lang="en-US" sz="1300" b="1" dirty="0">
                 <a:solidFill>
-                  <a:srgbClr val="FFFFFF"/>
+                  <a:srgbClr val="0F172A"/>
                 </a:solidFill>
                 <a:latin typeface="Calibri" pitchFamily="34" charset="0"/>
                 <a:ea typeface="Calibri" pitchFamily="34" charset="-122"/>
@@ -18498,7 +18410,7 @@
             <a:r>
               <a:rPr lang="en-US" sz="1050" dirty="0">
                 <a:solidFill>
-                  <a:srgbClr val="CBD5E1"/>
+                  <a:srgbClr val="334155"/>
                 </a:solidFill>
                 <a:latin typeface="Calibri" pitchFamily="34" charset="0"/>
                 <a:ea typeface="Calibri" pitchFamily="34" charset="-122"/>
@@ -18527,13 +18439,11 @@
             </a:avLst>
           </a:prstGeom>
           <a:solidFill>
-            <a:srgbClr val="0E1F3D">
-              <a:alpha val="85000"/>
-            </a:srgbClr>
+            <a:srgbClr val="F1F5F9"/>
           </a:solidFill>
           <a:ln w="12700">
             <a:solidFill>
-              <a:srgbClr val="1E3A5F"/>
+              <a:srgbClr val="D6DEE8"/>
             </a:solidFill>
             <a:prstDash val="solid"/>
           </a:ln>
@@ -18566,7 +18476,7 @@
             <a:r>
               <a:rPr lang="en-US" sz="2800" b="1" dirty="0">
                 <a:solidFill>
-                  <a:srgbClr val="38BDF8"/>
+                  <a:srgbClr val="0E7490"/>
                 </a:solidFill>
                 <a:latin typeface="Arial" pitchFamily="34" charset="0"/>
                 <a:ea typeface="Arial" pitchFamily="34" charset="-122"/>
@@ -18605,7 +18515,7 @@
             <a:r>
               <a:rPr lang="en-US" sz="1300" b="1" dirty="0">
                 <a:solidFill>
-                  <a:srgbClr val="FFFFFF"/>
+                  <a:srgbClr val="0F172A"/>
                 </a:solidFill>
                 <a:latin typeface="Calibri" pitchFamily="34" charset="0"/>
                 <a:ea typeface="Calibri" pitchFamily="34" charset="-122"/>
@@ -18644,7 +18554,7 @@
             <a:r>
               <a:rPr lang="en-US" sz="1050" dirty="0">
                 <a:solidFill>
-                  <a:srgbClr val="CBD5E1"/>
+                  <a:srgbClr val="334155"/>
                 </a:solidFill>
                 <a:latin typeface="Calibri" pitchFamily="34" charset="0"/>
                 <a:ea typeface="Calibri" pitchFamily="34" charset="-122"/>
@@ -18673,13 +18583,11 @@
             </a:avLst>
           </a:prstGeom>
           <a:solidFill>
-            <a:srgbClr val="0E1F3D">
-              <a:alpha val="85000"/>
-            </a:srgbClr>
+            <a:srgbClr val="F1F5F9"/>
           </a:solidFill>
           <a:ln w="12700">
             <a:solidFill>
-              <a:srgbClr val="1E3A5F"/>
+              <a:srgbClr val="D6DEE8"/>
             </a:solidFill>
             <a:prstDash val="solid"/>
           </a:ln>
@@ -18712,7 +18620,7 @@
             <a:r>
               <a:rPr lang="en-US" sz="2800" b="1" dirty="0">
                 <a:solidFill>
-                  <a:srgbClr val="38BDF8"/>
+                  <a:srgbClr val="0E7490"/>
                 </a:solidFill>
                 <a:latin typeface="Arial" pitchFamily="34" charset="0"/>
                 <a:ea typeface="Arial" pitchFamily="34" charset="-122"/>
@@ -18751,7 +18659,7 @@
             <a:r>
               <a:rPr lang="en-US" sz="1300" b="1" dirty="0">
                 <a:solidFill>
-                  <a:srgbClr val="FFFFFF"/>
+                  <a:srgbClr val="0F172A"/>
                 </a:solidFill>
                 <a:latin typeface="Calibri" pitchFamily="34" charset="0"/>
                 <a:ea typeface="Calibri" pitchFamily="34" charset="-122"/>
@@ -18790,7 +18698,7 @@
             <a:r>
               <a:rPr lang="en-US" sz="1050" dirty="0">
                 <a:solidFill>
-                  <a:srgbClr val="CBD5E1"/>
+                  <a:srgbClr val="334155"/>
                 </a:solidFill>
                 <a:latin typeface="Calibri" pitchFamily="34" charset="0"/>
                 <a:ea typeface="Calibri" pitchFamily="34" charset="-122"/>
@@ -18819,13 +18727,11 @@
             </a:avLst>
           </a:prstGeom>
           <a:solidFill>
-            <a:srgbClr val="0E1F3D">
-              <a:alpha val="85000"/>
-            </a:srgbClr>
+            <a:srgbClr val="F1F5F9"/>
           </a:solidFill>
           <a:ln w="12700">
             <a:solidFill>
-              <a:srgbClr val="1E3A5F"/>
+              <a:srgbClr val="D6DEE8"/>
             </a:solidFill>
             <a:prstDash val="solid"/>
           </a:ln>
@@ -18858,7 +18764,7 @@
             <a:r>
               <a:rPr lang="en-US" sz="2800" b="1" dirty="0">
                 <a:solidFill>
-                  <a:srgbClr val="38BDF8"/>
+                  <a:srgbClr val="0E7490"/>
                 </a:solidFill>
                 <a:latin typeface="Arial" pitchFamily="34" charset="0"/>
                 <a:ea typeface="Arial" pitchFamily="34" charset="-122"/>
@@ -18897,7 +18803,7 @@
             <a:r>
               <a:rPr lang="en-US" sz="1300" b="1" dirty="0">
                 <a:solidFill>
-                  <a:srgbClr val="FFFFFF"/>
+                  <a:srgbClr val="0F172A"/>
                 </a:solidFill>
                 <a:latin typeface="Calibri" pitchFamily="34" charset="0"/>
                 <a:ea typeface="Calibri" pitchFamily="34" charset="-122"/>
@@ -18936,7 +18842,7 @@
             <a:r>
               <a:rPr lang="en-US" sz="1050" dirty="0">
                 <a:solidFill>
-                  <a:srgbClr val="CBD5E1"/>
+                  <a:srgbClr val="334155"/>
                 </a:solidFill>
                 <a:latin typeface="Calibri" pitchFamily="34" charset="0"/>
                 <a:ea typeface="Calibri" pitchFamily="34" charset="-122"/>
@@ -18975,7 +18881,7 @@
             <a:r>
               <a:rPr lang="en-US" sz="1100" b="1" spc="150" kern="0" dirty="0">
                 <a:solidFill>
-                  <a:srgbClr val="38BDF8"/>
+                  <a:srgbClr val="0E7490"/>
                 </a:solidFill>
                 <a:latin typeface="Calibri" pitchFamily="34" charset="0"/>
                 <a:ea typeface="Calibri" pitchFamily="34" charset="-122"/>
@@ -19038,7 +18944,7 @@
             <a:r>
               <a:rPr lang="en-US" sz="1050" dirty="0">
                 <a:solidFill>
-                  <a:srgbClr val="FFFFFF"/>
+                  <a:srgbClr val="0F172A"/>
                 </a:solidFill>
                 <a:latin typeface="Calibri" pitchFamily="34" charset="0"/>
                 <a:ea typeface="Calibri" pitchFamily="34" charset="-122"/>
@@ -19101,7 +19007,7 @@
             <a:r>
               <a:rPr lang="en-US" sz="1050" dirty="0">
                 <a:solidFill>
-                  <a:srgbClr val="FFFFFF"/>
+                  <a:srgbClr val="0F172A"/>
                 </a:solidFill>
                 <a:latin typeface="Calibri" pitchFamily="34" charset="0"/>
                 <a:ea typeface="Calibri" pitchFamily="34" charset="-122"/>
@@ -19164,7 +19070,7 @@
             <a:r>
               <a:rPr lang="en-US" sz="1050" dirty="0">
                 <a:solidFill>
-                  <a:srgbClr val="FFFFFF"/>
+                  <a:srgbClr val="0F172A"/>
                 </a:solidFill>
                 <a:latin typeface="Calibri" pitchFamily="34" charset="0"/>
                 <a:ea typeface="Calibri" pitchFamily="34" charset="-122"/>
@@ -19227,7 +19133,7 @@
             <a:r>
               <a:rPr lang="en-US" sz="1050" dirty="0">
                 <a:solidFill>
-                  <a:srgbClr val="FFFFFF"/>
+                  <a:srgbClr val="0F172A"/>
                 </a:solidFill>
                 <a:latin typeface="Calibri" pitchFamily="34" charset="0"/>
                 <a:ea typeface="Calibri" pitchFamily="34" charset="-122"/>
@@ -19256,18 +19162,18 @@
             </a:avLst>
           </a:prstGeom>
           <a:solidFill>
-            <a:srgbClr val="020617"/>
+            <a:srgbClr val="0F172A"/>
           </a:solidFill>
           <a:ln w="12700">
             <a:solidFill>
-              <a:srgbClr val="38BDF8"/>
+              <a:srgbClr val="0F172A"/>
             </a:solidFill>
             <a:prstDash val="solid"/>
           </a:ln>
           <a:effectLst>
-            <a:outerShdw sx="100000" sy="100000" kx="0" ky="0" algn="bl" rotWithShape="0" blurRad="177800" dist="50800" dir="5400000">
-              <a:srgbClr val="38BDF8">
-                <a:alpha val="35000"/>
+            <a:outerShdw sx="100000" sy="100000" kx="0" ky="0" algn="bl" rotWithShape="0" blurRad="127000" dist="25400" dir="5400000">
+              <a:srgbClr val="0F172A">
+                <a:alpha val="16000"/>
               </a:srgbClr>
             </a:outerShdw>
           </a:effectLst>
@@ -19324,7 +19230,7 @@
             <a:r>
               <a:rPr lang="en-US" sz="1050" dirty="0">
                 <a:solidFill>
-                  <a:srgbClr val="94A3B8"/>
+                  <a:srgbClr val="64748B"/>
                 </a:solidFill>
                 <a:latin typeface="Calibri" pitchFamily="34" charset="0"/>
                 <a:ea typeface="Calibri" pitchFamily="34" charset="-122"/>
@@ -19353,18 +19259,18 @@
             </a:avLst>
           </a:prstGeom>
           <a:solidFill>
-            <a:srgbClr val="020617"/>
+            <a:srgbClr val="0F172A"/>
           </a:solidFill>
           <a:ln w="12700">
             <a:solidFill>
-              <a:srgbClr val="38BDF8"/>
+              <a:srgbClr val="0F172A"/>
             </a:solidFill>
             <a:prstDash val="solid"/>
           </a:ln>
           <a:effectLst>
-            <a:outerShdw sx="100000" sy="100000" kx="0" ky="0" algn="bl" rotWithShape="0" blurRad="177800" dist="50800" dir="5400000">
-              <a:srgbClr val="38BDF8">
-                <a:alpha val="35000"/>
+            <a:outerShdw sx="100000" sy="100000" kx="0" ky="0" algn="bl" rotWithShape="0" blurRad="127000" dist="25400" dir="5400000">
+              <a:srgbClr val="0F172A">
+                <a:alpha val="16000"/>
               </a:srgbClr>
             </a:outerShdw>
           </a:effectLst>
@@ -19421,7 +19327,7 @@
             <a:r>
               <a:rPr lang="en-US" sz="1050" dirty="0">
                 <a:solidFill>
-                  <a:srgbClr val="94A3B8"/>
+                  <a:srgbClr val="64748B"/>
                 </a:solidFill>
                 <a:latin typeface="Calibri" pitchFamily="34" charset="0"/>
                 <a:ea typeface="Calibri" pitchFamily="34" charset="-122"/>
@@ -19463,7 +19369,7 @@
             <a:lvl1pPr>
               <a:defRPr sz="900">
                 <a:solidFill>
-                  <a:srgbClr val="94A3B8"/>
+                  <a:srgbClr val="64748B"/>
                 </a:solidFill>
               </a:defRPr>
             </a:lvl1pPr>
@@ -19487,47 +19393,47 @@
 </file>
 
 <file path=ppt/theme/theme1.xml><?xml version="1.0" encoding="utf-8"?>
-<a:theme xmlns:a="http://schemas.openxmlformats.org/drawingml/2006/main" name="Medreach Night">
+<a:theme xmlns:a="http://schemas.openxmlformats.org/drawingml/2006/main" name="Medreach Day">
   <a:themeElements>
-    <a:clrScheme name="Medreach Night">
+    <a:clrScheme name="Medreach Day">
       <a:dk1>
-        <a:srgbClr val="07122A"/>
+        <a:srgbClr val="0F172A"/>
       </a:dk1>
       <a:lt1>
         <a:srgbClr val="FFFFFF"/>
       </a:lt1>
       <a:dk2>
-        <a:srgbClr val="0F2440"/>
+        <a:srgbClr val="1E293B"/>
       </a:dk2>
       <a:lt2>
-        <a:srgbClr val="CBD5E1"/>
+        <a:srgbClr val="F1F5F9"/>
       </a:lt2>
       <a:accent1>
-        <a:srgbClr val="38BDF8"/>
+        <a:srgbClr val="0E7490"/>
       </a:accent1>
       <a:accent2>
-        <a:srgbClr val="F87171"/>
+        <a:srgbClr val="DC2626"/>
       </a:accent2>
       <a:accent3>
-        <a:srgbClr val="60A5FA"/>
+        <a:srgbClr val="2563EB"/>
       </a:accent3>
       <a:accent4>
-        <a:srgbClr val="FBBF24"/>
+        <a:srgbClr val="D97706"/>
       </a:accent4>
       <a:accent5>
-        <a:srgbClr val="A78BFA"/>
+        <a:srgbClr val="7C3AED"/>
       </a:accent5>
       <a:accent6>
-        <a:srgbClr val="34D399"/>
+        <a:srgbClr val="059669"/>
       </a:accent6>
       <a:hlink>
-        <a:srgbClr val="38BDF8"/>
+        <a:srgbClr val="0E7490"/>
       </a:hlink>
       <a:folHlink>
-        <a:srgbClr val="A78BFA"/>
+        <a:srgbClr val="7C3AED"/>
       </a:folHlink>
     </a:clrScheme>
-    <a:fontScheme name="Medreach Night">
+    <a:fontScheme name="Medreach Day">
       <a:majorFont>
         <a:latin typeface="Arial"/>
         <a:ea typeface=""/>

--- a/public/downloads/Medreach-Presentation-Final.pptx
+++ b/public/downloads/Medreach-Presentation-Final.pptx
@@ -2480,7 +2480,7 @@
                 <a:ea typeface="Calibri" pitchFamily="34" charset="-122"/>
                 <a:cs typeface="Calibri" pitchFamily="34" charset="-120"/>
               </a:rPr>
-              <a:t>Live: medreach-wtne.onrender.com   |   github.com/prakharporwal518-collab/Medreach</a:t>
+              <a:t>Live: medreach-2.onrender.com   |   github.com/prakharporwal518-collab/Medreach</a:t>
             </a:r>
             <a:endParaRPr lang="en-US" sz="1200" dirty="0"/>
           </a:p>
@@ -3564,7 +3564,7 @@
                 <a:ea typeface="Calibri" pitchFamily="34" charset="-122"/>
                 <a:cs typeface="Calibri" pitchFamily="34" charset="-120"/>
               </a:rPr>
-              <a:t>medreach-wtne.onrender.com</a:t>
+              <a:t>medreach-2.onrender.com</a:t>
             </a:r>
             <a:pPr indent="0" marL="0">
               <a:buNone/>
@@ -4766,7 +4766,7 @@
                 <a:ea typeface="Calibri" pitchFamily="34" charset="-122"/>
                 <a:cs typeface="Calibri" pitchFamily="34" charset="-120"/>
               </a:rPr>
-              <a:t>medreach-wtne.onrender.com</a:t>
+              <a:t>medreach-2.onrender.com</a:t>
             </a:r>
             <a:endParaRPr lang="en-US" sz="1200" dirty="0"/>
           </a:p>
